--- a/static/portfolio/kangmin-kim-portfolio-ko.pptx
+++ b/static/portfolio/kangmin-kim-portfolio-ko.pptx
@@ -3265,8 +3265,8 @@
                 <a:solidFill>
                   <a:srgbClr val="93B4F5"/>
                 </a:solidFill>
-                <a:latin typeface="맑은 고딕"/>
-                <a:ea typeface="맑은 고딕"/>
+                <a:latin typeface="Pretendard"/>
+                <a:ea typeface="Pretendard"/>
               </a:rPr>
               <a:t>TECHNICAL PORTFOLIO · 2026 · PERSONAL REPOSITORIES</a:t>
             </a:r>
@@ -3301,8 +3301,8 @@
                 <a:solidFill>
                   <a:srgbClr val="FFFFFF"/>
                 </a:solidFill>
-                <a:latin typeface="맑은 고딕"/>
-                <a:ea typeface="맑은 고딕"/>
+                <a:latin typeface="Pretendard"/>
+                <a:ea typeface="Pretendard"/>
               </a:rPr>
               <a:t>보안 × AI 엔지니어  김강민</a:t>
             </a:r>
@@ -3314,8 +3314,8 @@
                 <a:solidFill>
                   <a:srgbClr val="C9D6EE"/>
                 </a:solidFill>
-                <a:latin typeface="맑은 고딕"/>
-                <a:ea typeface="맑은 고딕"/>
+                <a:latin typeface="Pretendard"/>
+                <a:ea typeface="Pretendard"/>
               </a:rPr>
               <a:t>SIEM · SOAR · EDR · 포렌식을 제품에서 개발하고, 같은 것을 개인 서버에 처음부터 조립했다</a:t>
             </a:r>
@@ -3350,8 +3350,8 @@
                 <a:solidFill>
                   <a:srgbClr val="A8B8D8"/>
                 </a:solidFill>
-                <a:latin typeface="맑은 고딕"/>
-                <a:ea typeface="맑은 고딕"/>
+                <a:latin typeface="Pretendard"/>
+                <a:ea typeface="Pretendard"/>
               </a:rPr>
               <a:t>이 덱의 모든 자료는 개인 저장소(github.com/adorahelen · 26개)에서 나온다 — 회사 산출물 0건</a:t>
             </a:r>
@@ -3406,8 +3406,8 @@
                 <a:solidFill>
                   <a:srgbClr val="BFD2F2"/>
                 </a:solidFill>
-                <a:latin typeface="맑은 고딕"/>
-                <a:ea typeface="맑은 고딕"/>
+                <a:latin typeface="Pretendard"/>
+                <a:ea typeface="Pretendard"/>
               </a:rPr>
               <a:t>SIEM / SOAR</a:t>
             </a:r>
@@ -3462,8 +3462,8 @@
                 <a:solidFill>
                   <a:srgbClr val="BFD2F2"/>
                 </a:solidFill>
-                <a:latin typeface="맑은 고딕"/>
-                <a:ea typeface="맑은 고딕"/>
+                <a:latin typeface="Pretendard"/>
+                <a:ea typeface="Pretendard"/>
               </a:rPr>
               <a:t>EDR · 엔드포인트</a:t>
             </a:r>
@@ -3518,8 +3518,8 @@
                 <a:solidFill>
                   <a:srgbClr val="BFD2F2"/>
                 </a:solidFill>
-                <a:latin typeface="맑은 고딕"/>
-                <a:ea typeface="맑은 고딕"/>
+                <a:latin typeface="Pretendard"/>
+                <a:ea typeface="Pretendard"/>
               </a:rPr>
               <a:t>디지털 포렌식</a:t>
             </a:r>
@@ -3574,8 +3574,8 @@
                 <a:solidFill>
                   <a:srgbClr val="BFD2F2"/>
                 </a:solidFill>
-                <a:latin typeface="맑은 고딕"/>
-                <a:ea typeface="맑은 고딕"/>
+                <a:latin typeface="Pretendard"/>
+                <a:ea typeface="Pretendard"/>
               </a:rPr>
               <a:t>온프레미스 LLM</a:t>
             </a:r>
@@ -3630,8 +3630,8 @@
                 <a:solidFill>
                   <a:srgbClr val="BFD2F2"/>
                 </a:solidFill>
-                <a:latin typeface="맑은 고딕"/>
-                <a:ea typeface="맑은 고딕"/>
+                <a:latin typeface="Pretendard"/>
+                <a:ea typeface="Pretendard"/>
               </a:rPr>
               <a:t>Go · Python · C++</a:t>
             </a:r>
@@ -3686,8 +3686,8 @@
                 <a:solidFill>
                   <a:srgbClr val="BFD2F2"/>
                 </a:solidFill>
-                <a:latin typeface="맑은 고딕"/>
-                <a:ea typeface="맑은 고딕"/>
+                <a:latin typeface="Pretendard"/>
+                <a:ea typeface="Pretendard"/>
               </a:rPr>
               <a:t>홈서버 운영</a:t>
             </a:r>
@@ -3722,8 +3722,8 @@
                 <a:solidFill>
                   <a:srgbClr val="FFFFFF"/>
                 </a:solidFill>
-                <a:latin typeface="맑은 고딕"/>
-                <a:ea typeface="맑은 고딕"/>
+                <a:latin typeface="Pretendard"/>
+                <a:ea typeface="Pretendard"/>
               </a:rPr>
               <a:t>github.com/adorahelen</a:t>
             </a:r>
@@ -3864,8 +3864,8 @@
                 <a:solidFill>
                   <a:srgbClr val="2563EB"/>
                 </a:solidFill>
-                <a:latin typeface="맑은 고딕"/>
-                <a:ea typeface="맑은 고딕"/>
+                <a:latin typeface="Pretendard"/>
+                <a:ea typeface="Pretendard"/>
               </a:rPr>
               <a:t>PROJECT 04 · 개인 (adorahelen/security-labs)</a:t>
             </a:r>
@@ -3900,8 +3900,8 @@
                 <a:solidFill>
                   <a:srgbClr val="1F2A44"/>
                 </a:solidFill>
-                <a:latin typeface="맑은 고딕"/>
-                <a:ea typeface="맑은 고딕"/>
+                <a:latin typeface="Pretendard"/>
+                <a:ea typeface="Pretendard"/>
               </a:rPr>
               <a:t>security-labs — 디지털 포렌식 · 암호 구현</a:t>
             </a:r>
@@ -3936,8 +3936,8 @@
                 <a:solidFill>
                   <a:srgbClr val="5B667A"/>
                 </a:solidFill>
-                <a:latin typeface="맑은 고딕"/>
-                <a:ea typeface="맑은 고딕"/>
+                <a:latin typeface="Pretendard"/>
+                <a:ea typeface="Pretendard"/>
               </a:rPr>
               <a:t>9</a:t>
             </a:r>
@@ -3972,8 +3972,8 @@
                 <a:solidFill>
                   <a:srgbClr val="1E40AF"/>
                 </a:solidFill>
-                <a:latin typeface="맑은 고딕"/>
-                <a:ea typeface="맑은 고딕"/>
+                <a:latin typeface="Pretendard"/>
+                <a:ea typeface="Pretendard"/>
               </a:rPr>
               <a:t>학회 발표 논문의 기반이 된 앱 포렌식 실습과, 표준 테스트 벡터로 검증한 암호 구현을 한 저장소로 합쳤다</a:t>
             </a:r>
@@ -4012,8 +4012,8 @@
                 <a:solidFill>
                   <a:srgbClr val="2563EB"/>
                 </a:solidFill>
-                <a:latin typeface="맑은 고딕"/>
-                <a:ea typeface="맑은 고딕"/>
+                <a:latin typeface="Pretendard"/>
+                <a:ea typeface="Pretendard"/>
               </a:rPr>
               <a:t>·  </a:t>
             </a:r>
@@ -4022,8 +4022,8 @@
                 <a:solidFill>
                   <a:srgbClr val="1F2A44"/>
                 </a:solidFill>
-                <a:latin typeface="맑은 고딕"/>
-                <a:ea typeface="맑은 고딕"/>
+                <a:latin typeface="Pretendard"/>
+                <a:ea typeface="Pretendard"/>
               </a:rPr>
               <a:t>Threads 앱 포렌식 — 루팅 Android 13 기기에서 adb+tar로 추출, 4단계 파이프라인(행위 모방 → 추출 → 디렉터리 분석 → 아티팩트 수집)</a:t>
             </a:r>
@@ -4039,8 +4039,8 @@
                 <a:solidFill>
                   <a:srgbClr val="2563EB"/>
                 </a:solidFill>
-                <a:latin typeface="맑은 고딕"/>
-                <a:ea typeface="맑은 고딕"/>
+                <a:latin typeface="Pretendard"/>
+                <a:ea typeface="Pretendard"/>
               </a:rPr>
               <a:t>·  </a:t>
             </a:r>
@@ -4049,8 +4049,8 @@
                 <a:solidFill>
                   <a:srgbClr val="1F2A44"/>
                 </a:solidFill>
-                <a:latin typeface="맑은 고딕"/>
-                <a:ea typeface="맑은 고딕"/>
+                <a:latin typeface="Pretendard"/>
+                <a:ea typeface="Pretendard"/>
               </a:rPr>
               <a:t>핵심 발견 — mdcore_messages의 data BLOB에 DM 본문이 평문 저장. 방·시각·발신자·본문이 모두 복원된다</a:t>
             </a:r>
@@ -4066,8 +4066,8 @@
                 <a:solidFill>
                   <a:srgbClr val="2563EB"/>
                 </a:solidFill>
-                <a:latin typeface="맑은 고딕"/>
-                <a:ea typeface="맑은 고딕"/>
+                <a:latin typeface="Pretendard"/>
+                <a:ea typeface="Pretendard"/>
               </a:rPr>
               <a:t>·  </a:t>
             </a:r>
@@ -4076,8 +4076,8 @@
                 <a:solidFill>
                   <a:srgbClr val="1F2A44"/>
                 </a:solidFill>
-                <a:latin typeface="맑은 고딕"/>
-                <a:ea typeface="맑은 고딕"/>
+                <a:latin typeface="Pretendard"/>
+                <a:ea typeface="Pretendard"/>
               </a:rPr>
               <a:t>WAL(dmm_database-wal)을 빼면 최신 메시지를 놓친다 — 본 DB만 보는 절차의 공백을 지적</a:t>
             </a:r>
@@ -4093,8 +4093,8 @@
                 <a:solidFill>
                   <a:srgbClr val="2563EB"/>
                 </a:solidFill>
-                <a:latin typeface="맑은 고딕"/>
-                <a:ea typeface="맑은 고딕"/>
+                <a:latin typeface="Pretendard"/>
+                <a:ea typeface="Pretendard"/>
               </a:rPr>
               <a:t>·  </a:t>
             </a:r>
@@ -4103,8 +4103,8 @@
                 <a:solidFill>
                   <a:srgbClr val="1F2A44"/>
                 </a:solidFill>
-                <a:latin typeface="맑은 고딕"/>
-                <a:ea typeface="맑은 고딕"/>
+                <a:latin typeface="Pretendard"/>
+                <a:ea typeface="Pretendard"/>
               </a:rPr>
               <a:t>선행연구 3편이 "모바일 분석은 수확이 적다"고 평가한 지점을, 최신 버전에서 평문 복원까지 해내 뒤집었다</a:t>
             </a:r>
@@ -4120,8 +4120,8 @@
                 <a:solidFill>
                   <a:srgbClr val="2563EB"/>
                 </a:solidFill>
-                <a:latin typeface="맑은 고딕"/>
-                <a:ea typeface="맑은 고딕"/>
+                <a:latin typeface="Pretendard"/>
+                <a:ea typeface="Pretendard"/>
               </a:rPr>
               <a:t>·  </a:t>
             </a:r>
@@ -4130,8 +4130,8 @@
                 <a:solidFill>
                   <a:srgbClr val="1F2A44"/>
                 </a:solidFill>
-                <a:latin typeface="맑은 고딕"/>
-                <a:ea typeface="맑은 고딕"/>
+                <a:latin typeface="Pretendard"/>
+                <a:ea typeface="Pretendard"/>
               </a:rPr>
               <a:t>같은 저장소에 Windows 브라우저 포렌식(VMware 이미징 + Sleuthkit inode 추적)과 AES-128 C 직접 구현을 함께 둔다</a:t>
             </a:r>
@@ -4212,8 +4212,8 @@
                 <a:solidFill>
                   <a:srgbClr val="1E40AF"/>
                 </a:solidFill>
-                <a:latin typeface="맑은 고딕"/>
-                <a:ea typeface="맑은 고딕"/>
+                <a:latin typeface="Pretendard"/>
+                <a:ea typeface="Pretendard"/>
               </a:rPr>
               <a:t>핵심 성과 · 실측</a:t>
             </a:r>
@@ -4252,8 +4252,8 @@
                 <a:solidFill>
                   <a:srgbClr val="2563EB"/>
                 </a:solidFill>
-                <a:latin typeface="맑은 고딕"/>
-                <a:ea typeface="맑은 고딕"/>
+                <a:latin typeface="Pretendard"/>
+                <a:ea typeface="Pretendard"/>
               </a:rPr>
               <a:t>·  </a:t>
             </a:r>
@@ -4262,8 +4262,8 @@
                 <a:solidFill>
                   <a:srgbClr val="1F2A44"/>
                 </a:solidFill>
-                <a:latin typeface="맑은 고딕"/>
-                <a:ea typeface="맑은 고딕"/>
+                <a:latin typeface="Pretendard"/>
+                <a:ea typeface="Pretendard"/>
               </a:rPr>
               <a:t>한국정보보호학회 동계학술대회(CISC-W'25) 제1저자 · 논문번호 328 · 구두발표 세션 「디지털 포렌식 I」</a:t>
             </a:r>
@@ -4279,8 +4279,8 @@
                 <a:solidFill>
                   <a:srgbClr val="2563EB"/>
                 </a:solidFill>
-                <a:latin typeface="맑은 고딕"/>
-                <a:ea typeface="맑은 고딕"/>
+                <a:latin typeface="Pretendard"/>
+                <a:ea typeface="Pretendard"/>
               </a:rPr>
               <a:t>·  </a:t>
             </a:r>
@@ -4289,8 +4289,8 @@
                 <a:solidFill>
                   <a:srgbClr val="1F2A44"/>
                 </a:solidFill>
-                <a:latin typeface="맑은 고딕"/>
-                <a:ea typeface="맑은 고딕"/>
+                <a:latin typeface="Pretendard"/>
+                <a:ea typeface="Pretendard"/>
               </a:rPr>
               <a:t>KISTI 한국과학기술정보연구원 원장상 수상</a:t>
             </a:r>
@@ -4306,8 +4306,8 @@
                 <a:solidFill>
                   <a:srgbClr val="2563EB"/>
                 </a:solidFill>
-                <a:latin typeface="맑은 고딕"/>
-                <a:ea typeface="맑은 고딕"/>
+                <a:latin typeface="Pretendard"/>
+                <a:ea typeface="Pretendard"/>
               </a:rPr>
               <a:t>·  </a:t>
             </a:r>
@@ -4316,8 +4316,8 @@
                 <a:solidFill>
                   <a:srgbClr val="1F2A44"/>
                 </a:solidFill>
-                <a:latin typeface="맑은 고딕"/>
-                <a:ea typeface="맑은 고딕"/>
+                <a:latin typeface="Pretendard"/>
+                <a:ea typeface="Pretendard"/>
               </a:rPr>
               <a:t>복원되는 사용자 행위 — 열람 게시글과 시점, DM 본문·발신자·시각, 미전송 대기 이미지, 인앱 검색어와 검색 시각</a:t>
             </a:r>
@@ -4333,8 +4333,8 @@
                 <a:solidFill>
                   <a:srgbClr val="2563EB"/>
                 </a:solidFill>
-                <a:latin typeface="맑은 고딕"/>
-                <a:ea typeface="맑은 고딕"/>
+                <a:latin typeface="Pretendard"/>
+                <a:ea typeface="Pretendard"/>
               </a:rPr>
               <a:t>·  </a:t>
             </a:r>
@@ -4343,8 +4343,8 @@
                 <a:solidFill>
                   <a:srgbClr val="1F2A44"/>
                 </a:solidFill>
-                <a:latin typeface="맑은 고딕"/>
-                <a:ea typeface="맑은 고딕"/>
+                <a:latin typeface="Pretendard"/>
+                <a:ea typeface="Pretendard"/>
               </a:rPr>
               <a:t>AES-128 ECB를 라운드 함수부터 구현 후 OpenSSL 대조, NIST CAVP KAT 벡터 자동 검증기까지 작성</a:t>
             </a:r>
@@ -4360,8 +4360,8 @@
                 <a:solidFill>
                   <a:srgbClr val="2563EB"/>
                 </a:solidFill>
-                <a:latin typeface="맑은 고딕"/>
-                <a:ea typeface="맑은 고딕"/>
+                <a:latin typeface="Pretendard"/>
+                <a:ea typeface="Pretendard"/>
               </a:rPr>
               <a:t>·  </a:t>
             </a:r>
@@ -4370,8 +4370,8 @@
                 <a:solidFill>
                   <a:srgbClr val="1F2A44"/>
                 </a:solidFill>
-                <a:latin typeface="맑은 고딕"/>
-                <a:ea typeface="맑은 고딕"/>
+                <a:latin typeface="Pretendard"/>
+                <a:ea typeface="Pretendard"/>
               </a:rPr>
               <a:t>한계를 명시 — Android 한정 · 정적 추출 중심. iOS 확장과 동적/네트워크 포렌식을 과제로 남김</a:t>
             </a:r>
@@ -4406,8 +4406,8 @@
                 <a:solidFill>
                   <a:srgbClr val="5B667A"/>
                 </a:solidFill>
-                <a:latin typeface="맑은 고딕"/>
-                <a:ea typeface="맑은 고딕"/>
+                <a:latin typeface="Pretendard"/>
+                <a:ea typeface="Pretendard"/>
               </a:rPr>
               <a:t>STACK</a:t>
             </a:r>
@@ -4462,8 +4462,8 @@
                 <a:solidFill>
                   <a:srgbClr val="1F2A44"/>
                 </a:solidFill>
-                <a:latin typeface="맑은 고딕"/>
-                <a:ea typeface="맑은 고딕"/>
+                <a:latin typeface="Pretendard"/>
+                <a:ea typeface="Pretendard"/>
               </a:rPr>
               <a:t>C</a:t>
             </a:r>
@@ -4518,8 +4518,8 @@
                 <a:solidFill>
                   <a:srgbClr val="1F2A44"/>
                 </a:solidFill>
-                <a:latin typeface="맑은 고딕"/>
-                <a:ea typeface="맑은 고딕"/>
+                <a:latin typeface="Pretendard"/>
+                <a:ea typeface="Pretendard"/>
               </a:rPr>
               <a:t>adb</a:t>
             </a:r>
@@ -4574,8 +4574,8 @@
                 <a:solidFill>
                   <a:srgbClr val="1F2A44"/>
                 </a:solidFill>
-                <a:latin typeface="맑은 고딕"/>
-                <a:ea typeface="맑은 고딕"/>
+                <a:latin typeface="Pretendard"/>
+                <a:ea typeface="Pretendard"/>
               </a:rPr>
               <a:t>SQLite</a:t>
             </a:r>
@@ -4630,8 +4630,8 @@
                 <a:solidFill>
                   <a:srgbClr val="1F2A44"/>
                 </a:solidFill>
-                <a:latin typeface="맑은 고딕"/>
-                <a:ea typeface="맑은 고딕"/>
+                <a:latin typeface="Pretendard"/>
+                <a:ea typeface="Pretendard"/>
               </a:rPr>
               <a:t>Sleuthkit</a:t>
             </a:r>
@@ -4686,8 +4686,8 @@
                 <a:solidFill>
                   <a:srgbClr val="1F2A44"/>
                 </a:solidFill>
-                <a:latin typeface="맑은 고딕"/>
-                <a:ea typeface="맑은 고딕"/>
+                <a:latin typeface="Pretendard"/>
+                <a:ea typeface="Pretendard"/>
               </a:rPr>
               <a:t>EnCase</a:t>
             </a:r>
@@ -4742,8 +4742,8 @@
                 <a:solidFill>
                   <a:srgbClr val="1F2A44"/>
                 </a:solidFill>
-                <a:latin typeface="맑은 고딕"/>
-                <a:ea typeface="맑은 고딕"/>
+                <a:latin typeface="Pretendard"/>
+                <a:ea typeface="Pretendard"/>
               </a:rPr>
               <a:t>DB Browser</a:t>
             </a:r>
@@ -4798,8 +4798,8 @@
                 <a:solidFill>
                   <a:srgbClr val="1F2A44"/>
                 </a:solidFill>
-                <a:latin typeface="맑은 고딕"/>
-                <a:ea typeface="맑은 고딕"/>
+                <a:latin typeface="Pretendard"/>
+                <a:ea typeface="Pretendard"/>
               </a:rPr>
               <a:t>VMware</a:t>
             </a:r>
@@ -4854,8 +4854,8 @@
                 <a:solidFill>
                   <a:srgbClr val="1F2A44"/>
                 </a:solidFill>
-                <a:latin typeface="맑은 고딕"/>
-                <a:ea typeface="맑은 고딕"/>
+                <a:latin typeface="Pretendard"/>
+                <a:ea typeface="Pretendard"/>
               </a:rPr>
               <a:t>OpenSSL</a:t>
             </a:r>
@@ -4910,8 +4910,8 @@
                 <a:solidFill>
                   <a:srgbClr val="1F2A44"/>
                 </a:solidFill>
-                <a:latin typeface="맑은 고딕"/>
-                <a:ea typeface="맑은 고딕"/>
+                <a:latin typeface="Pretendard"/>
+                <a:ea typeface="Pretendard"/>
               </a:rPr>
               <a:t>NIST CAVP</a:t>
             </a:r>
@@ -5052,8 +5052,8 @@
                 <a:solidFill>
                   <a:srgbClr val="2563EB"/>
                 </a:solidFill>
-                <a:latin typeface="맑은 고딕"/>
-                <a:ea typeface="맑은 고딕"/>
+                <a:latin typeface="Pretendard"/>
+                <a:ea typeface="Pretendard"/>
               </a:rPr>
               <a:t>PROJECT 04 · 개인 (adorahelen/security-labs)</a:t>
             </a:r>
@@ -5088,8 +5088,8 @@
                 <a:solidFill>
                   <a:srgbClr val="1F2A44"/>
                 </a:solidFill>
-                <a:latin typeface="맑은 고딕"/>
-                <a:ea typeface="맑은 고딕"/>
+                <a:latin typeface="Pretendard"/>
+                <a:ea typeface="Pretendard"/>
               </a:rPr>
               <a:t>Threads 앱 포렌식 — 아키텍처</a:t>
             </a:r>
@@ -5124,8 +5124,8 @@
                 <a:solidFill>
                   <a:srgbClr val="5B667A"/>
                 </a:solidFill>
-                <a:latin typeface="맑은 고딕"/>
-                <a:ea typeface="맑은 고딕"/>
+                <a:latin typeface="Pretendard"/>
+                <a:ea typeface="Pretendard"/>
               </a:rPr>
               <a:t>10</a:t>
             </a:r>
@@ -5182,8 +5182,8 @@
                 <a:solidFill>
                   <a:srgbClr val="1F2A44"/>
                 </a:solidFill>
-                <a:latin typeface="맑은 고딕"/>
-                <a:ea typeface="맑은 고딕"/>
+                <a:latin typeface="Pretendard"/>
+                <a:ea typeface="Pretendard"/>
               </a:rPr>
               <a:t>① 사용자 행위 모방</a:t>
             </a:r>
@@ -5195,8 +5195,8 @@
                 <a:solidFill>
                   <a:srgbClr val="5B667A"/>
                 </a:solidFill>
-                <a:latin typeface="맑은 고딕"/>
-                <a:ea typeface="맑은 고딕"/>
+                <a:latin typeface="Pretendard"/>
+                <a:ea typeface="Pretendard"/>
               </a:rPr>
               <a:t>게시물 · 팔로우 · DM</a:t>
             </a:r>
@@ -5253,8 +5253,8 @@
                 <a:solidFill>
                   <a:srgbClr val="1F2A44"/>
                 </a:solidFill>
-                <a:latin typeface="맑은 고딕"/>
-                <a:ea typeface="맑은 고딕"/>
+                <a:latin typeface="Pretendard"/>
+                <a:ea typeface="Pretendard"/>
               </a:rPr>
               <a:t>② 데이터 추출</a:t>
             </a:r>
@@ -5266,8 +5266,8 @@
                 <a:solidFill>
                   <a:srgbClr val="5B667A"/>
                 </a:solidFill>
-                <a:latin typeface="맑은 고딕"/>
-                <a:ea typeface="맑은 고딕"/>
+                <a:latin typeface="Pretendard"/>
+                <a:ea typeface="Pretendard"/>
               </a:rPr>
               <a:t>adb shell + tar → pull</a:t>
             </a:r>
@@ -5361,8 +5361,8 @@
                 <a:solidFill>
                   <a:srgbClr val="1F2A44"/>
                 </a:solidFill>
-                <a:latin typeface="맑은 고딕"/>
-                <a:ea typeface="맑은 고딕"/>
+                <a:latin typeface="Pretendard"/>
+                <a:ea typeface="Pretendard"/>
               </a:rPr>
               <a:t>③ 디렉터리 분석</a:t>
             </a:r>
@@ -5374,8 +5374,8 @@
                 <a:solidFill>
                   <a:srgbClr val="5B667A"/>
                 </a:solidFill>
-                <a:latin typeface="맑은 고딕"/>
-                <a:ea typeface="맑은 고딕"/>
+                <a:latin typeface="Pretendard"/>
+                <a:ea typeface="Pretendard"/>
               </a:rPr>
               <a:t>/data/data/&lt;pkg&gt; 구조화</a:t>
             </a:r>
@@ -5469,8 +5469,8 @@
                 <a:solidFill>
                   <a:srgbClr val="1F2A44"/>
                 </a:solidFill>
-                <a:latin typeface="맑은 고딕"/>
-                <a:ea typeface="맑은 고딕"/>
+                <a:latin typeface="Pretendard"/>
+                <a:ea typeface="Pretendard"/>
               </a:rPr>
               <a:t>④ 아티팩트 수집</a:t>
             </a:r>
@@ -5482,8 +5482,8 @@
                 <a:solidFill>
                   <a:srgbClr val="5B667A"/>
                 </a:solidFill>
-                <a:latin typeface="맑은 고딕"/>
-                <a:ea typeface="맑은 고딕"/>
+                <a:latin typeface="Pretendard"/>
+                <a:ea typeface="Pretendard"/>
               </a:rPr>
               <a:t>DB · 파일 · 설정</a:t>
             </a:r>
@@ -5603,8 +5603,8 @@
                 <a:solidFill>
                   <a:srgbClr val="5B667A"/>
                 </a:solidFill>
-                <a:latin typeface="맑은 고딕"/>
-                <a:ea typeface="맑은 고딕"/>
+                <a:latin typeface="Pretendard"/>
+                <a:ea typeface="Pretendard"/>
               </a:rPr>
               <a:t>databases/</a:t>
             </a:r>
@@ -5616,8 +5616,8 @@
                 <a:solidFill>
                   <a:srgbClr val="1F2A44"/>
                 </a:solidFill>
-                <a:latin typeface="맑은 고딕"/>
-                <a:ea typeface="맑은 고딕"/>
+                <a:latin typeface="Pretendard"/>
+                <a:ea typeface="Pretendard"/>
               </a:rPr>
               <a:t>mdcore_messages</a:t>
             </a:r>
@@ -5629,8 +5629,8 @@
                 <a:solidFill>
                   <a:srgbClr val="1F2A44"/>
                 </a:solidFill>
-                <a:latin typeface="맑은 고딕"/>
-                <a:ea typeface="맑은 고딕"/>
+                <a:latin typeface="Pretendard"/>
+                <a:ea typeface="Pretendard"/>
               </a:rPr>
               <a:t>DM 본문 평문 · thread_id · timestamp · 발신자</a:t>
             </a:r>
@@ -5713,8 +5713,8 @@
                 <a:solidFill>
                   <a:srgbClr val="5B667A"/>
                 </a:solidFill>
-                <a:latin typeface="맑은 고딕"/>
-                <a:ea typeface="맑은 고딕"/>
+                <a:latin typeface="Pretendard"/>
+                <a:ea typeface="Pretendard"/>
               </a:rPr>
               <a:t>databases/</a:t>
             </a:r>
@@ -5726,8 +5726,8 @@
                 <a:solidFill>
                   <a:srgbClr val="1F2A44"/>
                 </a:solidFill>
-                <a:latin typeface="맑은 고딕"/>
-                <a:ea typeface="맑은 고딕"/>
+                <a:latin typeface="Pretendard"/>
+                <a:ea typeface="Pretendard"/>
               </a:rPr>
               <a:t>contact_database</a:t>
             </a:r>
@@ -5739,8 +5739,8 @@
                 <a:solidFill>
                   <a:srgbClr val="1F2A44"/>
                 </a:solidFill>
-                <a:latin typeface="맑은 고딕"/>
-                <a:ea typeface="맑은 고딕"/>
+                <a:latin typeface="Pretendard"/>
+                <a:ea typeface="Pretendard"/>
               </a:rPr>
               <a:t>팔로잉 관계 · 내부 ID ↔ 계정 매핑</a:t>
             </a:r>
@@ -5823,8 +5823,8 @@
                 <a:solidFill>
                   <a:srgbClr val="5B667A"/>
                 </a:solidFill>
-                <a:latin typeface="맑은 고딕"/>
-                <a:ea typeface="맑은 고딕"/>
+                <a:latin typeface="Pretendard"/>
+                <a:ea typeface="Pretendard"/>
               </a:rPr>
               <a:t>databases/</a:t>
             </a:r>
@@ -5836,8 +5836,8 @@
                 <a:solidFill>
                   <a:srgbClr val="1F2A44"/>
                 </a:solidFill>
-                <a:latin typeface="맑은 고딕"/>
-                <a:ea typeface="맑은 고딕"/>
+                <a:latin typeface="Pretendard"/>
+                <a:ea typeface="Pretendard"/>
               </a:rPr>
               <a:t>barcelona_feed_items</a:t>
             </a:r>
@@ -5849,8 +5849,8 @@
                 <a:solidFill>
                   <a:srgbClr val="1F2A44"/>
                 </a:solidFill>
-                <a:latin typeface="맑은 고딕"/>
-                <a:ea typeface="맑은 고딕"/>
+                <a:latin typeface="Pretendard"/>
+                <a:ea typeface="Pretendard"/>
               </a:rPr>
               <a:t>열람한 게시글과 열람 시점</a:t>
             </a:r>
@@ -5933,8 +5933,8 @@
                 <a:solidFill>
                   <a:srgbClr val="5B667A"/>
                 </a:solidFill>
-                <a:latin typeface="맑은 고딕"/>
-                <a:ea typeface="맑은 고딕"/>
+                <a:latin typeface="Pretendard"/>
+                <a:ea typeface="Pretendard"/>
               </a:rPr>
               <a:t>databases/</a:t>
             </a:r>
@@ -5946,8 +5946,8 @@
                 <a:solidFill>
                   <a:srgbClr val="1F2A44"/>
                 </a:solidFill>
-                <a:latin typeface="맑은 고딕"/>
-                <a:ea typeface="맑은 고딕"/>
+                <a:latin typeface="Pretendard"/>
+                <a:ea typeface="Pretendard"/>
               </a:rPr>
               <a:t>dmm_database-wal</a:t>
             </a:r>
@@ -5959,8 +5959,8 @@
                 <a:solidFill>
                   <a:srgbClr val="1F2A44"/>
                 </a:solidFill>
-                <a:latin typeface="맑은 고딕"/>
-                <a:ea typeface="맑은 고딕"/>
+                <a:latin typeface="Pretendard"/>
+                <a:ea typeface="Pretendard"/>
               </a:rPr>
               <a:t>본 DB 미반영 최신 메시지 · 전송 이미지 경로</a:t>
             </a:r>
@@ -6043,8 +6043,8 @@
                 <a:solidFill>
                   <a:srgbClr val="5B667A"/>
                 </a:solidFill>
-                <a:latin typeface="맑은 고딕"/>
-                <a:ea typeface="맑은 고딕"/>
+                <a:latin typeface="Pretendard"/>
+                <a:ea typeface="Pretendard"/>
               </a:rPr>
               <a:t>files/ · cache/</a:t>
             </a:r>
@@ -6056,8 +6056,8 @@
                 <a:solidFill>
                   <a:srgbClr val="1F2A44"/>
                 </a:solidFill>
-                <a:latin typeface="맑은 고딕"/>
-                <a:ea typeface="맑은 고딕"/>
+                <a:latin typeface="Pretendard"/>
+                <a:ea typeface="Pretendard"/>
               </a:rPr>
               <a:t>creation_file_manager · tmp_photo</a:t>
             </a:r>
@@ -6069,8 +6069,8 @@
                 <a:solidFill>
                   <a:srgbClr val="1F2A44"/>
                 </a:solidFill>
-                <a:latin typeface="맑은 고딕"/>
-                <a:ea typeface="맑은 고딕"/>
+                <a:latin typeface="Pretendard"/>
+                <a:ea typeface="Pretendard"/>
               </a:rPr>
               <a:t>전송 이미지 · 미전송 대기 이미지 (파일명에 시각)</a:t>
             </a:r>
@@ -6153,8 +6153,8 @@
                 <a:solidFill>
                   <a:srgbClr val="5B667A"/>
                 </a:solidFill>
-                <a:latin typeface="맑은 고딕"/>
-                <a:ea typeface="맑은 고딕"/>
+                <a:latin typeface="Pretendard"/>
+                <a:ea typeface="Pretendard"/>
               </a:rPr>
               <a:t>shared_prefs/</a:t>
             </a:r>
@@ -6166,8 +6166,8 @@
                 <a:solidFill>
                   <a:srgbClr val="1F2A44"/>
                 </a:solidFill>
-                <a:latin typeface="맑은 고딕"/>
-                <a:ea typeface="맑은 고딕"/>
+                <a:latin typeface="Pretendard"/>
+                <a:ea typeface="Pretendard"/>
               </a:rPr>
               <a:t>USER_PREFERENCES.xml</a:t>
             </a:r>
@@ -6179,8 +6179,8 @@
                 <a:solidFill>
                   <a:srgbClr val="1F2A44"/>
                 </a:solidFill>
-                <a:latin typeface="맑은 고딕"/>
-                <a:ea typeface="맑은 고딕"/>
+                <a:latin typeface="Pretendard"/>
+                <a:ea typeface="Pretendard"/>
               </a:rPr>
               <a:t>인앱 검색어 전체 + 검색 시각 · 종료 직전 화면</a:t>
             </a:r>
@@ -6215,8 +6215,8 @@
                 <a:solidFill>
                   <a:srgbClr val="B45309"/>
                 </a:solidFill>
-                <a:latin typeface="맑은 고딕"/>
-                <a:ea typeface="맑은 고딕"/>
+                <a:latin typeface="Pretendard"/>
+                <a:ea typeface="Pretendard"/>
               </a:rPr>
               <a:t>노란 칸이 이 연구의 핵심 — 상용 도구가 보지 않는 WAL과, 암호화됐을 것으로 여겨지던 DM 본문</a:t>
             </a:r>
@@ -6357,8 +6357,8 @@
                 <a:solidFill>
                   <a:srgbClr val="2563EB"/>
                 </a:solidFill>
-                <a:latin typeface="맑은 고딕"/>
-                <a:ea typeface="맑은 고딕"/>
+                <a:latin typeface="Pretendard"/>
+                <a:ea typeface="Pretendard"/>
               </a:rPr>
               <a:t>PROJECT 05 · 개인 (adorahelen/agent-console)</a:t>
             </a:r>
@@ -6393,8 +6393,8 @@
                 <a:solidFill>
                   <a:srgbClr val="1F2A44"/>
                 </a:solidFill>
-                <a:latin typeface="맑은 고딕"/>
-                <a:ea typeface="맑은 고딕"/>
+                <a:latin typeface="Pretendard"/>
+                <a:ea typeface="Pretendard"/>
               </a:rPr>
               <a:t>agent-console — 카트리지형 온프레미스 AI 에이전트 콘솔</a:t>
             </a:r>
@@ -6429,8 +6429,8 @@
                 <a:solidFill>
                   <a:srgbClr val="5B667A"/>
                 </a:solidFill>
-                <a:latin typeface="맑은 고딕"/>
-                <a:ea typeface="맑은 고딕"/>
+                <a:latin typeface="Pretendard"/>
+                <a:ea typeface="Pretendard"/>
               </a:rPr>
               <a:t>11</a:t>
             </a:r>
@@ -6465,8 +6465,8 @@
                 <a:solidFill>
                   <a:srgbClr val="1E40AF"/>
                 </a:solidFill>
-                <a:latin typeface="맑은 고딕"/>
-                <a:ea typeface="맑은 고딕"/>
+                <a:latin typeface="Pretendard"/>
+                <a:ea typeface="Pretendard"/>
               </a:rPr>
               <a:t>엔진(RAG·intent·멀티백엔드 서빙)은 고정하고, 도메인·지식·모델 세 슬롯만 카트리지로 갈아 끼운다</a:t>
             </a:r>
@@ -6505,8 +6505,8 @@
                 <a:solidFill>
                   <a:srgbClr val="2563EB"/>
                 </a:solidFill>
-                <a:latin typeface="맑은 고딕"/>
-                <a:ea typeface="맑은 고딕"/>
+                <a:latin typeface="Pretendard"/>
+                <a:ea typeface="Pretendard"/>
               </a:rPr>
               <a:t>·  </a:t>
             </a:r>
@@ -6515,10 +6515,10 @@
                 <a:solidFill>
                   <a:srgbClr val="1F2A44"/>
                 </a:solidFill>
-                <a:latin typeface="맑은 고딕"/>
-                <a:ea typeface="맑은 고딕"/>
-              </a:rPr>
-              <a:t>실운영 SIEM 관제 에이전트의 아키텍처를 물려받아 도메인 종속만 걷어냈다 — 원본 도메인은 첫 카트리지로 보존, "도메인 전체가 카트리지 하나"임을 실증</a:t>
+                <a:latin typeface="Pretendard"/>
+                <a:ea typeface="Pretendard"/>
+              </a:rPr>
+              <a:t>도메인에 종속된 에이전트 구조에서 도메인만 걷어내 범용 엔진으로 재설계 — 걷어낸 도메인은 첫 카트리지로 보존해 "도메인 전체가 카트리지 하나"임을 실증</a:t>
             </a:r>
           </a:p>
           <a:p>
@@ -6532,8 +6532,8 @@
                 <a:solidFill>
                   <a:srgbClr val="2563EB"/>
                 </a:solidFill>
-                <a:latin typeface="맑은 고딕"/>
-                <a:ea typeface="맑은 고딕"/>
+                <a:latin typeface="Pretendard"/>
+                <a:ea typeface="Pretendard"/>
               </a:rPr>
               <a:t>·  </a:t>
             </a:r>
@@ -6542,8 +6542,8 @@
                 <a:solidFill>
                   <a:srgbClr val="1F2A44"/>
                 </a:solidFill>
-                <a:latin typeface="맑은 고딕"/>
-                <a:ea typeface="맑은 고딕"/>
+                <a:latin typeface="Pretendard"/>
+                <a:ea typeface="Pretendard"/>
               </a:rPr>
               <a:t>3슬롯 설계 — 프롬프트(config 경로 18개 외부화) · 지식(bulk upload → 임베딩 → Qdrant) · 모델(config 한 줄). 슬롯 교체에 코드 수정이 없다</a:t>
             </a:r>
@@ -6559,8 +6559,8 @@
                 <a:solidFill>
                   <a:srgbClr val="2563EB"/>
                 </a:solidFill>
-                <a:latin typeface="맑은 고딕"/>
-                <a:ea typeface="맑은 고딕"/>
+                <a:latin typeface="Pretendard"/>
+                <a:ea typeface="Pretendard"/>
               </a:rPr>
               <a:t>·  </a:t>
             </a:r>
@@ -6569,8 +6569,8 @@
                 <a:solidFill>
                   <a:srgbClr val="1F2A44"/>
                 </a:solidFill>
-                <a:latin typeface="맑은 고딕"/>
-                <a:ea typeface="맑은 고딕"/>
+                <a:latin typeface="Pretendard"/>
+                <a:ea typeface="Pretendard"/>
               </a:rPr>
               <a:t>install.sh가 VRAM·RAM을 감지해 HW 티어를 판정하고 프리셋을 자동 선택 — 16GB 장비는 26B + n-cpu-moe 오프로딩으로 확정</a:t>
             </a:r>
@@ -6586,8 +6586,8 @@
                 <a:solidFill>
                   <a:srgbClr val="2563EB"/>
                 </a:solidFill>
-                <a:latin typeface="맑은 고딕"/>
-                <a:ea typeface="맑은 고딕"/>
+                <a:latin typeface="Pretendard"/>
+                <a:ea typeface="Pretendard"/>
               </a:rPr>
               <a:t>·  </a:t>
             </a:r>
@@ -6596,8 +6596,8 @@
                 <a:solidFill>
                   <a:srgbClr val="1F2A44"/>
                 </a:solidFill>
-                <a:latin typeface="맑은 고딕"/>
-                <a:ea typeface="맑은 고딕"/>
+                <a:latin typeface="Pretendard"/>
+                <a:ea typeface="Pretendard"/>
               </a:rPr>
               <a:t>카트리지 CLI 완비(validate·mount·unmount·list·status·purge) · 검증 완료 3종 — 보안관제 · 개발도우미 · 개인정보/ISMS-P</a:t>
             </a:r>
@@ -6613,8 +6613,8 @@
                 <a:solidFill>
                   <a:srgbClr val="2563EB"/>
                 </a:solidFill>
-                <a:latin typeface="맑은 고딕"/>
-                <a:ea typeface="맑은 고딕"/>
+                <a:latin typeface="Pretendard"/>
+                <a:ea typeface="Pretendard"/>
               </a:rPr>
               <a:t>·  </a:t>
             </a:r>
@@ -6623,8 +6623,8 @@
                 <a:solidFill>
                   <a:srgbClr val="1F2A44"/>
                 </a:solidFill>
-                <a:latin typeface="맑은 고딕"/>
-                <a:ea typeface="맑은 고딕"/>
+                <a:latin typeface="Pretendard"/>
+                <a:ea typeface="Pretendard"/>
               </a:rPr>
               <a:t>지식의 출처를 파일 단위로 역추적 — 보안관제 3,955건 = 공개 코퍼스 1,575 + 자체 1,930 + LLM 301. 라이선스 실사까지 문서화</a:t>
             </a:r>
@@ -6705,8 +6705,8 @@
                 <a:solidFill>
                   <a:srgbClr val="1E40AF"/>
                 </a:solidFill>
-                <a:latin typeface="맑은 고딕"/>
-                <a:ea typeface="맑은 고딕"/>
+                <a:latin typeface="Pretendard"/>
+                <a:ea typeface="Pretendard"/>
               </a:rPr>
               <a:t>핵심 성과 · 실측</a:t>
             </a:r>
@@ -6745,8 +6745,8 @@
                 <a:solidFill>
                   <a:srgbClr val="2563EB"/>
                 </a:solidFill>
-                <a:latin typeface="맑은 고딕"/>
-                <a:ea typeface="맑은 고딕"/>
+                <a:latin typeface="Pretendard"/>
+                <a:ea typeface="Pretendard"/>
               </a:rPr>
               <a:t>·  </a:t>
             </a:r>
@@ -6755,8 +6755,8 @@
                 <a:solidFill>
                   <a:srgbClr val="1F2A44"/>
                 </a:solidFill>
-                <a:latin typeface="맑은 고딕"/>
-                <a:ea typeface="맑은 고딕"/>
+                <a:latin typeface="Pretendard"/>
+                <a:ea typeface="Pretendard"/>
               </a:rPr>
               <a:t>Python 70,424줄 · 테스트 파일 55개 — 두 계정 전체 저장소 중 최대·최다</a:t>
             </a:r>
@@ -6772,8 +6772,8 @@
                 <a:solidFill>
                   <a:srgbClr val="2563EB"/>
                 </a:solidFill>
-                <a:latin typeface="맑은 고딕"/>
-                <a:ea typeface="맑은 고딕"/>
+                <a:latin typeface="Pretendard"/>
+                <a:ea typeface="Pretendard"/>
               </a:rPr>
               <a:t>·  </a:t>
             </a:r>
@@ -6782,8 +6782,8 @@
                 <a:solidFill>
                   <a:srgbClr val="1F2A44"/>
                 </a:solidFill>
-                <a:latin typeface="맑은 고딕"/>
-                <a:ea typeface="맑은 고딕"/>
+                <a:latin typeface="Pretendard"/>
+                <a:ea typeface="Pretendard"/>
               </a:rPr>
               <a:t>보안 미결 항목을 스스로 공개 — PII 마스킹이 특정 핸들러만 경유해 API 티어에선 원문이 나간다는 점을 기록</a:t>
             </a:r>
@@ -6799,8 +6799,8 @@
                 <a:solidFill>
                   <a:srgbClr val="2563EB"/>
                 </a:solidFill>
-                <a:latin typeface="맑은 고딕"/>
-                <a:ea typeface="맑은 고딕"/>
+                <a:latin typeface="Pretendard"/>
+                <a:ea typeface="Pretendard"/>
               </a:rPr>
               <a:t>·  </a:t>
             </a:r>
@@ -6809,8 +6809,8 @@
                 <a:solidFill>
                   <a:srgbClr val="1F2A44"/>
                 </a:solidFill>
-                <a:latin typeface="맑은 고딕"/>
-                <a:ea typeface="맑은 고딕"/>
+                <a:latin typeface="Pretendard"/>
+                <a:ea typeface="Pretendard"/>
               </a:rPr>
               <a:t>RAG는 BGE-M3 dense + ColBERT 2-way RRF 리랭킹. 전략을 바꿔가며 비교한 실험 흔적이 파일로 남아 있다</a:t>
             </a:r>
@@ -6826,8 +6826,8 @@
                 <a:solidFill>
                   <a:srgbClr val="2563EB"/>
                 </a:solidFill>
-                <a:latin typeface="맑은 고딕"/>
-                <a:ea typeface="맑은 고딕"/>
+                <a:latin typeface="Pretendard"/>
+                <a:ea typeface="Pretendard"/>
               </a:rPr>
               <a:t>·  </a:t>
             </a:r>
@@ -6836,8 +6836,8 @@
                 <a:solidFill>
                   <a:srgbClr val="1F2A44"/>
                 </a:solidFill>
-                <a:latin typeface="맑은 고딕"/>
-                <a:ea typeface="맑은 고딕"/>
+                <a:latin typeface="Pretendard"/>
+                <a:ea typeface="Pretendard"/>
               </a:rPr>
               <a:t>멀티백엔드 서빙 — 로컬 llama-server와 외부 API를 같은 인터페이스로, OpenAI 호환 엔드포인트 제공</a:t>
             </a:r>
@@ -6853,8 +6853,8 @@
                 <a:solidFill>
                   <a:srgbClr val="2563EB"/>
                 </a:solidFill>
-                <a:latin typeface="맑은 고딕"/>
-                <a:ea typeface="맑은 고딕"/>
+                <a:latin typeface="Pretendard"/>
+                <a:ea typeface="Pretendard"/>
               </a:rPr>
               <a:t>·  </a:t>
             </a:r>
@@ -6863,8 +6863,8 @@
                 <a:solidFill>
                   <a:srgbClr val="1F2A44"/>
                 </a:solidFill>
-                <a:latin typeface="맑은 고딕"/>
-                <a:ea typeface="맑은 고딕"/>
+                <a:latin typeface="Pretendard"/>
+                <a:ea typeface="Pretendard"/>
               </a:rPr>
               <a:t>install 원클릭 → systemd 등록까지 종단 자동화, T1·T2 티어 실측 검증 완료</a:t>
             </a:r>
@@ -6899,8 +6899,8 @@
                 <a:solidFill>
                   <a:srgbClr val="5B667A"/>
                 </a:solidFill>
-                <a:latin typeface="맑은 고딕"/>
-                <a:ea typeface="맑은 고딕"/>
+                <a:latin typeface="Pretendard"/>
+                <a:ea typeface="Pretendard"/>
               </a:rPr>
               <a:t>STACK</a:t>
             </a:r>
@@ -6955,8 +6955,8 @@
                 <a:solidFill>
                   <a:srgbClr val="1F2A44"/>
                 </a:solidFill>
-                <a:latin typeface="맑은 고딕"/>
-                <a:ea typeface="맑은 고딕"/>
+                <a:latin typeface="Pretendard"/>
+                <a:ea typeface="Pretendard"/>
               </a:rPr>
               <a:t>Python 3.11+</a:t>
             </a:r>
@@ -7011,8 +7011,8 @@
                 <a:solidFill>
                   <a:srgbClr val="1F2A44"/>
                 </a:solidFill>
-                <a:latin typeface="맑은 고딕"/>
-                <a:ea typeface="맑은 고딕"/>
+                <a:latin typeface="Pretendard"/>
+                <a:ea typeface="Pretendard"/>
               </a:rPr>
               <a:t>FastAPI</a:t>
             </a:r>
@@ -7067,8 +7067,8 @@
                 <a:solidFill>
                   <a:srgbClr val="1F2A44"/>
                 </a:solidFill>
-                <a:latin typeface="맑은 고딕"/>
-                <a:ea typeface="맑은 고딕"/>
+                <a:latin typeface="Pretendard"/>
+                <a:ea typeface="Pretendard"/>
               </a:rPr>
               <a:t>llama.cpp</a:t>
             </a:r>
@@ -7123,8 +7123,8 @@
                 <a:solidFill>
                   <a:srgbClr val="1F2A44"/>
                 </a:solidFill>
-                <a:latin typeface="맑은 고딕"/>
-                <a:ea typeface="맑은 고딕"/>
+                <a:latin typeface="Pretendard"/>
+                <a:ea typeface="Pretendard"/>
               </a:rPr>
               <a:t>Qdrant</a:t>
             </a:r>
@@ -7179,8 +7179,8 @@
                 <a:solidFill>
                   <a:srgbClr val="1F2A44"/>
                 </a:solidFill>
-                <a:latin typeface="맑은 고딕"/>
-                <a:ea typeface="맑은 고딕"/>
+                <a:latin typeface="Pretendard"/>
+                <a:ea typeface="Pretendard"/>
               </a:rPr>
               <a:t>BGE-M3</a:t>
             </a:r>
@@ -7235,8 +7235,8 @@
                 <a:solidFill>
                   <a:srgbClr val="1F2A44"/>
                 </a:solidFill>
-                <a:latin typeface="맑은 고딕"/>
-                <a:ea typeface="맑은 고딕"/>
+                <a:latin typeface="Pretendard"/>
+                <a:ea typeface="Pretendard"/>
               </a:rPr>
               <a:t>RRF 리랭킹</a:t>
             </a:r>
@@ -7291,8 +7291,8 @@
                 <a:solidFill>
                   <a:srgbClr val="1F2A44"/>
                 </a:solidFill>
-                <a:latin typeface="맑은 고딕"/>
-                <a:ea typeface="맑은 고딕"/>
+                <a:latin typeface="Pretendard"/>
+                <a:ea typeface="Pretendard"/>
               </a:rPr>
               <a:t>systemd</a:t>
             </a:r>
@@ -7347,8 +7347,8 @@
                 <a:solidFill>
                   <a:srgbClr val="1F2A44"/>
                 </a:solidFill>
-                <a:latin typeface="맑은 고딕"/>
-                <a:ea typeface="맑은 고딕"/>
+                <a:latin typeface="Pretendard"/>
+                <a:ea typeface="Pretendard"/>
               </a:rPr>
               <a:t>OpenAI 호환 API</a:t>
             </a:r>
@@ -7489,8 +7489,8 @@
                 <a:solidFill>
                   <a:srgbClr val="2563EB"/>
                 </a:solidFill>
-                <a:latin typeface="맑은 고딕"/>
-                <a:ea typeface="맑은 고딕"/>
+                <a:latin typeface="Pretendard"/>
+                <a:ea typeface="Pretendard"/>
               </a:rPr>
               <a:t>PROJECT 05 · 개인 (adorahelen/agent-console)</a:t>
             </a:r>
@@ -7525,8 +7525,8 @@
                 <a:solidFill>
                   <a:srgbClr val="1F2A44"/>
                 </a:solidFill>
-                <a:latin typeface="맑은 고딕"/>
-                <a:ea typeface="맑은 고딕"/>
+                <a:latin typeface="Pretendard"/>
+                <a:ea typeface="Pretendard"/>
               </a:rPr>
               <a:t>agent-console — 아키텍처</a:t>
             </a:r>
@@ -7561,8 +7561,8 @@
                 <a:solidFill>
                   <a:srgbClr val="5B667A"/>
                 </a:solidFill>
-                <a:latin typeface="맑은 고딕"/>
-                <a:ea typeface="맑은 고딕"/>
+                <a:latin typeface="Pretendard"/>
+                <a:ea typeface="Pretendard"/>
               </a:rPr>
               <a:t>12</a:t>
             </a:r>
@@ -7645,8 +7645,8 @@
                 <a:solidFill>
                   <a:srgbClr val="B45309"/>
                 </a:solidFill>
-                <a:latin typeface="맑은 고딕"/>
-                <a:ea typeface="맑은 고딕"/>
+                <a:latin typeface="Pretendard"/>
+                <a:ea typeface="Pretendard"/>
               </a:rPr>
               <a:t>카트리지 (가변) — 코드 수정 0</a:t>
             </a:r>
@@ -7703,8 +7703,8 @@
                 <a:solidFill>
                   <a:srgbClr val="1F2A44"/>
                 </a:solidFill>
-                <a:latin typeface="맑은 고딕"/>
-                <a:ea typeface="맑은 고딕"/>
+                <a:latin typeface="Pretendard"/>
+                <a:ea typeface="Pretendard"/>
               </a:rPr>
               <a:t>슬롯 1 · 프롬프트</a:t>
             </a:r>
@@ -7716,8 +7716,8 @@
                 <a:solidFill>
                   <a:srgbClr val="5B667A"/>
                 </a:solidFill>
-                <a:latin typeface="맑은 고딕"/>
-                <a:ea typeface="맑은 고딕"/>
+                <a:latin typeface="Pretendard"/>
+                <a:ea typeface="Pretendard"/>
               </a:rPr>
               <a:t>intent 분류 + 생성 규칙 / config 경로 18개</a:t>
             </a:r>
@@ -7774,8 +7774,8 @@
                 <a:solidFill>
                   <a:srgbClr val="1F2A44"/>
                 </a:solidFill>
-                <a:latin typeface="맑은 고딕"/>
-                <a:ea typeface="맑은 고딕"/>
+                <a:latin typeface="Pretendard"/>
+                <a:ea typeface="Pretendard"/>
               </a:rPr>
               <a:t>슬롯 2 · 지식</a:t>
             </a:r>
@@ -7787,8 +7787,8 @@
                 <a:solidFill>
                   <a:srgbClr val="5B667A"/>
                 </a:solidFill>
-                <a:latin typeface="맑은 고딕"/>
-                <a:ea typeface="맑은 고딕"/>
+                <a:latin typeface="Pretendard"/>
+                <a:ea typeface="Pretendard"/>
               </a:rPr>
               <a:t>RAG 문서(YAML) / bulk upload API</a:t>
             </a:r>
@@ -7845,8 +7845,8 @@
                 <a:solidFill>
                   <a:srgbClr val="1F2A44"/>
                 </a:solidFill>
-                <a:latin typeface="맑은 고딕"/>
-                <a:ea typeface="맑은 고딕"/>
+                <a:latin typeface="Pretendard"/>
+                <a:ea typeface="Pretendard"/>
               </a:rPr>
               <a:t>슬롯 3 · 모델</a:t>
             </a:r>
@@ -7858,8 +7858,8 @@
                 <a:solidFill>
                   <a:srgbClr val="5B667A"/>
                 </a:solidFill>
-                <a:latin typeface="맑은 고딕"/>
-                <a:ea typeface="맑은 고딕"/>
+                <a:latin typeface="Pretendard"/>
+                <a:ea typeface="Pretendard"/>
               </a:rPr>
               <a:t>HW 티어 프리셋 / models.yaml</a:t>
             </a:r>
@@ -7942,8 +7942,8 @@
                 <a:solidFill>
                   <a:srgbClr val="0E7C7B"/>
                 </a:solidFill>
-                <a:latin typeface="맑은 고딕"/>
-                <a:ea typeface="맑은 고딕"/>
+                <a:latin typeface="Pretendard"/>
+                <a:ea typeface="Pretendard"/>
               </a:rPr>
               <a:t>엔진 (고정) — 도메인을 모른다</a:t>
             </a:r>
@@ -8000,8 +8000,8 @@
                 <a:solidFill>
                   <a:srgbClr val="1F2A44"/>
                 </a:solidFill>
-                <a:latin typeface="맑은 고딕"/>
-                <a:ea typeface="맑은 고딕"/>
+                <a:latin typeface="Pretendard"/>
+                <a:ea typeface="Pretendard"/>
               </a:rPr>
               <a:t>FastAPI · 인증 · PII 마스킹</a:t>
             </a:r>
@@ -8013,8 +8013,8 @@
                 <a:solidFill>
                   <a:srgbClr val="5B667A"/>
                 </a:solidFill>
-                <a:latin typeface="맑은 고딕"/>
-                <a:ea typeface="맑은 고딕"/>
+                <a:latin typeface="Pretendard"/>
+                <a:ea typeface="Pretendard"/>
               </a:rPr>
               <a:t>관리 평면 인증 · 요청 파이프라인</a:t>
             </a:r>
@@ -8071,8 +8071,8 @@
                 <a:solidFill>
                   <a:srgbClr val="1F2A44"/>
                 </a:solidFill>
-                <a:latin typeface="맑은 고딕"/>
-                <a:ea typeface="맑은 고딕"/>
+                <a:latin typeface="Pretendard"/>
+                <a:ea typeface="Pretendard"/>
               </a:rPr>
               <a:t>RAG — BGE-M3 + Qdrant</a:t>
             </a:r>
@@ -8084,8 +8084,8 @@
                 <a:solidFill>
                   <a:srgbClr val="5B667A"/>
                 </a:solidFill>
-                <a:latin typeface="맑은 고딕"/>
-                <a:ea typeface="맑은 고딕"/>
+                <a:latin typeface="Pretendard"/>
+                <a:ea typeface="Pretendard"/>
               </a:rPr>
               <a:t>dense + ColBERT 2-way RRF 리랭킹</a:t>
             </a:r>
@@ -8142,8 +8142,8 @@
                 <a:solidFill>
                   <a:srgbClr val="1F2A44"/>
                 </a:solidFill>
-                <a:latin typeface="맑은 고딕"/>
-                <a:ea typeface="맑은 고딕"/>
+                <a:latin typeface="Pretendard"/>
+                <a:ea typeface="Pretendard"/>
               </a:rPr>
               <a:t>멀티백엔드 서빙</a:t>
             </a:r>
@@ -8155,8 +8155,8 @@
                 <a:solidFill>
                   <a:srgbClr val="5B667A"/>
                 </a:solidFill>
-                <a:latin typeface="맑은 고딕"/>
-                <a:ea typeface="맑은 고딕"/>
+                <a:latin typeface="Pretendard"/>
+                <a:ea typeface="Pretendard"/>
               </a:rPr>
               <a:t>llama-server (로컬) / 외부 API · OpenAI 호환</a:t>
             </a:r>
@@ -8228,8 +8228,8 @@
                 <a:solidFill>
                   <a:srgbClr val="5B667A"/>
                 </a:solidFill>
-                <a:latin typeface="맑은 고딕"/>
-                <a:ea typeface="맑은 고딕"/>
+                <a:latin typeface="Pretendard"/>
+                <a:ea typeface="Pretendard"/>
               </a:rPr>
               <a:t>config [prompts]</a:t>
             </a:r>
@@ -8301,8 +8301,8 @@
                 <a:solidFill>
                   <a:srgbClr val="5B667A"/>
                 </a:solidFill>
-                <a:latin typeface="맑은 고딕"/>
-                <a:ea typeface="맑은 고딕"/>
+                <a:latin typeface="Pretendard"/>
+                <a:ea typeface="Pretendard"/>
               </a:rPr>
               <a:t>bulk upload API</a:t>
             </a:r>
@@ -8374,8 +8374,8 @@
                 <a:solidFill>
                   <a:srgbClr val="5B667A"/>
                 </a:solidFill>
-                <a:latin typeface="맑은 고딕"/>
-                <a:ea typeface="맑은 고딕"/>
+                <a:latin typeface="Pretendard"/>
+                <a:ea typeface="Pretendard"/>
               </a:rPr>
               <a:t>config [model]</a:t>
             </a:r>
@@ -8432,8 +8432,8 @@
                 <a:solidFill>
                   <a:srgbClr val="1F2A44"/>
                 </a:solidFill>
-                <a:latin typeface="맑은 고딕"/>
-                <a:ea typeface="맑은 고딕"/>
+                <a:latin typeface="Pretendard"/>
+                <a:ea typeface="Pretendard"/>
               </a:rPr>
               <a:t>install.sh — HW 감지 → 티어 판정 → 프리셋 자동 선택</a:t>
             </a:r>
@@ -8445,8 +8445,8 @@
                 <a:solidFill>
                   <a:srgbClr val="5B667A"/>
                 </a:solidFill>
-                <a:latin typeface="맑은 고딕"/>
-                <a:ea typeface="맑은 고딕"/>
+                <a:latin typeface="Pretendard"/>
+                <a:ea typeface="Pretendard"/>
               </a:rPr>
               <a:t>VRAM·RAM 계측 후 16GB는 26B + n-cpu-moe 오프로딩, systemd 등록까지 원클릭</a:t>
             </a:r>
@@ -8503,8 +8503,8 @@
                 <a:solidFill>
                   <a:srgbClr val="1F2A44"/>
                 </a:solidFill>
-                <a:latin typeface="맑은 고딕"/>
-                <a:ea typeface="맑은 고딕"/>
+                <a:latin typeface="Pretendard"/>
+                <a:ea typeface="Pretendard"/>
               </a:rPr>
               <a:t>카트리지 CLI — validate / mount / unmount / list / status / purge</a:t>
             </a:r>
@@ -8516,8 +8516,8 @@
                 <a:solidFill>
                   <a:srgbClr val="5B667A"/>
                 </a:solidFill>
-                <a:latin typeface="맑은 고딕"/>
-                <a:ea typeface="맑은 고딕"/>
+                <a:latin typeface="Pretendard"/>
+                <a:ea typeface="Pretendard"/>
               </a:rPr>
               <a:t>검증 완료 3종: 보안관제(action형) · 개발도우미(Q&amp;A형) · 개인정보·ISMS-P</a:t>
             </a:r>
@@ -8658,8 +8658,8 @@
                 <a:solidFill>
                   <a:srgbClr val="2563EB"/>
                 </a:solidFill>
-                <a:latin typeface="맑은 고딕"/>
-                <a:ea typeface="맑은 고딕"/>
+                <a:latin typeface="Pretendard"/>
+                <a:ea typeface="Pretendard"/>
               </a:rPr>
               <a:t>PROJECT 06 · 개인 (fossil-fuel · kangminlog-ops · dodgers-labs)</a:t>
             </a:r>
@@ -8694,8 +8694,8 @@
                 <a:solidFill>
                   <a:srgbClr val="1F2A44"/>
                 </a:solidFill>
-                <a:latin typeface="맑은 고딕"/>
-                <a:ea typeface="맑은 고딕"/>
+                <a:latin typeface="Pretendard"/>
+                <a:ea typeface="Pretendard"/>
               </a:rPr>
               <a:t>운영 · 인프라 — 클라우드에서 내려와 직접 굴린다</a:t>
             </a:r>
@@ -8730,8 +8730,8 @@
                 <a:solidFill>
                   <a:srgbClr val="5B667A"/>
                 </a:solidFill>
-                <a:latin typeface="맑은 고딕"/>
-                <a:ea typeface="맑은 고딕"/>
+                <a:latin typeface="Pretendard"/>
+                <a:ea typeface="Pretendard"/>
               </a:rPr>
               <a:t>13</a:t>
             </a:r>
@@ -8766,8 +8766,8 @@
                 <a:solidFill>
                   <a:srgbClr val="1E40AF"/>
                 </a:solidFill>
-                <a:latin typeface="맑은 고딕"/>
-                <a:ea typeface="맑은 고딕"/>
+                <a:latin typeface="Pretendard"/>
+                <a:ea typeface="Pretendard"/>
               </a:rPr>
               <a:t>매니지드가 대신 해주던 일의 목록을 만들고, 홈서버 한 대에서 장애를 겪고 근본 원인까지 파고든 기록</a:t>
             </a:r>
@@ -8806,8 +8806,8 @@
                 <a:solidFill>
                   <a:srgbClr val="2563EB"/>
                 </a:solidFill>
-                <a:latin typeface="맑은 고딕"/>
-                <a:ea typeface="맑은 고딕"/>
+                <a:latin typeface="Pretendard"/>
+                <a:ea typeface="Pretendard"/>
               </a:rPr>
               <a:t>·  </a:t>
             </a:r>
@@ -8816,8 +8816,8 @@
                 <a:solidFill>
                   <a:srgbClr val="1F2A44"/>
                 </a:solidFill>
-                <a:latin typeface="맑은 고딕"/>
-                <a:ea typeface="맑은 고딕"/>
+                <a:latin typeface="Pretendard"/>
+                <a:ea typeface="Pretendard"/>
               </a:rPr>
               <a:t>fossil-fuel — AWS(EC2·RDS·ALB)로 5개월 운영하던 학과 동아리 서비스를 프리티어 종료를 계기로 미니 PC 1대로 이전. 고정 운영비 월 0원</a:t>
             </a:r>
@@ -8833,8 +8833,8 @@
                 <a:solidFill>
                   <a:srgbClr val="2563EB"/>
                 </a:solidFill>
-                <a:latin typeface="맑은 고딕"/>
-                <a:ea typeface="맑은 고딕"/>
+                <a:latin typeface="Pretendard"/>
+                <a:ea typeface="Pretendard"/>
               </a:rPr>
               <a:t>·  </a:t>
             </a:r>
@@ -8843,8 +8843,8 @@
                 <a:solidFill>
                   <a:srgbClr val="1F2A44"/>
                 </a:solidFill>
-                <a:latin typeface="맑은 고딕"/>
-                <a:ea typeface="맑은 고딕"/>
+                <a:latin typeface="Pretendard"/>
+                <a:ea typeface="Pretendard"/>
               </a:rPr>
               <a:t>1세대(AWS 179커밋) 히스토리를 legacy 브랜치로 보존하고, 이전 중 드러난 결함 수정을 2세대(78커밋)의 주 내용으로 삼았다</a:t>
             </a:r>
@@ -8860,8 +8860,8 @@
                 <a:solidFill>
                   <a:srgbClr val="2563EB"/>
                 </a:solidFill>
-                <a:latin typeface="맑은 고딕"/>
-                <a:ea typeface="맑은 고딕"/>
+                <a:latin typeface="Pretendard"/>
+                <a:ea typeface="Pretendard"/>
               </a:rPr>
               <a:t>·  </a:t>
             </a:r>
@@ -8870,8 +8870,8 @@
                 <a:solidFill>
                   <a:srgbClr val="1F2A44"/>
                 </a:solidFill>
-                <a:latin typeface="맑은 고딕"/>
-                <a:ea typeface="맑은 고딕"/>
+                <a:latin typeface="Pretendard"/>
+                <a:ea typeface="Pretendard"/>
               </a:rPr>
               <a:t>kangminlog-ops — 홈서버 1대의 절차·인시던트·자동화를 단일 저장소로 추적. 인시던트 6건 · 런북 9종</a:t>
             </a:r>
@@ -8887,8 +8887,8 @@
                 <a:solidFill>
                   <a:srgbClr val="2563EB"/>
                 </a:solidFill>
-                <a:latin typeface="맑은 고딕"/>
-                <a:ea typeface="맑은 고딕"/>
+                <a:latin typeface="Pretendard"/>
+                <a:ea typeface="Pretendard"/>
               </a:rPr>
               <a:t>·  </a:t>
             </a:r>
@@ -8897,8 +8897,8 @@
                 <a:solidFill>
                   <a:srgbClr val="1F2A44"/>
                 </a:solidFill>
-                <a:latin typeface="맑은 고딕"/>
-                <a:ea typeface="맑은 고딕"/>
+                <a:latin typeface="Pretendard"/>
+                <a:ea typeface="Pretendard"/>
               </a:rPr>
               <a:t>대표 사고: ClickHouse 쓰기 증폭 700배 — 6.9일간 NVMe에 327GB 쓰기. 실제 사용자 데이터는 0.8%(26MiB)뿐이고 99.2%가 ClickHouse 자기 로그였다 (원인 분해는 다음 장)</a:t>
             </a:r>
@@ -8914,8 +8914,8 @@
                 <a:solidFill>
                   <a:srgbClr val="2563EB"/>
                 </a:solidFill>
-                <a:latin typeface="맑은 고딕"/>
-                <a:ea typeface="맑은 고딕"/>
+                <a:latin typeface="Pretendard"/>
+                <a:ea typeface="Pretendard"/>
               </a:rPr>
               <a:t>·  </a:t>
             </a:r>
@@ -8924,8 +8924,8 @@
                 <a:solidFill>
                   <a:srgbClr val="1F2A44"/>
                 </a:solidFill>
-                <a:latin typeface="맑은 고딕"/>
-                <a:ea typeface="맑은 고딕"/>
+                <a:latin typeface="Pretendard"/>
+                <a:ea typeface="Pretendard"/>
               </a:rPr>
               <a:t>dodgers-labs — 공격면이 큰 컴포넌트(파일 파서·LLM 추론·인증 DB)만 분리해 상시 노출하지 않고 온디맨드로만 기동하는 구조</a:t>
             </a:r>
@@ -9006,8 +9006,8 @@
                 <a:solidFill>
                   <a:srgbClr val="1E40AF"/>
                 </a:solidFill>
-                <a:latin typeface="맑은 고딕"/>
-                <a:ea typeface="맑은 고딕"/>
+                <a:latin typeface="Pretendard"/>
+                <a:ea typeface="Pretendard"/>
               </a:rPr>
               <a:t>핵심 성과 · 실측</a:t>
             </a:r>
@@ -9046,8 +9046,8 @@
                 <a:solidFill>
                   <a:srgbClr val="2563EB"/>
                 </a:solidFill>
-                <a:latin typeface="맑은 고딕"/>
-                <a:ea typeface="맑은 고딕"/>
+                <a:latin typeface="Pretendard"/>
+                <a:ea typeface="Pretendard"/>
               </a:rPr>
               <a:t>·  </a:t>
             </a:r>
@@ -9056,8 +9056,8 @@
                 <a:solidFill>
                   <a:srgbClr val="1F2A44"/>
                 </a:solidFill>
-                <a:latin typeface="맑은 고딕"/>
-                <a:ea typeface="맑은 고딕"/>
+                <a:latin typeface="Pretendard"/>
+                <a:ea typeface="Pretendard"/>
               </a:rPr>
               <a:t>NVMe 쓰기 -97% — 배치 확대 · system 로그 정리 · TTL 설정 후 실측</a:t>
             </a:r>
@@ -9073,8 +9073,8 @@
                 <a:solidFill>
                   <a:srgbClr val="2563EB"/>
                 </a:solidFill>
-                <a:latin typeface="맑은 고딕"/>
-                <a:ea typeface="맑은 고딕"/>
+                <a:latin typeface="Pretendard"/>
+                <a:ea typeface="Pretendard"/>
               </a:rPr>
               <a:t>·  </a:t>
             </a:r>
@@ -9083,10 +9083,10 @@
                 <a:solidFill>
                   <a:srgbClr val="1F2A44"/>
                 </a:solidFill>
-                <a:latin typeface="맑은 고딕"/>
-                <a:ea typeface="맑은 고딕"/>
-              </a:rPr>
-              <a:t>사내 서버 NVMe 장애 사례와 홈서버 사고를 대조 분석해 같은 패턴임을 문서화 (회사 식별 정보 제거 후)</a:t>
+                <a:latin typeface="Pretendard"/>
+                <a:ea typeface="Pretendard"/>
+              </a:rPr>
+              <a:t>다른 서버의 NVMe 장애 사례와 홈서버 사고를 대조 분석해 같은 패턴임을 문서화 (식별 정보 제거 후)</a:t>
             </a:r>
           </a:p>
           <a:p>
@@ -9100,8 +9100,8 @@
                 <a:solidFill>
                   <a:srgbClr val="2563EB"/>
                 </a:solidFill>
-                <a:latin typeface="맑은 고딕"/>
-                <a:ea typeface="맑은 고딕"/>
+                <a:latin typeface="Pretendard"/>
+                <a:ea typeface="Pretendard"/>
               </a:rPr>
               <a:t>·  </a:t>
             </a:r>
@@ -9110,8 +9110,8 @@
                 <a:solidFill>
                   <a:srgbClr val="1F2A44"/>
                 </a:solidFill>
-                <a:latin typeface="맑은 고딕"/>
-                <a:ea typeface="맑은 고딕"/>
+                <a:latin typeface="Pretendard"/>
+                <a:ea typeface="Pretendard"/>
               </a:rPr>
               <a:t>백업 cron이 조용히 실패하던 것, 자동 PR이 무음으로 실패하던 것 — "알림 없는 실패"를 인시던트로 별도 기록</a:t>
             </a:r>
@@ -9127,8 +9127,8 @@
                 <a:solidFill>
                   <a:srgbClr val="2563EB"/>
                 </a:solidFill>
-                <a:latin typeface="맑은 고딕"/>
-                <a:ea typeface="맑은 고딕"/>
+                <a:latin typeface="Pretendard"/>
+                <a:ea typeface="Pretendard"/>
               </a:rPr>
               <a:t>·  </a:t>
             </a:r>
@@ -9137,8 +9137,8 @@
                 <a:solidFill>
                   <a:srgbClr val="1F2A44"/>
                 </a:solidFill>
-                <a:latin typeface="맑은 고딕"/>
-                <a:ea typeface="맑은 고딕"/>
+                <a:latin typeface="Pretendard"/>
+                <a:ea typeface="Pretendard"/>
               </a:rPr>
               <a:t>CI는 H2로 DB 없이 기동하도록 구성해 외부 의존 없이 검증</a:t>
             </a:r>
@@ -9154,8 +9154,8 @@
                 <a:solidFill>
                   <a:srgbClr val="2563EB"/>
                 </a:solidFill>
-                <a:latin typeface="맑은 고딕"/>
-                <a:ea typeface="맑은 고딕"/>
+                <a:latin typeface="Pretendard"/>
+                <a:ea typeface="Pretendard"/>
               </a:rPr>
               <a:t>·  </a:t>
             </a:r>
@@ -9164,8 +9164,8 @@
                 <a:solidFill>
                   <a:srgbClr val="1F2A44"/>
                 </a:solidFill>
-                <a:latin typeface="맑은 고딕"/>
-                <a:ea typeface="맑은 고딕"/>
+                <a:latin typeface="Pretendard"/>
+                <a:ea typeface="Pretendard"/>
               </a:rPr>
               <a:t>dodgers-labs 전 서비스에 OpenTelemetry 트레이싱 적용, PII 탐지·마스킹은 한국어 NER + 정규식 병행</a:t>
             </a:r>
@@ -9200,8 +9200,8 @@
                 <a:solidFill>
                   <a:srgbClr val="5B667A"/>
                 </a:solidFill>
-                <a:latin typeface="맑은 고딕"/>
-                <a:ea typeface="맑은 고딕"/>
+                <a:latin typeface="Pretendard"/>
+                <a:ea typeface="Pretendard"/>
               </a:rPr>
               <a:t>STACK</a:t>
             </a:r>
@@ -9256,8 +9256,8 @@
                 <a:solidFill>
                   <a:srgbClr val="1F2A44"/>
                 </a:solidFill>
-                <a:latin typeface="맑은 고딕"/>
-                <a:ea typeface="맑은 고딕"/>
+                <a:latin typeface="Pretendard"/>
+                <a:ea typeface="Pretendard"/>
               </a:rPr>
               <a:t>Java 17</a:t>
             </a:r>
@@ -9312,8 +9312,8 @@
                 <a:solidFill>
                   <a:srgbClr val="1F2A44"/>
                 </a:solidFill>
-                <a:latin typeface="맑은 고딕"/>
-                <a:ea typeface="맑은 고딕"/>
+                <a:latin typeface="Pretendard"/>
+                <a:ea typeface="Pretendard"/>
               </a:rPr>
               <a:t>Spring Boot 3.5</a:t>
             </a:r>
@@ -9368,8 +9368,8 @@
                 <a:solidFill>
                   <a:srgbClr val="1F2A44"/>
                 </a:solidFill>
-                <a:latin typeface="맑은 고딕"/>
-                <a:ea typeface="맑은 고딕"/>
+                <a:latin typeface="Pretendard"/>
+                <a:ea typeface="Pretendard"/>
               </a:rPr>
               <a:t>PostgreSQL 16</a:t>
             </a:r>
@@ -9424,8 +9424,8 @@
                 <a:solidFill>
                   <a:srgbClr val="1F2A44"/>
                 </a:solidFill>
-                <a:latin typeface="맑은 고딕"/>
-                <a:ea typeface="맑은 고딕"/>
+                <a:latin typeface="Pretendard"/>
+                <a:ea typeface="Pretendard"/>
               </a:rPr>
               <a:t>Docker Compose</a:t>
             </a:r>
@@ -9480,8 +9480,8 @@
                 <a:solidFill>
                   <a:srgbClr val="1F2A44"/>
                 </a:solidFill>
-                <a:latin typeface="맑은 고딕"/>
-                <a:ea typeface="맑은 고딕"/>
+                <a:latin typeface="Pretendard"/>
+                <a:ea typeface="Pretendard"/>
               </a:rPr>
               <a:t>ClickHouse</a:t>
             </a:r>
@@ -9536,8 +9536,8 @@
                 <a:solidFill>
                   <a:srgbClr val="1F2A44"/>
                 </a:solidFill>
-                <a:latin typeface="맑은 고딕"/>
-                <a:ea typeface="맑은 고딕"/>
+                <a:latin typeface="Pretendard"/>
+                <a:ea typeface="Pretendard"/>
               </a:rPr>
               <a:t>OpenTelemetry</a:t>
             </a:r>
@@ -9592,8 +9592,8 @@
                 <a:solidFill>
                   <a:srgbClr val="1F2A44"/>
                 </a:solidFill>
-                <a:latin typeface="맑은 고딕"/>
-                <a:ea typeface="맑은 고딕"/>
+                <a:latin typeface="Pretendard"/>
+                <a:ea typeface="Pretendard"/>
               </a:rPr>
               <a:t>restic</a:t>
             </a:r>
@@ -9648,8 +9648,8 @@
                 <a:solidFill>
                   <a:srgbClr val="1F2A44"/>
                 </a:solidFill>
-                <a:latin typeface="맑은 고딕"/>
-                <a:ea typeface="맑은 고딕"/>
+                <a:latin typeface="Pretendard"/>
+                <a:ea typeface="Pretendard"/>
               </a:rPr>
               <a:t>systemd</a:t>
             </a:r>
@@ -9704,8 +9704,8 @@
                 <a:solidFill>
                   <a:srgbClr val="1F2A44"/>
                 </a:solidFill>
-                <a:latin typeface="맑은 고딕"/>
-                <a:ea typeface="맑은 고딕"/>
+                <a:latin typeface="Pretendard"/>
+                <a:ea typeface="Pretendard"/>
               </a:rPr>
               <a:t>Tailscale</a:t>
             </a:r>
@@ -9760,8 +9760,8 @@
                 <a:solidFill>
                   <a:srgbClr val="1F2A44"/>
                 </a:solidFill>
-                <a:latin typeface="맑은 고딕"/>
-                <a:ea typeface="맑은 고딕"/>
+                <a:latin typeface="Pretendard"/>
+                <a:ea typeface="Pretendard"/>
               </a:rPr>
               <a:t>iptables · UFW</a:t>
             </a:r>
@@ -9902,8 +9902,8 @@
                 <a:solidFill>
                   <a:srgbClr val="2563EB"/>
                 </a:solidFill>
-                <a:latin typeface="맑은 고딕"/>
-                <a:ea typeface="맑은 고딕"/>
+                <a:latin typeface="Pretendard"/>
+                <a:ea typeface="Pretendard"/>
               </a:rPr>
               <a:t>PROJECT 06 · 개인</a:t>
             </a:r>
@@ -9938,8 +9938,8 @@
                 <a:solidFill>
                   <a:srgbClr val="1F2A44"/>
                 </a:solidFill>
-                <a:latin typeface="맑은 고딕"/>
-                <a:ea typeface="맑은 고딕"/>
+                <a:latin typeface="Pretendard"/>
+                <a:ea typeface="Pretendard"/>
               </a:rPr>
               <a:t>ClickHouse 쓰기 증폭 700배 — 진단에서 조치까지 — 아키텍처</a:t>
             </a:r>
@@ -9974,8 +9974,8 @@
                 <a:solidFill>
                   <a:srgbClr val="5B667A"/>
                 </a:solidFill>
-                <a:latin typeface="맑은 고딕"/>
-                <a:ea typeface="맑은 고딕"/>
+                <a:latin typeface="Pretendard"/>
+                <a:ea typeface="Pretendard"/>
               </a:rPr>
               <a:t>14</a:t>
             </a:r>
@@ -10032,8 +10032,8 @@
                 <a:solidFill>
                   <a:srgbClr val="1F2A44"/>
                 </a:solidFill>
-                <a:latin typeface="맑은 고딕"/>
-                <a:ea typeface="맑은 고딕"/>
+                <a:latin typeface="Pretendard"/>
+                <a:ea typeface="Pretendard"/>
               </a:rPr>
               <a:t>① 증상</a:t>
             </a:r>
@@ -10045,8 +10045,8 @@
                 <a:solidFill>
                   <a:srgbClr val="5B667A"/>
                 </a:solidFill>
-                <a:latin typeface="맑은 고딕"/>
-                <a:ea typeface="맑은 고딕"/>
+                <a:latin typeface="Pretendard"/>
+                <a:ea typeface="Pretendard"/>
               </a:rPr>
               <a:t>6.9일 · NVMe 쓰기 327GB
 78번 서버 장애 패턴 재현 위험</a:t>
@@ -10104,8 +10104,8 @@
                 <a:solidFill>
                   <a:srgbClr val="1F2A44"/>
                 </a:solidFill>
-                <a:latin typeface="맑은 고딕"/>
-                <a:ea typeface="맑은 고딕"/>
+                <a:latin typeface="Pretendard"/>
+                <a:ea typeface="Pretendard"/>
               </a:rPr>
               <a:t>② 점유 실체</a:t>
             </a:r>
@@ -10117,8 +10117,8 @@
                 <a:solidFill>
                   <a:srgbClr val="5B667A"/>
                 </a:solidFill>
-                <a:latin typeface="맑은 고딕"/>
-                <a:ea typeface="맑은 고딕"/>
+                <a:latin typeface="Pretendard"/>
+                <a:ea typeface="Pretendard"/>
               </a:rPr>
               <a:t>system 로그 3.13GiB = 99.2%
 실사용 otel 26MiB = 0.8%</a:t>
@@ -10176,8 +10176,8 @@
                 <a:solidFill>
                   <a:srgbClr val="1F2A44"/>
                 </a:solidFill>
-                <a:latin typeface="맑은 고딕"/>
-                <a:ea typeface="맑은 고딕"/>
+                <a:latin typeface="Pretendard"/>
+                <a:ea typeface="Pretendard"/>
               </a:rPr>
               <a:t>③ 쓰기 실체</a:t>
             </a:r>
@@ -10189,8 +10189,8 @@
                 <a:solidFill>
                   <a:srgbClr val="5B667A"/>
                 </a:solidFill>
-                <a:latin typeface="맑은 고딕"/>
-                <a:ea typeface="맑은 고딕"/>
+                <a:latin typeface="Pretendard"/>
+                <a:ea typeface="Pretendard"/>
               </a:rPr>
               <a:t>otel_traces 21MiB ↔ 7일 merge 14.22GiB
 = 약 700배 증폭</a:t>
@@ -10248,8 +10248,8 @@
                 <a:solidFill>
                   <a:srgbClr val="1F2A44"/>
                 </a:solidFill>
-                <a:latin typeface="맑은 고딕"/>
-                <a:ea typeface="맑은 고딕"/>
+                <a:latin typeface="Pretendard"/>
+                <a:ea typeface="Pretendard"/>
               </a:rPr>
               <a:t>④ 빈도</a:t>
             </a:r>
@@ -10261,8 +10261,8 @@
                 <a:solidFill>
                   <a:srgbClr val="5B667A"/>
                 </a:solidFill>
-                <a:latin typeface="맑은 고딕"/>
-                <a:ea typeface="맑은 고딕"/>
+                <a:latin typeface="Pretendard"/>
+                <a:ea typeface="Pretendard"/>
               </a:rPr>
               <a:t>merge 25,013회
 평균 4초 1회</a:t>
@@ -10457,8 +10457,8 @@
                 <a:solidFill>
                   <a:srgbClr val="1F2A44"/>
                 </a:solidFill>
-                <a:latin typeface="맑은 고딕"/>
-                <a:ea typeface="맑은 고딕"/>
+                <a:latin typeface="Pretendard"/>
+                <a:ea typeface="Pretendard"/>
               </a:rPr>
               <a:t>원인 1 — OTel 배치가 공격적</a:t>
             </a:r>
@@ -10470,8 +10470,8 @@
                 <a:solidFill>
                   <a:srgbClr val="5B667A"/>
                 </a:solidFill>
-                <a:latin typeface="맑은 고딕"/>
-                <a:ea typeface="맑은 고딕"/>
+                <a:latin typeface="Pretendard"/>
+                <a:ea typeface="Pretendard"/>
               </a:rPr>
               <a:t>send_batch_size 5000 · timeout 10s → 작은 part 다량 생성 → merge 지옥</a:t>
             </a:r>
@@ -10591,8 +10591,8 @@
                 <a:solidFill>
                   <a:srgbClr val="1F2A44"/>
                 </a:solidFill>
-                <a:latin typeface="맑은 고딕"/>
-                <a:ea typeface="맑은 고딕"/>
+                <a:latin typeface="Pretendard"/>
+                <a:ea typeface="Pretendard"/>
               </a:rPr>
               <a:t>원인 2 — system 로그 전부 활성</a:t>
             </a:r>
@@ -10604,8 +10604,8 @@
                 <a:solidFill>
                   <a:srgbClr val="5B667A"/>
                 </a:solidFill>
-                <a:latin typeface="맑은 고딕"/>
-                <a:ea typeface="맑은 고딕"/>
+                <a:latin typeface="Pretendard"/>
+                <a:ea typeface="Pretendard"/>
               </a:rPr>
               <a:t>text_log · trace_log · asynchronous_metric_log 가 자기 자신의 쓰기 부하를 만든다</a:t>
             </a:r>
@@ -10725,8 +10725,8 @@
                 <a:solidFill>
                   <a:srgbClr val="1F2A44"/>
                 </a:solidFill>
-                <a:latin typeface="맑은 고딕"/>
-                <a:ea typeface="맑은 고딕"/>
+                <a:latin typeface="Pretendard"/>
+                <a:ea typeface="Pretendard"/>
               </a:rPr>
               <a:t>원인 3 — system 테이블 TTL 미설정</a:t>
             </a:r>
@@ -10738,8 +10738,8 @@
                 <a:solidFill>
                   <a:srgbClr val="5B667A"/>
                 </a:solidFill>
-                <a:latin typeface="맑은 고딕"/>
-                <a:ea typeface="맑은 고딕"/>
+                <a:latin typeface="Pretendard"/>
+                <a:ea typeface="Pretendard"/>
               </a:rPr>
               <a:t>기본 30일 보존 + merge 대상 무한 증가</a:t>
             </a:r>
@@ -10833,8 +10833,8 @@
                 <a:solidFill>
                   <a:srgbClr val="1F2A44"/>
                 </a:solidFill>
-                <a:latin typeface="맑은 고딕"/>
-                <a:ea typeface="맑은 고딕"/>
+                <a:latin typeface="Pretendard"/>
+                <a:ea typeface="Pretendard"/>
               </a:rPr>
               <a:t>조치 후 실측</a:t>
             </a:r>
@@ -10846,8 +10846,8 @@
                 <a:solidFill>
                   <a:srgbClr val="5B667A"/>
                 </a:solidFill>
-                <a:latin typeface="맑은 고딕"/>
-                <a:ea typeface="맑은 고딕"/>
+                <a:latin typeface="Pretendard"/>
+                <a:ea typeface="Pretendard"/>
               </a:rPr>
               <a:t>배치 확대 · system 로그 정리 · TTL 설정
 NVMe 쓰기  -97%</a:t>
@@ -10883,8 +10883,8 @@
                 <a:solidFill>
                   <a:srgbClr val="1F2A44"/>
                 </a:solidFill>
-                <a:latin typeface="맑은 고딕"/>
-                <a:ea typeface="맑은 고딕"/>
+                <a:latin typeface="Pretendard"/>
+                <a:ea typeface="Pretendard"/>
               </a:rPr>
               <a:t>이 사고를 회사 서버 NVMe 장애 사례와 대조해 같은 패턴임을 문서화했다 — 회사 식별 정보는 제거한 뒤에만 기록한다.</a:t>
             </a:r>
@@ -11025,8 +11025,8 @@
                 <a:solidFill>
                   <a:srgbClr val="2563EB"/>
                 </a:solidFill>
-                <a:latin typeface="맑은 고딕"/>
-                <a:ea typeface="맑은 고딕"/>
+                <a:latin typeface="Pretendard"/>
+                <a:ea typeface="Pretendard"/>
               </a:rPr>
               <a:t>INCIDENT RESPONSE</a:t>
             </a:r>
@@ -11061,8 +11061,8 @@
                 <a:solidFill>
                   <a:srgbClr val="1F2A44"/>
                 </a:solidFill>
-                <a:latin typeface="맑은 고딕"/>
-                <a:ea typeface="맑은 고딕"/>
+                <a:latin typeface="Pretendard"/>
+                <a:ea typeface="Pretendard"/>
               </a:rPr>
               <a:t>침해사고 대응 실사례 — 내가 만든 시스템의 결함을 내가 찾았다</a:t>
             </a:r>
@@ -11097,8 +11097,8 @@
                 <a:solidFill>
                   <a:srgbClr val="5B667A"/>
                 </a:solidFill>
-                <a:latin typeface="맑은 고딕"/>
-                <a:ea typeface="맑은 고딕"/>
+                <a:latin typeface="Pretendard"/>
+                <a:ea typeface="Pretendard"/>
               </a:rPr>
               <a:t>15</a:t>
             </a:r>
@@ -11133,10 +11133,10 @@
                 <a:solidFill>
                   <a:srgbClr val="1E40AF"/>
                 </a:solidFill>
-                <a:latin typeface="맑은 고딕"/>
-                <a:ea typeface="맑은 고딕"/>
-              </a:rPr>
-              <a:t>signum 시험용 수신 바이너리가 모든 인터페이스에서 인증 없이 로그를 받고 있었다. 탐지부터 재발 방지까지 전 과정을 문서로 남겼다.</a:t>
+                <a:latin typeface="Pretendard"/>
+                <a:ea typeface="Pretendard"/>
+              </a:rPr>
+              <a:t>시험용으로 띄워 둔 수신 바이너리가 모든 인터페이스에서 인증 없이 로그를 받고 있었다. 탐지부터 재발 방지까지 전 과정을 문서로 남겼다.</a:t>
             </a:r>
           </a:p>
         </p:txBody>
@@ -11191,8 +11191,8 @@
                 <a:solidFill>
                   <a:srgbClr val="1F2A44"/>
                 </a:solidFill>
-                <a:latin typeface="맑은 고딕"/>
-                <a:ea typeface="맑은 고딕"/>
+                <a:latin typeface="Pretendard"/>
+                <a:ea typeface="Pretendard"/>
               </a:rPr>
               <a:t>탐지</a:t>
             </a:r>
@@ -11204,8 +11204,8 @@
                 <a:solidFill>
                   <a:srgbClr val="5B667A"/>
                 </a:solidFill>
-                <a:latin typeface="맑은 고딕"/>
-                <a:ea typeface="맑은 고딕"/>
+                <a:latin typeface="Pretendard"/>
+                <a:ea typeface="Pretendard"/>
               </a:rPr>
               <a:t>자체 점검 중
 무인증 엔드포인트 발견</a:t>
@@ -11263,8 +11263,8 @@
                 <a:solidFill>
                   <a:srgbClr val="1F2A44"/>
                 </a:solidFill>
-                <a:latin typeface="맑은 고딕"/>
-                <a:ea typeface="맑은 고딕"/>
+                <a:latin typeface="Pretendard"/>
+                <a:ea typeface="Pretendard"/>
               </a:rPr>
               <a:t>증거 수집</a:t>
             </a:r>
@@ -11276,8 +11276,8 @@
                 <a:solidFill>
                   <a:srgbClr val="5B667A"/>
                 </a:solidFill>
-                <a:latin typeface="맑은 고딕"/>
-                <a:ea typeface="맑은 고딕"/>
+                <a:latin typeface="Pretendard"/>
+                <a:ea typeface="Pretendard"/>
               </a:rPr>
               <a:t>재현 · 바이너리 검사
 저장 데이터 확인</a:t>
@@ -11372,8 +11372,8 @@
                 <a:solidFill>
                   <a:srgbClr val="1F2A44"/>
                 </a:solidFill>
-                <a:latin typeface="맑은 고딕"/>
-                <a:ea typeface="맑은 고딕"/>
+                <a:latin typeface="Pretendard"/>
+                <a:ea typeface="Pretendard"/>
               </a:rPr>
               <a:t>영향 산정</a:t>
             </a:r>
@@ -11385,8 +11385,8 @@
                 <a:solidFill>
                   <a:srgbClr val="5B667A"/>
                 </a:solidFill>
-                <a:latin typeface="맑은 고딕"/>
-                <a:ea typeface="맑은 고딕"/>
+                <a:latin typeface="Pretendard"/>
+                <a:ea typeface="Pretendard"/>
               </a:rPr>
               <a:t>심각도 High
 노출 범위 확정</a:t>
@@ -11481,8 +11481,8 @@
                 <a:solidFill>
                   <a:srgbClr val="1F2A44"/>
                 </a:solidFill>
-                <a:latin typeface="맑은 고딕"/>
-                <a:ea typeface="맑은 고딕"/>
+                <a:latin typeface="Pretendard"/>
+                <a:ea typeface="Pretendard"/>
               </a:rPr>
               <a:t>조치</a:t>
             </a:r>
@@ -11494,8 +11494,8 @@
                 <a:solidFill>
                   <a:srgbClr val="5B667A"/>
                 </a:solidFill>
-                <a:latin typeface="맑은 고딕"/>
-                <a:ea typeface="맑은 고딕"/>
+                <a:latin typeface="Pretendard"/>
+                <a:ea typeface="Pretendard"/>
               </a:rPr>
               <a:t>서버 측 수신 차단</a:t>
             </a:r>
@@ -11589,8 +11589,8 @@
                 <a:solidFill>
                   <a:srgbClr val="1F2A44"/>
                 </a:solidFill>
-                <a:latin typeface="맑은 고딕"/>
-                <a:ea typeface="맑은 고딕"/>
+                <a:latin typeface="Pretendard"/>
+                <a:ea typeface="Pretendard"/>
               </a:rPr>
               <a:t>재발 방지</a:t>
             </a:r>
@@ -11602,8 +11602,8 @@
                 <a:solidFill>
                   <a:srgbClr val="5B667A"/>
                 </a:solidFill>
-                <a:latin typeface="맑은 고딕"/>
-                <a:ea typeface="맑은 고딕"/>
+                <a:latin typeface="Pretendard"/>
+                <a:ea typeface="Pretendard"/>
               </a:rPr>
               <a:t>코드 레벨 수정 커밋
 상태 추적 지속</a:t>
@@ -11676,8 +11676,8 @@
                 <a:solidFill>
                   <a:srgbClr val="1F2A44"/>
                 </a:solidFill>
-                <a:latin typeface="맑은 고딕"/>
-                <a:ea typeface="맑은 고딕"/>
+                <a:latin typeface="Pretendard"/>
+                <a:ea typeface="Pretendard"/>
               </a:rPr>
               <a:t>증거 4건으로 입증</a:t>
             </a:r>
@@ -11716,8 +11716,8 @@
                 <a:solidFill>
                   <a:srgbClr val="2563EB"/>
                 </a:solidFill>
-                <a:latin typeface="맑은 고딕"/>
-                <a:ea typeface="맑은 고딕"/>
+                <a:latin typeface="Pretendard"/>
+                <a:ea typeface="Pretendard"/>
               </a:rPr>
               <a:t>·  </a:t>
             </a:r>
@@ -11726,8 +11726,8 @@
                 <a:solidFill>
                   <a:srgbClr val="1F2A44"/>
                 </a:solidFill>
-                <a:latin typeface="맑은 고딕"/>
-                <a:ea typeface="맑은 고딕"/>
+                <a:latin typeface="Pretendard"/>
+                <a:ea typeface="Pretendard"/>
               </a:rPr>
               <a:t>① 임의 JSON을 수신 엔드포인트로 전송 → 정상 수락 + 파일 저장 재현</a:t>
             </a:r>
@@ -11743,8 +11743,8 @@
                 <a:solidFill>
                   <a:srgbClr val="2563EB"/>
                 </a:solidFill>
-                <a:latin typeface="맑은 고딕"/>
-                <a:ea typeface="맑은 고딕"/>
+                <a:latin typeface="Pretendard"/>
+                <a:ea typeface="Pretendard"/>
               </a:rPr>
               <a:t>·  </a:t>
             </a:r>
@@ -11753,8 +11753,8 @@
                 <a:solidFill>
                   <a:srgbClr val="1F2A44"/>
                 </a:solidFill>
-                <a:latin typeface="맑은 고딕"/>
-                <a:ea typeface="맑은 고딕"/>
+                <a:latin typeface="Pretendard"/>
+                <a:ea typeface="Pretendard"/>
               </a:rPr>
               <a:t>② 바이너리 문자열 검사 — auth · token · api_key · bearer · secret 패턴 0건. 인증 로직 부재를 코드가 아닌 산출물로 입증</a:t>
             </a:r>
@@ -11770,8 +11770,8 @@
                 <a:solidFill>
                   <a:srgbClr val="2563EB"/>
                 </a:solidFill>
-                <a:latin typeface="맑은 고딕"/>
-                <a:ea typeface="맑은 고딕"/>
+                <a:latin typeface="Pretendard"/>
+                <a:ea typeface="Pretendard"/>
               </a:rPr>
               <a:t>·  </a:t>
             </a:r>
@@ -11780,8 +11780,8 @@
                 <a:solidFill>
                   <a:srgbClr val="1F2A44"/>
                 </a:solidFill>
-                <a:latin typeface="맑은 고딕"/>
-                <a:ea typeface="맑은 고딕"/>
+                <a:latin typeface="Pretendard"/>
+                <a:ea typeface="Pretendard"/>
               </a:rPr>
               <a:t>③ 외부에서 수집된 Windows 이벤트 로그 17,276건이 평문 저장돼 있음을 확인</a:t>
             </a:r>
@@ -11797,8 +11797,8 @@
                 <a:solidFill>
                   <a:srgbClr val="2563EB"/>
                 </a:solidFill>
-                <a:latin typeface="맑은 고딕"/>
-                <a:ea typeface="맑은 고딕"/>
+                <a:latin typeface="Pretendard"/>
+                <a:ea typeface="Pretendard"/>
               </a:rPr>
               <a:t>·  </a:t>
             </a:r>
@@ -11807,8 +11807,8 @@
                 <a:solidFill>
                   <a:srgbClr val="1F2A44"/>
                 </a:solidFill>
-                <a:latin typeface="맑은 고딕"/>
-                <a:ea typeface="맑은 고딕"/>
+                <a:latin typeface="Pretendard"/>
+                <a:ea typeface="Pretendard"/>
               </a:rPr>
               <a:t>④ 로그온/로그오프 이벤트와 사용자 SID·프로세스명 등 민감 필드가 원문 그대로 포함</a:t>
             </a:r>
@@ -11889,8 +11889,8 @@
                 <a:solidFill>
                   <a:srgbClr val="1E40AF"/>
                 </a:solidFill>
-                <a:latin typeface="맑은 고딕"/>
-                <a:ea typeface="맑은 고딕"/>
+                <a:latin typeface="Pretendard"/>
+                <a:ea typeface="Pretendard"/>
               </a:rPr>
               <a:t>왜 이 사례를 넣는가</a:t>
             </a:r>
@@ -11902,8 +11902,8 @@
                 <a:solidFill>
                   <a:srgbClr val="1F2A44"/>
                 </a:solidFill>
-                <a:latin typeface="맑은 고딕"/>
-                <a:ea typeface="맑은 고딕"/>
+                <a:latin typeface="Pretendard"/>
+                <a:ea typeface="Pretendard"/>
               </a:rPr>
               <a:t>탐지 → 증거 → 영향 산정 → 조치 → 재발 방지의 전 과정이 남아 있다. 침해사고 대응(IR) 절차 그 자체다.</a:t>
             </a:r>
@@ -11915,8 +11915,8 @@
                 <a:solidFill>
                   <a:srgbClr val="1F2A44"/>
                 </a:solidFill>
-                <a:latin typeface="맑은 고딕"/>
-                <a:ea typeface="맑은 고딕"/>
+                <a:latin typeface="Pretendard"/>
+                <a:ea typeface="Pretendard"/>
               </a:rPr>
               <a:t>남의 사고가 아니라 내가 만든 시스템의 결함을, 내가 찾아 기록했다. 자기 결과물의 취약점을 공개 기록으로 남기는 쪽을 택했다.</a:t>
             </a:r>
@@ -11928,8 +11928,8 @@
                 <a:solidFill>
                   <a:srgbClr val="5B667A"/>
                 </a:solidFill>
-                <a:latin typeface="맑은 고딕"/>
-                <a:ea typeface="맑은 고딕"/>
+                <a:latin typeface="Pretendard"/>
+                <a:ea typeface="Pretendard"/>
               </a:rPr>
               <a:t>사고 문서에는 공인 IP와 수집된 이벤트 필드가 들어 있어, 저장소 공개 시 마스킹이 선결 조건임을 함께 기록해 두었다.</a:t>
             </a:r>
@@ -12070,8 +12070,8 @@
                 <a:solidFill>
                   <a:srgbClr val="2563EB"/>
                 </a:solidFill>
-                <a:latin typeface="맑은 고딕"/>
-                <a:ea typeface="맑은 고딕"/>
+                <a:latin typeface="Pretendard"/>
+                <a:ea typeface="Pretendard"/>
               </a:rPr>
               <a:t>SUMMARY</a:t>
             </a:r>
@@ -12106,8 +12106,8 @@
                 <a:solidFill>
                   <a:srgbClr val="1F2A44"/>
                 </a:solidFill>
-                <a:latin typeface="맑은 고딕"/>
-                <a:ea typeface="맑은 고딕"/>
+                <a:latin typeface="Pretendard"/>
+                <a:ea typeface="Pretendard"/>
               </a:rPr>
               <a:t>스택 총괄 · 일하는 방식</a:t>
             </a:r>
@@ -12142,8 +12142,8 @@
                 <a:solidFill>
                   <a:srgbClr val="5B667A"/>
                 </a:solidFill>
-                <a:latin typeface="맑은 고딕"/>
-                <a:ea typeface="맑은 고딕"/>
+                <a:latin typeface="Pretendard"/>
+                <a:ea typeface="Pretendard"/>
               </a:rPr>
               <a:t>16</a:t>
             </a:r>
@@ -12178,8 +12178,8 @@
                 <a:solidFill>
                   <a:srgbClr val="1E40AF"/>
                 </a:solidFill>
-                <a:latin typeface="맑은 고딕"/>
-                <a:ea typeface="맑은 고딕"/>
+                <a:latin typeface="Pretendard"/>
+                <a:ea typeface="Pretendard"/>
               </a:rPr>
               <a:t>보안</a:t>
             </a:r>
@@ -12234,8 +12234,8 @@
                 <a:solidFill>
                   <a:srgbClr val="1F2A44"/>
                 </a:solidFill>
-                <a:latin typeface="맑은 고딕"/>
-                <a:ea typeface="맑은 고딕"/>
+                <a:latin typeface="Pretendard"/>
+                <a:ea typeface="Pretendard"/>
               </a:rPr>
               <a:t>SIEM (Loki·OpenSearch)</a:t>
             </a:r>
@@ -12290,8 +12290,8 @@
                 <a:solidFill>
                   <a:srgbClr val="1F2A44"/>
                 </a:solidFill>
-                <a:latin typeface="맑은 고딕"/>
-                <a:ea typeface="맑은 고딕"/>
+                <a:latin typeface="Pretendard"/>
+                <a:ea typeface="Pretendard"/>
               </a:rPr>
               <a:t>SOAR (Shuffle·플레이북)</a:t>
             </a:r>
@@ -12346,8 +12346,8 @@
                 <a:solidFill>
                   <a:srgbClr val="1F2A44"/>
                 </a:solidFill>
-                <a:latin typeface="맑은 고딕"/>
-                <a:ea typeface="맑은 고딕"/>
+                <a:latin typeface="Pretendard"/>
+                <a:ea typeface="Pretendard"/>
               </a:rPr>
               <a:t>EDR (User-mode 센서)</a:t>
             </a:r>
@@ -12402,8 +12402,8 @@
                 <a:solidFill>
                   <a:srgbClr val="1F2A44"/>
                 </a:solidFill>
-                <a:latin typeface="맑은 고딕"/>
-                <a:ea typeface="맑은 고딕"/>
+                <a:latin typeface="Pretendard"/>
+                <a:ea typeface="Pretendard"/>
               </a:rPr>
               <a:t>HIDS (Wazuh)</a:t>
             </a:r>
@@ -12458,8 +12458,8 @@
                 <a:solidFill>
                   <a:srgbClr val="1F2A44"/>
                 </a:solidFill>
-                <a:latin typeface="맑은 고딕"/>
-                <a:ea typeface="맑은 고딕"/>
+                <a:latin typeface="Pretendard"/>
+                <a:ea typeface="Pretendard"/>
               </a:rPr>
               <a:t>NIDS (Suricata·Zeek)</a:t>
             </a:r>
@@ -12514,8 +12514,8 @@
                 <a:solidFill>
                   <a:srgbClr val="1F2A44"/>
                 </a:solidFill>
-                <a:latin typeface="맑은 고딕"/>
-                <a:ea typeface="맑은 고딕"/>
+                <a:latin typeface="Pretendard"/>
+                <a:ea typeface="Pretendard"/>
               </a:rPr>
               <a:t>TI (MISP·TAXII/STIX)</a:t>
             </a:r>
@@ -12570,8 +12570,8 @@
                 <a:solidFill>
                   <a:srgbClr val="1F2A44"/>
                 </a:solidFill>
-                <a:latin typeface="맑은 고딕"/>
-                <a:ea typeface="맑은 고딕"/>
+                <a:latin typeface="Pretendard"/>
+                <a:ea typeface="Pretendard"/>
               </a:rPr>
               <a:t>케이스관리 (TheHive)</a:t>
             </a:r>
@@ -12626,8 +12626,8 @@
                 <a:solidFill>
                   <a:srgbClr val="1F2A44"/>
                 </a:solidFill>
-                <a:latin typeface="맑은 고딕"/>
-                <a:ea typeface="맑은 고딕"/>
+                <a:latin typeface="Pretendard"/>
+                <a:ea typeface="Pretendard"/>
               </a:rPr>
               <a:t>MITRE ATT&amp;CK</a:t>
             </a:r>
@@ -12682,8 +12682,8 @@
                 <a:solidFill>
                   <a:srgbClr val="1F2A44"/>
                 </a:solidFill>
-                <a:latin typeface="맑은 고딕"/>
-                <a:ea typeface="맑은 고딕"/>
+                <a:latin typeface="Pretendard"/>
+                <a:ea typeface="Pretendard"/>
               </a:rPr>
               <a:t>디지털 포렌식</a:t>
             </a:r>
@@ -12738,8 +12738,8 @@
                 <a:solidFill>
                   <a:srgbClr val="1F2A44"/>
                 </a:solidFill>
-                <a:latin typeface="맑은 고딕"/>
-                <a:ea typeface="맑은 고딕"/>
+                <a:latin typeface="Pretendard"/>
+                <a:ea typeface="Pretendard"/>
               </a:rPr>
               <a:t>AES 구현·CAVP 검증</a:t>
             </a:r>
@@ -12794,8 +12794,8 @@
                 <a:solidFill>
                   <a:srgbClr val="1F2A44"/>
                 </a:solidFill>
-                <a:latin typeface="맑은 고딕"/>
-                <a:ea typeface="맑은 고딕"/>
+                <a:latin typeface="Pretendard"/>
+                <a:ea typeface="Pretendard"/>
               </a:rPr>
               <a:t>fail2ban·UFW·iptables</a:t>
             </a:r>
@@ -12830,8 +12830,8 @@
                 <a:solidFill>
                   <a:srgbClr val="1E40AF"/>
                 </a:solidFill>
-                <a:latin typeface="맑은 고딕"/>
-                <a:ea typeface="맑은 고딕"/>
+                <a:latin typeface="Pretendard"/>
+                <a:ea typeface="Pretendard"/>
               </a:rPr>
               <a:t>AI / LLM</a:t>
             </a:r>
@@ -12886,8 +12886,8 @@
                 <a:solidFill>
                   <a:srgbClr val="1F2A44"/>
                 </a:solidFill>
-                <a:latin typeface="맑은 고딕"/>
-                <a:ea typeface="맑은 고딕"/>
+                <a:latin typeface="Pretendard"/>
+                <a:ea typeface="Pretendard"/>
               </a:rPr>
               <a:t>llama.cpp</a:t>
             </a:r>
@@ -12942,8 +12942,8 @@
                 <a:solidFill>
                   <a:srgbClr val="1F2A44"/>
                 </a:solidFill>
-                <a:latin typeface="맑은 고딕"/>
-                <a:ea typeface="맑은 고딕"/>
+                <a:latin typeface="Pretendard"/>
+                <a:ea typeface="Pretendard"/>
               </a:rPr>
               <a:t>Ollama</a:t>
             </a:r>
@@ -12998,8 +12998,8 @@
                 <a:solidFill>
                   <a:srgbClr val="1F2A44"/>
                 </a:solidFill>
-                <a:latin typeface="맑은 고딕"/>
-                <a:ea typeface="맑은 고딕"/>
+                <a:latin typeface="Pretendard"/>
+                <a:ea typeface="Pretendard"/>
               </a:rPr>
               <a:t>vLLM</a:t>
             </a:r>
@@ -13054,8 +13054,8 @@
                 <a:solidFill>
                   <a:srgbClr val="1F2A44"/>
                 </a:solidFill>
-                <a:latin typeface="맑은 고딕"/>
-                <a:ea typeface="맑은 고딕"/>
+                <a:latin typeface="Pretendard"/>
+                <a:ea typeface="Pretendard"/>
               </a:rPr>
               <a:t>Qdrant</a:t>
             </a:r>
@@ -13110,8 +13110,8 @@
                 <a:solidFill>
                   <a:srgbClr val="1F2A44"/>
                 </a:solidFill>
-                <a:latin typeface="맑은 고딕"/>
-                <a:ea typeface="맑은 고딕"/>
+                <a:latin typeface="Pretendard"/>
+                <a:ea typeface="Pretendard"/>
               </a:rPr>
               <a:t>ChromaDB</a:t>
             </a:r>
@@ -13166,8 +13166,8 @@
                 <a:solidFill>
                   <a:srgbClr val="1F2A44"/>
                 </a:solidFill>
-                <a:latin typeface="맑은 고딕"/>
-                <a:ea typeface="맑은 고딕"/>
+                <a:latin typeface="Pretendard"/>
+                <a:ea typeface="Pretendard"/>
               </a:rPr>
               <a:t>BGE-M3</a:t>
             </a:r>
@@ -13222,8 +13222,8 @@
                 <a:solidFill>
                   <a:srgbClr val="1F2A44"/>
                 </a:solidFill>
-                <a:latin typeface="맑은 고딕"/>
-                <a:ea typeface="맑은 고딕"/>
+                <a:latin typeface="Pretendard"/>
+                <a:ea typeface="Pretendard"/>
               </a:rPr>
               <a:t>RRF 리랭킹</a:t>
             </a:r>
@@ -13278,8 +13278,8 @@
                 <a:solidFill>
                   <a:srgbClr val="1F2A44"/>
                 </a:solidFill>
-                <a:latin typeface="맑은 고딕"/>
-                <a:ea typeface="맑은 고딕"/>
+                <a:latin typeface="Pretendard"/>
+                <a:ea typeface="Pretendard"/>
               </a:rPr>
               <a:t>QLoRA / PEFT</a:t>
             </a:r>
@@ -13334,8 +13334,8 @@
                 <a:solidFill>
                   <a:srgbClr val="1F2A44"/>
                 </a:solidFill>
-                <a:latin typeface="맑은 고딕"/>
-                <a:ea typeface="맑은 고딕"/>
+                <a:latin typeface="Pretendard"/>
+                <a:ea typeface="Pretendard"/>
               </a:rPr>
               <a:t>온디바이스 LLM</a:t>
             </a:r>
@@ -13390,8 +13390,8 @@
                 <a:solidFill>
                   <a:srgbClr val="1F2A44"/>
                 </a:solidFill>
-                <a:latin typeface="맑은 고딕"/>
-                <a:ea typeface="맑은 고딕"/>
+                <a:latin typeface="Pretendard"/>
+                <a:ea typeface="Pretendard"/>
               </a:rPr>
               <a:t>PII 마스킹</a:t>
             </a:r>
@@ -13446,8 +13446,8 @@
                 <a:solidFill>
                   <a:srgbClr val="1F2A44"/>
                 </a:solidFill>
-                <a:latin typeface="맑은 고딕"/>
-                <a:ea typeface="맑은 고딕"/>
+                <a:latin typeface="Pretendard"/>
+                <a:ea typeface="Pretendard"/>
               </a:rPr>
               <a:t>프롬프트 보안</a:t>
             </a:r>
@@ -13482,8 +13482,8 @@
                 <a:solidFill>
                   <a:srgbClr val="1E40AF"/>
                 </a:solidFill>
-                <a:latin typeface="맑은 고딕"/>
-                <a:ea typeface="맑은 고딕"/>
+                <a:latin typeface="Pretendard"/>
+                <a:ea typeface="Pretendard"/>
               </a:rPr>
               <a:t>언어 · 백엔드</a:t>
             </a:r>
@@ -13538,8 +13538,8 @@
                 <a:solidFill>
                   <a:srgbClr val="1F2A44"/>
                 </a:solidFill>
-                <a:latin typeface="맑은 고딕"/>
-                <a:ea typeface="맑은 고딕"/>
+                <a:latin typeface="Pretendard"/>
+                <a:ea typeface="Pretendard"/>
               </a:rPr>
               <a:t>Python 142,550줄</a:t>
             </a:r>
@@ -13594,8 +13594,8 @@
                 <a:solidFill>
                   <a:srgbClr val="1F2A44"/>
                 </a:solidFill>
-                <a:latin typeface="맑은 고딕"/>
-                <a:ea typeface="맑은 고딕"/>
+                <a:latin typeface="Pretendard"/>
+                <a:ea typeface="Pretendard"/>
               </a:rPr>
               <a:t>TypeScript 67,134줄</a:t>
             </a:r>
@@ -13611,7 +13611,7 @@
         <p:spPr>
           <a:xfrm>
             <a:off x="5960973" y="3575304"/>
-            <a:ext cx="1106424" cy="310896"/>
+            <a:ext cx="426110" cy="310896"/>
           </a:xfrm>
           <a:prstGeom prst="roundRect">
             <a:avLst>
@@ -13650,10 +13650,10 @@
                 <a:solidFill>
                   <a:srgbClr val="1F2A44"/>
                 </a:solidFill>
-                <a:latin typeface="맑은 고딕"/>
-                <a:ea typeface="맑은 고딕"/>
-              </a:rPr>
-              <a:t>Go 22,731줄</a:t>
+                <a:latin typeface="Pretendard"/>
+                <a:ea typeface="Pretendard"/>
+              </a:rPr>
+              <a:t>Go</a:t>
             </a:r>
           </a:p>
         </p:txBody>
@@ -13666,7 +13666,7 @@
         </p:nvSpPr>
         <p:spPr>
           <a:xfrm>
-            <a:off x="7177125" y="3575304"/>
+            <a:off x="6496811" y="3575304"/>
             <a:ext cx="1361541" cy="310896"/>
           </a:xfrm>
           <a:prstGeom prst="roundRect">
@@ -13706,8 +13706,8 @@
                 <a:solidFill>
                   <a:srgbClr val="1F2A44"/>
                 </a:solidFill>
-                <a:latin typeface="맑은 고딕"/>
-                <a:ea typeface="맑은 고딕"/>
+                <a:latin typeface="Pretendard"/>
+                <a:ea typeface="Pretendard"/>
               </a:rPr>
               <a:t>Shell 19,711줄</a:t>
             </a:r>
@@ -13722,7 +13722,7 @@
         </p:nvSpPr>
         <p:spPr>
           <a:xfrm>
-            <a:off x="8648394" y="3575304"/>
+            <a:off x="7968080" y="3575304"/>
             <a:ext cx="1276502" cy="310896"/>
           </a:xfrm>
           <a:prstGeom prst="roundRect">
@@ -13762,8 +13762,8 @@
                 <a:solidFill>
                   <a:srgbClr val="1F2A44"/>
                 </a:solidFill>
-                <a:latin typeface="맑은 고딕"/>
-                <a:ea typeface="맑은 고딕"/>
+                <a:latin typeface="Pretendard"/>
+                <a:ea typeface="Pretendard"/>
               </a:rPr>
               <a:t>Java 11,456줄</a:t>
             </a:r>
@@ -13778,7 +13778,7 @@
         </p:nvSpPr>
         <p:spPr>
           <a:xfrm>
-            <a:off x="2423160" y="3995928"/>
+            <a:off x="9354310" y="3575304"/>
             <a:ext cx="1531620" cy="310896"/>
           </a:xfrm>
           <a:prstGeom prst="roundRect">
@@ -13818,8 +13818,8 @@
                 <a:solidFill>
                   <a:srgbClr val="1F2A44"/>
                 </a:solidFill>
-                <a:latin typeface="맑은 고딕"/>
-                <a:ea typeface="맑은 고딕"/>
+                <a:latin typeface="Pretendard"/>
+                <a:ea typeface="Pretendard"/>
               </a:rPr>
               <a:t>C++ 2,840줄 (본인)</a:t>
             </a:r>
@@ -13834,7 +13834,7 @@
         </p:nvSpPr>
         <p:spPr>
           <a:xfrm>
-            <a:off x="4064508" y="3995928"/>
+            <a:off x="2423160" y="3995928"/>
             <a:ext cx="851306" cy="310896"/>
           </a:xfrm>
           <a:prstGeom prst="roundRect">
@@ -13874,8 +13874,8 @@
                 <a:solidFill>
                   <a:srgbClr val="1F2A44"/>
                 </a:solidFill>
-                <a:latin typeface="맑은 고딕"/>
-                <a:ea typeface="맑은 고딕"/>
+                <a:latin typeface="Pretendard"/>
+                <a:ea typeface="Pretendard"/>
               </a:rPr>
               <a:t>FastAPI</a:t>
             </a:r>
@@ -13890,7 +13890,7 @@
         </p:nvSpPr>
         <p:spPr>
           <a:xfrm>
-            <a:off x="5025542" y="3995928"/>
+            <a:off x="3384194" y="3995928"/>
             <a:ext cx="1191463" cy="310896"/>
           </a:xfrm>
           <a:prstGeom prst="roundRect">
@@ -13930,8 +13930,8 @@
                 <a:solidFill>
                   <a:srgbClr val="1F2A44"/>
                 </a:solidFill>
-                <a:latin typeface="맑은 고딕"/>
-                <a:ea typeface="맑은 고딕"/>
+                <a:latin typeface="Pretendard"/>
+                <a:ea typeface="Pretendard"/>
               </a:rPr>
               <a:t>Spring Boot</a:t>
             </a:r>
@@ -13946,7 +13946,7 @@
         </p:nvSpPr>
         <p:spPr>
           <a:xfrm>
-            <a:off x="6326733" y="3995928"/>
+            <a:off x="4685385" y="3995928"/>
             <a:ext cx="681228" cy="310896"/>
           </a:xfrm>
           <a:prstGeom prst="roundRect">
@@ -13986,8 +13986,8 @@
                 <a:solidFill>
                   <a:srgbClr val="1F2A44"/>
                 </a:solidFill>
-                <a:latin typeface="맑은 고딕"/>
-                <a:ea typeface="맑은 고딕"/>
+                <a:latin typeface="Pretendard"/>
+                <a:ea typeface="Pretendard"/>
               </a:rPr>
               <a:t>React</a:t>
             </a:r>
@@ -14022,8 +14022,8 @@
                 <a:solidFill>
                   <a:srgbClr val="1E40AF"/>
                 </a:solidFill>
-                <a:latin typeface="맑은 고딕"/>
-                <a:ea typeface="맑은 고딕"/>
+                <a:latin typeface="Pretendard"/>
+                <a:ea typeface="Pretendard"/>
               </a:rPr>
               <a:t>데이터 · 인프라</a:t>
             </a:r>
@@ -14078,8 +14078,8 @@
                 <a:solidFill>
                   <a:srgbClr val="1F2A44"/>
                 </a:solidFill>
-                <a:latin typeface="맑은 고딕"/>
-                <a:ea typeface="맑은 고딕"/>
+                <a:latin typeface="Pretendard"/>
+                <a:ea typeface="Pretendard"/>
               </a:rPr>
               <a:t>OpenTelemetry</a:t>
             </a:r>
@@ -14134,8 +14134,8 @@
                 <a:solidFill>
                   <a:srgbClr val="1F2A44"/>
                 </a:solidFill>
-                <a:latin typeface="맑은 고딕"/>
-                <a:ea typeface="맑은 고딕"/>
+                <a:latin typeface="Pretendard"/>
+                <a:ea typeface="Pretendard"/>
               </a:rPr>
               <a:t>ClickHouse</a:t>
             </a:r>
@@ -14190,8 +14190,8 @@
                 <a:solidFill>
                   <a:srgbClr val="1F2A44"/>
                 </a:solidFill>
-                <a:latin typeface="맑은 고딕"/>
-                <a:ea typeface="맑은 고딕"/>
+                <a:latin typeface="Pretendard"/>
+                <a:ea typeface="Pretendard"/>
               </a:rPr>
               <a:t>Prometheus</a:t>
             </a:r>
@@ -14246,8 +14246,8 @@
                 <a:solidFill>
                   <a:srgbClr val="1F2A44"/>
                 </a:solidFill>
-                <a:latin typeface="맑은 고딕"/>
-                <a:ea typeface="맑은 고딕"/>
+                <a:latin typeface="Pretendard"/>
+                <a:ea typeface="Pretendard"/>
               </a:rPr>
               <a:t>PostgreSQL</a:t>
             </a:r>
@@ -14302,8 +14302,8 @@
                 <a:solidFill>
                   <a:srgbClr val="1F2A44"/>
                 </a:solidFill>
-                <a:latin typeface="맑은 고딕"/>
-                <a:ea typeface="맑은 고딕"/>
+                <a:latin typeface="Pretendard"/>
+                <a:ea typeface="Pretendard"/>
               </a:rPr>
               <a:t>Redis</a:t>
             </a:r>
@@ -14319,7 +14319,7 @@
         <p:spPr>
           <a:xfrm>
             <a:off x="8333841" y="4654296"/>
-            <a:ext cx="596188" cy="310896"/>
+            <a:ext cx="1446580" cy="310896"/>
           </a:xfrm>
           <a:prstGeom prst="roundRect">
             <a:avLst>
@@ -14358,10 +14358,10 @@
                 <a:solidFill>
                   <a:srgbClr val="1F2A44"/>
                 </a:solidFill>
-                <a:latin typeface="맑은 고딕"/>
-                <a:ea typeface="맑은 고딕"/>
-              </a:rPr>
-              <a:t>NATS</a:t>
+                <a:latin typeface="Pretendard"/>
+                <a:ea typeface="Pretendard"/>
+              </a:rPr>
+              <a:t>Docker Compose</a:t>
             </a:r>
           </a:p>
         </p:txBody>
@@ -14374,8 +14374,8 @@
         </p:nvSpPr>
         <p:spPr>
           <a:xfrm>
-            <a:off x="9039757" y="4654296"/>
-            <a:ext cx="1446580" cy="310896"/>
+            <a:off x="9890149" y="4654296"/>
+            <a:ext cx="851306" cy="310896"/>
           </a:xfrm>
           <a:prstGeom prst="roundRect">
             <a:avLst>
@@ -14414,10 +14414,10 @@
                 <a:solidFill>
                   <a:srgbClr val="1F2A44"/>
                 </a:solidFill>
-                <a:latin typeface="맑은 고딕"/>
-                <a:ea typeface="맑은 고딕"/>
-              </a:rPr>
-              <a:t>Docker Compose</a:t>
+                <a:latin typeface="Pretendard"/>
+                <a:ea typeface="Pretendard"/>
+              </a:rPr>
+              <a:t>systemd</a:t>
             </a:r>
           </a:p>
         </p:txBody>
@@ -14431,7 +14431,7 @@
         <p:spPr>
           <a:xfrm>
             <a:off x="2423160" y="5074920"/>
-            <a:ext cx="851306" cy="310896"/>
+            <a:ext cx="681228" cy="310896"/>
           </a:xfrm>
           <a:prstGeom prst="roundRect">
             <a:avLst>
@@ -14470,10 +14470,10 @@
                 <a:solidFill>
                   <a:srgbClr val="1F2A44"/>
                 </a:solidFill>
-                <a:latin typeface="맑은 고딕"/>
-                <a:ea typeface="맑은 고딕"/>
-              </a:rPr>
-              <a:t>systemd</a:t>
+                <a:latin typeface="Pretendard"/>
+                <a:ea typeface="Pretendard"/>
+              </a:rPr>
+              <a:t>nginx</a:t>
             </a:r>
           </a:p>
         </p:txBody>
@@ -14486,8 +14486,8 @@
         </p:nvSpPr>
         <p:spPr>
           <a:xfrm>
-            <a:off x="3384194" y="5074920"/>
-            <a:ext cx="681228" cy="310896"/>
+            <a:off x="3214116" y="5074920"/>
+            <a:ext cx="766267" cy="310896"/>
           </a:xfrm>
           <a:prstGeom prst="roundRect">
             <a:avLst>
@@ -14526,10 +14526,10 @@
                 <a:solidFill>
                   <a:srgbClr val="1F2A44"/>
                 </a:solidFill>
-                <a:latin typeface="맑은 고딕"/>
-                <a:ea typeface="맑은 고딕"/>
-              </a:rPr>
-              <a:t>nginx</a:t>
+                <a:latin typeface="Pretendard"/>
+                <a:ea typeface="Pretendard"/>
+              </a:rPr>
+              <a:t>restic</a:t>
             </a:r>
           </a:p>
         </p:txBody>
@@ -14542,8 +14542,8 @@
         </p:nvSpPr>
         <p:spPr>
           <a:xfrm>
-            <a:off x="4175150" y="5074920"/>
-            <a:ext cx="766267" cy="310896"/>
+            <a:off x="4090111" y="5074920"/>
+            <a:ext cx="1021384" cy="310896"/>
           </a:xfrm>
           <a:prstGeom prst="roundRect">
             <a:avLst>
@@ -14582,10 +14582,10 @@
                 <a:solidFill>
                   <a:srgbClr val="1F2A44"/>
                 </a:solidFill>
-                <a:latin typeface="맑은 고딕"/>
-                <a:ea typeface="맑은 고딕"/>
-              </a:rPr>
-              <a:t>restic</a:t>
+                <a:latin typeface="Pretendard"/>
+                <a:ea typeface="Pretendard"/>
+              </a:rPr>
+              <a:t>Tailscale</a:t>
             </a:r>
           </a:p>
         </p:txBody>
@@ -14598,8 +14598,8 @@
         </p:nvSpPr>
         <p:spPr>
           <a:xfrm>
-            <a:off x="5051145" y="5074920"/>
-            <a:ext cx="1021384" cy="310896"/>
+            <a:off x="5221223" y="5074920"/>
+            <a:ext cx="1446580" cy="310896"/>
           </a:xfrm>
           <a:prstGeom prst="roundRect">
             <a:avLst>
@@ -14638,10 +14638,10 @@
                 <a:solidFill>
                   <a:srgbClr val="1F2A44"/>
                 </a:solidFill>
-                <a:latin typeface="맑은 고딕"/>
-                <a:ea typeface="맑은 고딕"/>
-              </a:rPr>
-              <a:t>Tailscale</a:t>
+                <a:latin typeface="Pretendard"/>
+                <a:ea typeface="Pretendard"/>
+              </a:rPr>
+              <a:t>GitHub Actions</a:t>
             </a:r>
           </a:p>
         </p:txBody>
@@ -14654,12 +14654,12 @@
         </p:nvSpPr>
         <p:spPr>
           <a:xfrm>
-            <a:off x="6182257" y="5074920"/>
-            <a:ext cx="1446580" cy="310896"/>
+            <a:off x="777240" y="5029200"/>
+            <a:ext cx="10835640" cy="1371600"/>
           </a:xfrm>
           <a:prstGeom prst="roundRect">
             <a:avLst>
-              <a:gd name="adj" fmla="val 50000"/>
+              <a:gd name="adj" fmla="val 8000"/>
             </a:avLst>
           </a:prstGeom>
           <a:solidFill>
@@ -14685,62 +14685,6 @@
           </a:fontRef>
         </p:style>
         <p:txBody>
-          <a:bodyPr rtlCol="0" anchor="ctr" wrap="square" lIns="50800" rIns="50800" tIns="25400" bIns="25400"/>
-          <a:lstStyle/>
-          <a:p>
-            <a:pPr algn="ctr"/>
-            <a:r>
-              <a:rPr sz="950" b="0">
-                <a:solidFill>
-                  <a:srgbClr val="1F2A44"/>
-                </a:solidFill>
-                <a:latin typeface="맑은 고딕"/>
-                <a:ea typeface="맑은 고딕"/>
-              </a:rPr>
-              <a:t>GitHub Actions</a:t>
-            </a:r>
-          </a:p>
-        </p:txBody>
-      </p:sp>
-      <p:sp>
-        <p:nvSpPr>
-          <p:cNvPr id="54" name="Rounded Rectangle 53"/>
-          <p:cNvSpPr/>
-          <p:nvPr/>
-        </p:nvSpPr>
-        <p:spPr>
-          <a:xfrm>
-            <a:off x="777240" y="5029200"/>
-            <a:ext cx="10835640" cy="1371600"/>
-          </a:xfrm>
-          <a:prstGeom prst="roundRect">
-            <a:avLst>
-              <a:gd name="adj" fmla="val 8000"/>
-            </a:avLst>
-          </a:prstGeom>
-          <a:solidFill>
-            <a:srgbClr val="F1F5F9"/>
-          </a:solidFill>
-          <a:ln>
-            <a:noFill/>
-          </a:ln>
-          <a:effectLst/>
-        </p:spPr>
-        <p:style>
-          <a:lnRef idx="1">
-            <a:schemeClr val="accent1"/>
-          </a:lnRef>
-          <a:fillRef idx="3">
-            <a:schemeClr val="accent1"/>
-          </a:fillRef>
-          <a:effectRef idx="2">
-            <a:schemeClr val="accent1"/>
-          </a:effectRef>
-          <a:fontRef idx="minor">
-            <a:schemeClr val="lt1"/>
-          </a:fontRef>
-        </p:style>
-        <p:txBody>
           <a:bodyPr rtlCol="0" anchor="ctr"/>
           <a:lstStyle/>
           <a:p>
@@ -14750,7 +14694,7 @@
       </p:sp>
       <p:sp>
         <p:nvSpPr>
-          <p:cNvPr id="55" name="TextBox 54"/>
+          <p:cNvPr id="54" name="TextBox 53"/>
           <p:cNvSpPr txBox="1"/>
           <p:nvPr/>
         </p:nvSpPr>
@@ -14776,8 +14720,8 @@
                 <a:solidFill>
                   <a:srgbClr val="1E40AF"/>
                 </a:solidFill>
-                <a:latin typeface="맑은 고딕"/>
-                <a:ea typeface="맑은 고딕"/>
+                <a:latin typeface="Pretendard"/>
+                <a:ea typeface="Pretendard"/>
               </a:rPr>
               <a:t>정확함 &gt; 영리함</a:t>
             </a:r>
@@ -14789,8 +14733,8 @@
                 <a:solidFill>
                   <a:srgbClr val="1F2A44"/>
                 </a:solidFill>
-                <a:latin typeface="맑은 고딕"/>
-                <a:ea typeface="맑은 고딕"/>
+                <a:latin typeface="Pretendard"/>
+                <a:ea typeface="Pretendard"/>
               </a:rPr>
               <a:t>스펙을 읽고 경계를 검증하고 운영에서 확인한다</a:t>
             </a:r>
@@ -14799,7 +14743,7 @@
       </p:sp>
       <p:sp>
         <p:nvSpPr>
-          <p:cNvPr id="56" name="TextBox 55"/>
+          <p:cNvPr id="55" name="TextBox 54"/>
           <p:cNvSpPr txBox="1"/>
           <p:nvPr/>
         </p:nvSpPr>
@@ -14825,8 +14769,8 @@
                 <a:solidFill>
                   <a:srgbClr val="1E40AF"/>
                 </a:solidFill>
-                <a:latin typeface="맑은 고딕"/>
-                <a:ea typeface="맑은 고딕"/>
+                <a:latin typeface="Pretendard"/>
+                <a:ea typeface="Pretendard"/>
               </a:rPr>
               <a:t>과장하지 않는다</a:t>
             </a:r>
@@ -14838,8 +14782,8 @@
                 <a:solidFill>
                   <a:srgbClr val="1F2A44"/>
                 </a:solidFill>
-                <a:latin typeface="맑은 고딕"/>
-                <a:ea typeface="맑은 고딕"/>
+                <a:latin typeface="Pretendard"/>
+                <a:ea typeface="Pretendard"/>
               </a:rPr>
               <a:t>edr-lab 30만 줄 중 본인 코드 2,840줄임을 먼저 적는다</a:t>
             </a:r>
@@ -14848,7 +14792,7 @@
       </p:sp>
       <p:sp>
         <p:nvSpPr>
-          <p:cNvPr id="57" name="TextBox 56"/>
+          <p:cNvPr id="56" name="TextBox 55"/>
           <p:cNvSpPr txBox="1"/>
           <p:nvPr/>
         </p:nvSpPr>
@@ -14874,8 +14818,8 @@
                 <a:solidFill>
                   <a:srgbClr val="1E40AF"/>
                 </a:solidFill>
-                <a:latin typeface="맑은 고딕"/>
-                <a:ea typeface="맑은 고딕"/>
+                <a:latin typeface="Pretendard"/>
+                <a:ea typeface="Pretendard"/>
               </a:rPr>
               <a:t>안 되는 것도 결과물</a:t>
             </a:r>
@@ -14887,8 +14831,8 @@
                 <a:solidFill>
                   <a:srgbClr val="1F2A44"/>
                 </a:solidFill>
-                <a:latin typeface="맑은 고딕"/>
-                <a:ea typeface="맑은 고딕"/>
+                <a:latin typeface="Pretendard"/>
+                <a:ea typeface="Pretendard"/>
               </a:rPr>
               <a:t>Ring 3의 한계·미커버 이벤트를 사각으로 공개한다</a:t>
             </a:r>
@@ -14897,7 +14841,7 @@
       </p:sp>
       <p:sp>
         <p:nvSpPr>
-          <p:cNvPr id="58" name="TextBox 57"/>
+          <p:cNvPr id="57" name="TextBox 56"/>
           <p:cNvSpPr txBox="1"/>
           <p:nvPr/>
         </p:nvSpPr>
@@ -14923,8 +14867,8 @@
                 <a:solidFill>
                   <a:srgbClr val="1E40AF"/>
                 </a:solidFill>
-                <a:latin typeface="맑은 고딕"/>
-                <a:ea typeface="맑은 고딕"/>
+                <a:latin typeface="Pretendard"/>
+                <a:ea typeface="Pretendard"/>
               </a:rPr>
               <a:t>재현 가능성</a:t>
             </a:r>
@@ -14936,8 +14880,8 @@
                 <a:solidFill>
                   <a:srgbClr val="1F2A44"/>
                 </a:solidFill>
-                <a:latin typeface="맑은 고딕"/>
-                <a:ea typeface="맑은 고딕"/>
+                <a:latin typeface="Pretendard"/>
+                <a:ea typeface="Pretendard"/>
               </a:rPr>
               <a:t>원클릭 설치·회귀 테스트·5축 문서를 저장소마다 유지한다</a:t>
             </a:r>
@@ -15078,8 +15022,8 @@
                 <a:solidFill>
                   <a:srgbClr val="FFFFFF"/>
                 </a:solidFill>
-                <a:latin typeface="맑은 고딕"/>
-                <a:ea typeface="맑은 고딕"/>
+                <a:latin typeface="Pretendard"/>
+                <a:ea typeface="Pretendard"/>
               </a:rPr>
               <a:t>보안 스택을 설계부터 운영까지 직접 만들어 본 엔지니어입니다.</a:t>
             </a:r>
@@ -15091,8 +15035,8 @@
                 <a:solidFill>
                   <a:srgbClr val="C9D6EE"/>
                 </a:solidFill>
-                <a:latin typeface="맑은 고딕"/>
-                <a:ea typeface="맑은 고딕"/>
+                <a:latin typeface="Pretendard"/>
+                <a:ea typeface="Pretendard"/>
               </a:rPr>
               <a:t>SIEM·SOAR·EDR·포렌식을 제품에서 개발하고, 같은 것을 개인 서버에 오픈소스로 조립해</a:t>
             </a:r>
@@ -15104,8 +15048,8 @@
                 <a:solidFill>
                   <a:srgbClr val="C9D6EE"/>
                 </a:solidFill>
-                <a:latin typeface="맑은 고딕"/>
-                <a:ea typeface="맑은 고딕"/>
+                <a:latin typeface="Pretendard"/>
+                <a:ea typeface="Pretendard"/>
               </a:rPr>
               <a:t>무엇이 되고 무엇이 안 되는지를 코드로 확인합니다.</a:t>
             </a:r>
@@ -15140,8 +15084,8 @@
                 <a:solidFill>
                   <a:srgbClr val="FFFFFF"/>
                 </a:solidFill>
-                <a:latin typeface="맑은 고딕"/>
-                <a:ea typeface="맑은 고딕"/>
+                <a:latin typeface="Pretendard"/>
+                <a:ea typeface="Pretendard"/>
               </a:rPr>
               <a:t>GitHub   github.com/adorahelen</a:t>
             </a:r>
@@ -15153,8 +15097,8 @@
                 <a:solidFill>
                   <a:srgbClr val="C9D6EE"/>
                 </a:solidFill>
-                <a:latin typeface="맑은 고딕"/>
-                <a:ea typeface="맑은 고딕"/>
+                <a:latin typeface="Pretendard"/>
+                <a:ea typeface="Pretendard"/>
               </a:rPr>
               <a:t>Email    kmkim26@outlook.com</a:t>
             </a:r>
@@ -15189,8 +15133,8 @@
                 <a:solidFill>
                   <a:srgbClr val="8A9BBD"/>
                 </a:solidFill>
-                <a:latin typeface="맑은 고딕"/>
-                <a:ea typeface="맑은 고딕"/>
+                <a:latin typeface="Pretendard"/>
+                <a:ea typeface="Pretendard"/>
               </a:rPr>
               <a:t>이 덱의 저장소는 대부분 private입니다 — 열람이 필요하면 요청 시 초대하거나 공개판(siem-trinity-public)을 안내드립니다.</a:t>
             </a:r>
@@ -15331,8 +15275,8 @@
                 <a:solidFill>
                   <a:srgbClr val="2563EB"/>
                 </a:solidFill>
-                <a:latin typeface="맑은 고딕"/>
-                <a:ea typeface="맑은 고딕"/>
+                <a:latin typeface="Pretendard"/>
+                <a:ea typeface="Pretendard"/>
               </a:rPr>
               <a:t>PROFILE</a:t>
             </a:r>
@@ -15367,8 +15311,8 @@
                 <a:solidFill>
                   <a:srgbClr val="1F2A44"/>
                 </a:solidFill>
-                <a:latin typeface="맑은 고딕"/>
-                <a:ea typeface="맑은 고딕"/>
+                <a:latin typeface="Pretendard"/>
+                <a:ea typeface="Pretendard"/>
               </a:rPr>
               <a:t>프로필 — 실무에서 만드는 것을, 집에서 처음부터 조립한다</a:t>
             </a:r>
@@ -15403,8 +15347,8 @@
                 <a:solidFill>
                   <a:srgbClr val="5B667A"/>
                 </a:solidFill>
-                <a:latin typeface="맑은 고딕"/>
-                <a:ea typeface="맑은 고딕"/>
+                <a:latin typeface="Pretendard"/>
+                <a:ea typeface="Pretendard"/>
               </a:rPr>
               <a:t>1</a:t>
             </a:r>
@@ -15439,8 +15383,8 @@
                 <a:solidFill>
                   <a:srgbClr val="1F2A44"/>
                 </a:solidFill>
-                <a:latin typeface="맑은 고딕"/>
-                <a:ea typeface="맑은 고딕"/>
+                <a:latin typeface="Pretendard"/>
+                <a:ea typeface="Pretendard"/>
               </a:rPr>
               <a:t>SIEM·SOAR 솔루션 기업의 보안/AI 엔지니어. 경력 1년 3개월.</a:t>
             </a:r>
@@ -15452,8 +15396,8 @@
                 <a:solidFill>
                   <a:srgbClr val="1E40AF"/>
                 </a:solidFill>
-                <a:latin typeface="맑은 고딕"/>
-                <a:ea typeface="맑은 고딕"/>
+                <a:latin typeface="Pretendard"/>
+                <a:ea typeface="Pretendard"/>
               </a:rPr>
               <a:t>"도구를 써봤다"가 아니라 "같은 것을 직접 만들어 한계를 확인했다"가 이 덱의 내용.</a:t>
             </a:r>
@@ -15576,8 +15520,8 @@
                 <a:solidFill>
                   <a:srgbClr val="1F2A44"/>
                 </a:solidFill>
-                <a:latin typeface="맑은 고딕"/>
-                <a:ea typeface="맑은 고딕"/>
+                <a:latin typeface="Pretendard"/>
+                <a:ea typeface="Pretendard"/>
               </a:rPr>
               <a:t>현 재직사 — SIEM/SOAR 솔루션 기업 (2026.02 ~)</a:t>
             </a:r>
@@ -15589,8 +15533,8 @@
                 <a:solidFill>
                   <a:srgbClr val="5B667A"/>
                 </a:solidFill>
-                <a:latin typeface="맑은 고딕"/>
-                <a:ea typeface="맑은 고딕"/>
+                <a:latin typeface="Pretendard"/>
+                <a:ea typeface="Pretendard"/>
               </a:rPr>
               <a:t>AI 보안 엔지니어 · 7인 팀</a:t>
             </a:r>
@@ -15602,8 +15546,8 @@
                 <a:solidFill>
                   <a:srgbClr val="1F2A44"/>
                 </a:solidFill>
-                <a:latin typeface="맑은 고딕"/>
-                <a:ea typeface="맑은 고딕"/>
+                <a:latin typeface="Pretendard"/>
+                <a:ea typeface="Pretendard"/>
               </a:rPr>
               <a:t>관측성 플랫폼과 LLM 어시스턴트 개발. 담당 서술은 이력서 참조 —</a:t>
             </a:r>
@@ -15615,8 +15559,8 @@
                 <a:solidFill>
                   <a:srgbClr val="1F2A44"/>
                 </a:solidFill>
-                <a:latin typeface="맑은 고딕"/>
-                <a:ea typeface="맑은 고딕"/>
+                <a:latin typeface="Pretendard"/>
+                <a:ea typeface="Pretendard"/>
               </a:rPr>
               <a:t>제품 코드·구조·화면은 이 덱에 일절 넣지 않는다.</a:t>
             </a:r>
@@ -15695,8 +15639,8 @@
                 <a:solidFill>
                   <a:srgbClr val="1F2A44"/>
                 </a:solidFill>
-                <a:latin typeface="맑은 고딕"/>
-                <a:ea typeface="맑은 고딕"/>
+                <a:latin typeface="Pretendard"/>
+                <a:ea typeface="Pretendard"/>
               </a:rPr>
               <a:t>전 직장 — DLP·데이터 보안 기업 (2024.12 ~ 2025.08)</a:t>
             </a:r>
@@ -15708,8 +15652,8 @@
                 <a:solidFill>
                   <a:srgbClr val="5B667A"/>
                 </a:solidFill>
-                <a:latin typeface="맑은 고딕"/>
-                <a:ea typeface="맑은 고딕"/>
+                <a:latin typeface="Pretendard"/>
+                <a:ea typeface="Pretendard"/>
               </a:rPr>
               <a:t>보안 엔지니어</a:t>
             </a:r>
@@ -15721,8 +15665,8 @@
                 <a:solidFill>
                   <a:srgbClr val="1F2A44"/>
                 </a:solidFill>
-                <a:latin typeface="맑은 고딕"/>
-                <a:ea typeface="맑은 고딕"/>
+                <a:latin typeface="Pretendard"/>
+                <a:ea typeface="Pretendard"/>
               </a:rPr>
               <a:t>개인정보 탐지 솔루션. 대용량 파일 API Redis 캐싱으로 응답 80% 단축,</a:t>
             </a:r>
@@ -15734,8 +15678,8 @@
                 <a:solidFill>
                   <a:srgbClr val="1F2A44"/>
                 </a:solidFill>
-                <a:latin typeface="맑은 고딕"/>
-                <a:ea typeface="맑은 고딕"/>
+                <a:latin typeface="Pretendard"/>
+                <a:ea typeface="Pretendard"/>
               </a:rPr>
               <a:t>NER 기반 비정형 데이터 탐지 범위 확장</a:t>
             </a:r>
@@ -15816,8 +15760,8 @@
                 <a:solidFill>
                   <a:srgbClr val="1E40AF"/>
                 </a:solidFill>
-                <a:latin typeface="맑은 고딕"/>
-                <a:ea typeface="맑은 고딕"/>
+                <a:latin typeface="Pretendard"/>
+                <a:ea typeface="Pretendard"/>
               </a:rPr>
               <a:t>학술 · 수상</a:t>
             </a:r>
@@ -15829,8 +15773,8 @@
                 <a:solidFill>
                   <a:srgbClr val="1F2A44"/>
                 </a:solidFill>
-                <a:latin typeface="맑은 고딕"/>
-                <a:ea typeface="맑은 고딕"/>
+                <a:latin typeface="Pretendard"/>
+                <a:ea typeface="Pretendard"/>
               </a:rPr>
               <a:t>제1저자 논문 — "디지털 포렌식 관점에서의 Threads 사용자 행위 분석"</a:t>
             </a:r>
@@ -15842,8 +15786,8 @@
                 <a:solidFill>
                   <a:srgbClr val="5B667A"/>
                 </a:solidFill>
-                <a:latin typeface="맑은 고딕"/>
-                <a:ea typeface="맑은 고딕"/>
+                <a:latin typeface="Pretendard"/>
+                <a:ea typeface="Pretendard"/>
               </a:rPr>
               <a:t>한국정보보호학회 동계학술대회(CISC-W'25) 구두발표 · 논문번호 328</a:t>
             </a:r>
@@ -15855,8 +15799,8 @@
                 <a:solidFill>
                   <a:srgbClr val="1E40AF"/>
                 </a:solidFill>
-                <a:latin typeface="맑은 고딕"/>
-                <a:ea typeface="맑은 고딕"/>
+                <a:latin typeface="Pretendard"/>
+                <a:ea typeface="Pretendard"/>
               </a:rPr>
               <a:t>KISTI 한국과학기술정보연구원 원장상 수상</a:t>
             </a:r>
@@ -15868,8 +15812,8 @@
                 <a:solidFill>
                   <a:srgbClr val="1F2A44"/>
                 </a:solidFill>
-                <a:latin typeface="맑은 고딕"/>
-                <a:ea typeface="맑은 고딕"/>
+                <a:latin typeface="Pretendard"/>
+                <a:ea typeface="Pretendard"/>
               </a:rPr>
               <a:t>어학 — JLPT N1</a:t>
             </a:r>
@@ -15952,8 +15896,8 @@
                 <a:solidFill>
                   <a:srgbClr val="1E40AF"/>
                 </a:solidFill>
-                <a:latin typeface="맑은 고딕"/>
-                <a:ea typeface="맑은 고딕"/>
+                <a:latin typeface="Pretendard"/>
+                <a:ea typeface="Pretendard"/>
               </a:rPr>
               <a:t>개인 저장소 실측 (adorahelen 26개)</a:t>
             </a:r>
@@ -15965,10 +15909,10 @@
                 <a:solidFill>
                   <a:srgbClr val="1F2A44"/>
                 </a:solidFill>
-                <a:latin typeface="맑은 고딕"/>
-                <a:ea typeface="맑은 고딕"/>
-              </a:rPr>
-              <a:t>본인 코드 286,062줄 — 벤더 라이브러리·사내 산출물 제외 후 전수 클론 계측</a:t>
+                <a:latin typeface="Pretendard"/>
+                <a:ea typeface="Pretendard"/>
+              </a:rPr>
+              <a:t>본인 코드 286,062줄 — 벤더 라이브러리·업무 산출물 제외 후 전수 클론 계측</a:t>
             </a:r>
           </a:p>
           <a:p>
@@ -15978,8 +15922,8 @@
                 <a:solidFill>
                   <a:srgbClr val="1F2A44"/>
                 </a:solidFill>
-                <a:latin typeface="맑은 고딕"/>
-                <a:ea typeface="맑은 고딕"/>
+                <a:latin typeface="Pretendard"/>
+                <a:ea typeface="Pretendard"/>
               </a:rPr>
               <a:t>코드 파일 1,801 · 테스트 165 · 문서(MD) 973 · GitHub Actions 5개 저장소</a:t>
             </a:r>
@@ -16120,8 +16064,8 @@
                 <a:solidFill>
                   <a:srgbClr val="2563EB"/>
                 </a:solidFill>
-                <a:latin typeface="맑은 고딕"/>
-                <a:ea typeface="맑은 고딕"/>
+                <a:latin typeface="Pretendard"/>
+                <a:ea typeface="Pretendard"/>
               </a:rPr>
               <a:t>OVERVIEW</a:t>
             </a:r>
@@ -16156,8 +16100,8 @@
                 <a:solidFill>
                   <a:srgbClr val="1F2A44"/>
                 </a:solidFill>
-                <a:latin typeface="맑은 고딕"/>
-                <a:ea typeface="맑은 고딕"/>
+                <a:latin typeface="Pretendard"/>
+                <a:ea typeface="Pretendard"/>
               </a:rPr>
               <a:t>프로젝트 맵 — 개인 저장소 6선 (전부 adorahelen)</a:t>
             </a:r>
@@ -16192,8 +16136,8 @@
                 <a:solidFill>
                   <a:srgbClr val="5B667A"/>
                 </a:solidFill>
-                <a:latin typeface="맑은 고딕"/>
-                <a:ea typeface="맑은 고딕"/>
+                <a:latin typeface="Pretendard"/>
+                <a:ea typeface="Pretendard"/>
               </a:rPr>
               <a:t>2</a:t>
             </a:r>
@@ -16320,8 +16264,8 @@
                 <a:solidFill>
                   <a:srgbClr val="1F2A44"/>
                 </a:solidFill>
-                <a:latin typeface="맑은 고딕"/>
-                <a:ea typeface="맑은 고딕"/>
+                <a:latin typeface="Pretendard"/>
+                <a:ea typeface="Pretendard"/>
               </a:rPr>
               <a:t>SIEM-Trinity</a:t>
             </a:r>
@@ -16330,8 +16274,8 @@
                 <a:solidFill>
                   <a:srgbClr val="5B667A"/>
                 </a:solidFill>
-                <a:latin typeface="맑은 고딕"/>
-                <a:ea typeface="맑은 고딕"/>
+                <a:latin typeface="Pretendard"/>
+                <a:ea typeface="Pretendard"/>
               </a:rPr>
               <a:t>   자작 XDR</a:t>
             </a:r>
@@ -16366,8 +16310,8 @@
                 <a:solidFill>
                   <a:srgbClr val="1F2A44"/>
                 </a:solidFill>
-                <a:latin typeface="맑은 고딕"/>
-                <a:ea typeface="맑은 고딕"/>
+                <a:latin typeface="Pretendard"/>
+                <a:ea typeface="Pretendard"/>
               </a:rPr>
               <a:t>홈서버 1대에 수집·탐지·분석·대응 4계층 + SOC 콘솔을 올린 모노레포. 공개판 siem-trinity-public 별도 유지</a:t>
             </a:r>
@@ -16402,8 +16346,8 @@
                 <a:solidFill>
                   <a:srgbClr val="1E40AF"/>
                 </a:solidFill>
-                <a:latin typeface="맑은 고딕"/>
-                <a:ea typeface="맑은 고딕"/>
+                <a:latin typeface="Pretendard"/>
+                <a:ea typeface="Pretendard"/>
               </a:rPr>
               <a:t>자동대응 6단계 · 컨테이너 10</a:t>
             </a:r>
@@ -16530,20 +16474,20 @@
                 <a:solidFill>
                   <a:srgbClr val="1F2A44"/>
                 </a:solidFill>
-                <a:latin typeface="맑은 고딕"/>
-                <a:ea typeface="맑은 고딕"/>
-              </a:rPr>
-              <a:t>signum</a:t>
+                <a:latin typeface="Pretendard"/>
+                <a:ea typeface="Pretendard"/>
+              </a:rPr>
+              <a:t>abliteration 재현</a:t>
             </a:r>
             <a:r>
               <a:rPr sz="1000" b="0">
                 <a:solidFill>
                   <a:srgbClr val="5B667A"/>
                 </a:solidFill>
-                <a:latin typeface="맑은 고딕"/>
-                <a:ea typeface="맑은 고딕"/>
-              </a:rPr>
-              <a:t>   SIEM 재설계</a:t>
+                <a:latin typeface="Pretendard"/>
+                <a:ea typeface="Pretendard"/>
+              </a:rPr>
+              <a:t>   AI 보안</a:t>
             </a:r>
           </a:p>
         </p:txBody>
@@ -16576,10 +16520,10 @@
                 <a:solidFill>
                   <a:srgbClr val="1F2A44"/>
                 </a:solidFill>
-                <a:latin typeface="맑은 고딕"/>
-                <a:ea typeface="맑은 고딕"/>
-              </a:rPr>
-              <a:t>상용 SIEM(OSGi 128번들)을 역분석해 Go 마이크로서비스 11개로 재설계. 탐지 룰 DSL 파서 직접 구현</a:t>
+                <a:latin typeface="Pretendard"/>
+                <a:ea typeface="Pretendard"/>
+              </a:rPr>
+              <a:t>LLM 거부 정렬이 단일 방향으로 무너지는지 논문 재현·측정. 거부 방향을 탐지 신호로 역이용하는 방어 관점</a:t>
             </a:r>
           </a:p>
         </p:txBody>
@@ -16612,10 +16556,10 @@
                 <a:solidFill>
                   <a:srgbClr val="1E40AF"/>
                 </a:solidFill>
-                <a:latin typeface="맑은 고딕"/>
-                <a:ea typeface="맑은 고딕"/>
-              </a:rPr>
-              <a:t>번들 103/128 · E2E 22/22</a:t>
+                <a:latin typeface="Pretendard"/>
+                <a:ea typeface="Pretendard"/>
+              </a:rPr>
+              <a:t>거부율 1.00→0.00 · 공개 발행</a:t>
             </a:r>
           </a:p>
         </p:txBody>
@@ -16740,8 +16684,8 @@
                 <a:solidFill>
                   <a:srgbClr val="1F2A44"/>
                 </a:solidFill>
-                <a:latin typeface="맑은 고딕"/>
-                <a:ea typeface="맑은 고딕"/>
+                <a:latin typeface="Pretendard"/>
+                <a:ea typeface="Pretendard"/>
               </a:rPr>
               <a:t>edr-lab</a:t>
             </a:r>
@@ -16750,8 +16694,8 @@
                 <a:solidFill>
                   <a:srgbClr val="5B667A"/>
                 </a:solidFill>
-                <a:latin typeface="맑은 고딕"/>
-                <a:ea typeface="맑은 고딕"/>
+                <a:latin typeface="Pretendard"/>
+                <a:ea typeface="Pretendard"/>
               </a:rPr>
               <a:t>   엔드포인트 센서</a:t>
             </a:r>
@@ -16786,8 +16730,8 @@
                 <a:solidFill>
                   <a:srgbClr val="1F2A44"/>
                 </a:solidFill>
-                <a:latin typeface="맑은 고딕"/>
-                <a:ea typeface="맑은 고딕"/>
+                <a:latin typeface="Pretendard"/>
+                <a:ea typeface="Pretendard"/>
               </a:rPr>
               <a:t>커널 드라이버 없이 Ring 3에서 어디까지 관측되는가. 프로세스·파일·네트워크·레지스트리 + 포렌식 수집</a:t>
             </a:r>
@@ -16822,8 +16766,8 @@
                 <a:solidFill>
                   <a:srgbClr val="1E40AF"/>
                 </a:solidFill>
-                <a:latin typeface="맑은 고딕"/>
-                <a:ea typeface="맑은 고딕"/>
+                <a:latin typeface="Pretendard"/>
+                <a:ea typeface="Pretendard"/>
               </a:rPr>
               <a:t>C++ 2,840줄 · 규칙 14종</a:t>
             </a:r>
@@ -16950,8 +16894,8 @@
                 <a:solidFill>
                   <a:srgbClr val="1F2A44"/>
                 </a:solidFill>
-                <a:latin typeface="맑은 고딕"/>
-                <a:ea typeface="맑은 고딕"/>
+                <a:latin typeface="Pretendard"/>
+                <a:ea typeface="Pretendard"/>
               </a:rPr>
               <a:t>security-labs</a:t>
             </a:r>
@@ -16960,8 +16904,8 @@
                 <a:solidFill>
                   <a:srgbClr val="5B667A"/>
                 </a:solidFill>
-                <a:latin typeface="맑은 고딕"/>
-                <a:ea typeface="맑은 고딕"/>
+                <a:latin typeface="Pretendard"/>
+                <a:ea typeface="Pretendard"/>
               </a:rPr>
               <a:t>   포렌식 · 암호</a:t>
             </a:r>
@@ -16996,8 +16940,8 @@
                 <a:solidFill>
                   <a:srgbClr val="1F2A44"/>
                 </a:solidFill>
-                <a:latin typeface="맑은 고딕"/>
-                <a:ea typeface="맑은 고딕"/>
+                <a:latin typeface="Pretendard"/>
+                <a:ea typeface="Pretendard"/>
               </a:rPr>
               <a:t>Threads 앱 포렌식(수상 논문 기반) · Windows 브라우저 포렌식 · AES-128 직접 구현</a:t>
             </a:r>
@@ -17032,8 +16976,8 @@
                 <a:solidFill>
                   <a:srgbClr val="1E40AF"/>
                 </a:solidFill>
-                <a:latin typeface="맑은 고딕"/>
-                <a:ea typeface="맑은 고딕"/>
+                <a:latin typeface="Pretendard"/>
+                <a:ea typeface="Pretendard"/>
               </a:rPr>
               <a:t>KISTI 원장상 · CAVP 검증</a:t>
             </a:r>
@@ -17160,8 +17104,8 @@
                 <a:solidFill>
                   <a:srgbClr val="1F2A44"/>
                 </a:solidFill>
-                <a:latin typeface="맑은 고딕"/>
-                <a:ea typeface="맑은 고딕"/>
+                <a:latin typeface="Pretendard"/>
+                <a:ea typeface="Pretendard"/>
               </a:rPr>
               <a:t>agent-console</a:t>
             </a:r>
@@ -17170,8 +17114,8 @@
                 <a:solidFill>
                   <a:srgbClr val="5B667A"/>
                 </a:solidFill>
-                <a:latin typeface="맑은 고딕"/>
-                <a:ea typeface="맑은 고딕"/>
+                <a:latin typeface="Pretendard"/>
+                <a:ea typeface="Pretendard"/>
               </a:rPr>
               <a:t>   온프레미스 AI</a:t>
             </a:r>
@@ -17206,10 +17150,10 @@
                 <a:solidFill>
                   <a:srgbClr val="1F2A44"/>
                 </a:solidFill>
-                <a:latin typeface="맑은 고딕"/>
-                <a:ea typeface="맑은 고딕"/>
-              </a:rPr>
-              <a:t>엔진은 고정, 도메인은 카트리지(프롬프트·지식·모델)로 교체하는 에이전트 콘솔. 실운영 관제 에이전트 계보</a:t>
+                <a:latin typeface="Pretendard"/>
+                <a:ea typeface="Pretendard"/>
+              </a:rPr>
+              <a:t>엔진은 고정, 도메인은 카트리지(프롬프트·지식·모델)로 교체하는 에이전트 콘솔. 보안관제 도메인 카트리지 포함</a:t>
             </a:r>
           </a:p>
         </p:txBody>
@@ -17242,8 +17186,8 @@
                 <a:solidFill>
                   <a:srgbClr val="1E40AF"/>
                 </a:solidFill>
-                <a:latin typeface="맑은 고딕"/>
-                <a:ea typeface="맑은 고딕"/>
+                <a:latin typeface="Pretendard"/>
+                <a:ea typeface="Pretendard"/>
               </a:rPr>
               <a:t>Python 70,424줄 · 테스트 55</a:t>
             </a:r>
@@ -17370,8 +17314,8 @@
                 <a:solidFill>
                   <a:srgbClr val="1F2A44"/>
                 </a:solidFill>
-                <a:latin typeface="맑은 고딕"/>
-                <a:ea typeface="맑은 고딕"/>
+                <a:latin typeface="Pretendard"/>
+                <a:ea typeface="Pretendard"/>
               </a:rPr>
               <a:t>운영 · 인프라</a:t>
             </a:r>
@@ -17380,8 +17324,8 @@
                 <a:solidFill>
                   <a:srgbClr val="5B667A"/>
                 </a:solidFill>
-                <a:latin typeface="맑은 고딕"/>
-                <a:ea typeface="맑은 고딕"/>
+                <a:latin typeface="Pretendard"/>
+                <a:ea typeface="Pretendard"/>
               </a:rPr>
               <a:t>   fossil-fuel · ops</a:t>
             </a:r>
@@ -17416,8 +17360,8 @@
                 <a:solidFill>
                   <a:srgbClr val="1F2A44"/>
                 </a:solidFill>
-                <a:latin typeface="맑은 고딕"/>
-                <a:ea typeface="맑은 고딕"/>
+                <a:latin typeface="Pretendard"/>
+                <a:ea typeface="Pretendard"/>
               </a:rPr>
               <a:t>AWS 5개월 운영 → 미니 PC 1대 이전(고정비 0원). 홈서버 인시던트 6건·런북 9종 기록</a:t>
             </a:r>
@@ -17452,8 +17396,8 @@
                 <a:solidFill>
                   <a:srgbClr val="1E40AF"/>
                 </a:solidFill>
-                <a:latin typeface="맑은 고딕"/>
-                <a:ea typeface="맑은 고딕"/>
+                <a:latin typeface="Pretendard"/>
+                <a:ea typeface="Pretendard"/>
               </a:rPr>
               <a:t>쓰기증폭 700배 사고 해결</a:t>
             </a:r>
@@ -17594,8 +17538,8 @@
                 <a:solidFill>
                   <a:srgbClr val="2563EB"/>
                 </a:solidFill>
-                <a:latin typeface="맑은 고딕"/>
-                <a:ea typeface="맑은 고딕"/>
+                <a:latin typeface="Pretendard"/>
+                <a:ea typeface="Pretendard"/>
               </a:rPr>
               <a:t>PROJECT 01 · 개인 (adorahelen/siem-trinity)</a:t>
             </a:r>
@@ -17630,8 +17574,8 @@
                 <a:solidFill>
                   <a:srgbClr val="1F2A44"/>
                 </a:solidFill>
-                <a:latin typeface="맑은 고딕"/>
-                <a:ea typeface="맑은 고딕"/>
+                <a:latin typeface="Pretendard"/>
+                <a:ea typeface="Pretendard"/>
               </a:rPr>
               <a:t>SIEM-Trinity — 홈서버 1대로 굴리는 자작 XDR</a:t>
             </a:r>
@@ -17666,8 +17610,8 @@
                 <a:solidFill>
                   <a:srgbClr val="5B667A"/>
                 </a:solidFill>
-                <a:latin typeface="맑은 고딕"/>
-                <a:ea typeface="맑은 고딕"/>
+                <a:latin typeface="Pretendard"/>
+                <a:ea typeface="Pretendard"/>
               </a:rPr>
               <a:t>3</a:t>
             </a:r>
@@ -17702,8 +17646,8 @@
                 <a:solidFill>
                   <a:srgbClr val="1E40AF"/>
                 </a:solidFill>
-                <a:latin typeface="맑은 고딕"/>
-                <a:ea typeface="맑은 고딕"/>
+                <a:latin typeface="Pretendard"/>
+                <a:ea typeface="Pretendard"/>
               </a:rPr>
               <a:t>수집·탐지·분석·대응 4계층과 SOC 콘솔을 한 모노레포에 넣고, 상용 XDR이 하는 일을 오픈소스로 재현</a:t>
             </a:r>
@@ -17742,8 +17686,8 @@
                 <a:solidFill>
                   <a:srgbClr val="2563EB"/>
                 </a:solidFill>
-                <a:latin typeface="맑은 고딕"/>
-                <a:ea typeface="맑은 고딕"/>
+                <a:latin typeface="Pretendard"/>
+                <a:ea typeface="Pretendard"/>
               </a:rPr>
               <a:t>·  </a:t>
             </a:r>
@@ -17752,8 +17696,8 @@
                 <a:solidFill>
                   <a:srgbClr val="1F2A44"/>
                 </a:solidFill>
-                <a:latin typeface="맑은 고딕"/>
-                <a:ea typeface="맑은 고딕"/>
+                <a:latin typeface="Pretendard"/>
+                <a:ea typeface="Pretendard"/>
               </a:rPr>
               <a:t>4계층 모노레포 — 01 수집(Zeek·Suricata·Wazuh) / 02 탐지(FastAPI BFF·ML 4종) / 03 분석(Ollama·ChromaDB) / 04 UI(TrinitySOC)</a:t>
             </a:r>
@@ -17769,8 +17713,8 @@
                 <a:solidFill>
                   <a:srgbClr val="2563EB"/>
                 </a:solidFill>
-                <a:latin typeface="맑은 고딕"/>
-                <a:ea typeface="맑은 고딕"/>
+                <a:latin typeface="Pretendard"/>
+                <a:ea typeface="Pretendard"/>
               </a:rPr>
               <a:t>·  </a:t>
             </a:r>
@@ -17779,8 +17723,8 @@
                 <a:solidFill>
                   <a:srgbClr val="1F2A44"/>
                 </a:solidFill>
-                <a:latin typeface="맑은 고딕"/>
-                <a:ea typeface="맑은 고딕"/>
+                <a:latin typeface="Pretendard"/>
+                <a:ea typeface="Pretendard"/>
               </a:rPr>
               <a:t>XDR 자동 대응 체인 6단계를 코드로 완성 — Wazuh 가시성 → fail2ban 차단 → active-response → MISP IOC → Shuffle SOAR → TheHive 케이스</a:t>
             </a:r>
@@ -17796,8 +17740,8 @@
                 <a:solidFill>
                   <a:srgbClr val="2563EB"/>
                 </a:solidFill>
-                <a:latin typeface="맑은 고딕"/>
-                <a:ea typeface="맑은 고딕"/>
+                <a:latin typeface="Pretendard"/>
+                <a:ea typeface="Pretendard"/>
               </a:rPr>
               <a:t>·  </a:t>
             </a:r>
@@ -17806,8 +17750,8 @@
                 <a:solidFill>
                   <a:srgbClr val="1F2A44"/>
                 </a:solidFill>
-                <a:latin typeface="맑은 고딕"/>
-                <a:ea typeface="맑은 고딕"/>
+                <a:latin typeface="Pretendard"/>
+                <a:ea typeface="Pretendard"/>
               </a:rPr>
               <a:t>6단계 전부 구현했으나 운영 토글은 안전상 OFF(dry-run) — 오탐 자동 차단이 자기 서비스를 끊는 위험을 인정하고 기본값을 보수적으로 잡았다</a:t>
             </a:r>
@@ -17823,8 +17767,8 @@
                 <a:solidFill>
                   <a:srgbClr val="2563EB"/>
                 </a:solidFill>
-                <a:latin typeface="맑은 고딕"/>
-                <a:ea typeface="맑은 고딕"/>
+                <a:latin typeface="Pretendard"/>
+                <a:ea typeface="Pretendard"/>
               </a:rPr>
               <a:t>·  </a:t>
             </a:r>
@@ -17833,8 +17777,8 @@
                 <a:solidFill>
                   <a:srgbClr val="1F2A44"/>
                 </a:solidFill>
-                <a:latin typeface="맑은 고딕"/>
-                <a:ea typeface="맑은 고딕"/>
+                <a:latin typeface="Pretendard"/>
+                <a:ea typeface="Pretendard"/>
               </a:rPr>
               <a:t>LLM 알람 분석은 4섹션 구조 프롬프트(요약·공격체인·위험평가·권장대응)로 고정해 환각을 구조로 억제</a:t>
             </a:r>
@@ -17850,8 +17794,8 @@
                 <a:solidFill>
                   <a:srgbClr val="2563EB"/>
                 </a:solidFill>
-                <a:latin typeface="맑은 고딕"/>
-                <a:ea typeface="맑은 고딕"/>
+                <a:latin typeface="Pretendard"/>
+                <a:ea typeface="Pretendard"/>
               </a:rPr>
               <a:t>·  </a:t>
             </a:r>
@@ -17860,8 +17804,8 @@
                 <a:solidFill>
                   <a:srgbClr val="1F2A44"/>
                 </a:solidFill>
-                <a:latin typeface="맑은 고딕"/>
-                <a:ea typeface="맑은 고딕"/>
+                <a:latin typeface="Pretendard"/>
+                <a:ea typeface="Pretendard"/>
               </a:rPr>
               <a:t>공개판 siem-trinity-public 별도 유지 — 1커밋 스쿼시 + 운영 호스트 자산 정보 제거 후 분리</a:t>
             </a:r>
@@ -17942,8 +17886,8 @@
                 <a:solidFill>
                   <a:srgbClr val="1E40AF"/>
                 </a:solidFill>
-                <a:latin typeface="맑은 고딕"/>
-                <a:ea typeface="맑은 고딕"/>
+                <a:latin typeface="Pretendard"/>
+                <a:ea typeface="Pretendard"/>
               </a:rPr>
               <a:t>핵심 성과 · 실측</a:t>
             </a:r>
@@ -17982,8 +17926,8 @@
                 <a:solidFill>
                   <a:srgbClr val="2563EB"/>
                 </a:solidFill>
-                <a:latin typeface="맑은 고딕"/>
-                <a:ea typeface="맑은 고딕"/>
+                <a:latin typeface="Pretendard"/>
+                <a:ea typeface="Pretendard"/>
               </a:rPr>
               <a:t>·  </a:t>
             </a:r>
@@ -17992,8 +17936,8 @@
                 <a:solidFill>
                   <a:srgbClr val="1F2A44"/>
                 </a:solidFill>
-                <a:latin typeface="맑은 고딕"/>
-                <a:ea typeface="맑은 고딕"/>
+                <a:latin typeface="Pretendard"/>
+                <a:ea typeface="Pretendard"/>
               </a:rPr>
               <a:t>컨테이너 10개 상시 가동, 외부 노출 포트는 콘솔 1개뿐 — 나머지 전부 localhost 바인딩</a:t>
             </a:r>
@@ -18009,8 +17953,8 @@
                 <a:solidFill>
                   <a:srgbClr val="2563EB"/>
                 </a:solidFill>
-                <a:latin typeface="맑은 고딕"/>
-                <a:ea typeface="맑은 고딕"/>
+                <a:latin typeface="Pretendard"/>
+                <a:ea typeface="Pretendard"/>
               </a:rPr>
               <a:t>·  </a:t>
             </a:r>
@@ -18019,8 +17963,8 @@
                 <a:solidFill>
                   <a:srgbClr val="1F2A44"/>
                 </a:solidFill>
-                <a:latin typeface="맑은 고딕"/>
-                <a:ea typeface="맑은 고딕"/>
+                <a:latin typeface="Pretendard"/>
+                <a:ea typeface="Pretendard"/>
               </a:rPr>
               <a:t>ATT&amp;CK 기법 697건을 ChromaDB에 적재해 탐지 결과와 매핑</a:t>
             </a:r>
@@ -18036,8 +17980,8 @@
                 <a:solidFill>
                   <a:srgbClr val="2563EB"/>
                 </a:solidFill>
-                <a:latin typeface="맑은 고딕"/>
-                <a:ea typeface="맑은 고딕"/>
+                <a:latin typeface="Pretendard"/>
+                <a:ea typeface="Pretendard"/>
               </a:rPr>
               <a:t>·  </a:t>
             </a:r>
@@ -18046,8 +17990,8 @@
                 <a:solidFill>
                   <a:srgbClr val="1F2A44"/>
                 </a:solidFill>
-                <a:latin typeface="맑은 고딕"/>
-                <a:ea typeface="맑은 고딕"/>
+                <a:latin typeface="Pretendard"/>
+                <a:ea typeface="Pretendard"/>
               </a:rPr>
               <a:t>TrinitySOC — React 18 + TypeScript strict, 위젯 23종 전부 CRUD·드래그 배치</a:t>
             </a:r>
@@ -18063,8 +18007,8 @@
                 <a:solidFill>
                   <a:srgbClr val="2563EB"/>
                 </a:solidFill>
-                <a:latin typeface="맑은 고딕"/>
-                <a:ea typeface="맑은 고딕"/>
+                <a:latin typeface="Pretendard"/>
+                <a:ea typeface="Pretendard"/>
               </a:rPr>
               <a:t>·  </a:t>
             </a:r>
@@ -18073,8 +18017,8 @@
                 <a:solidFill>
                   <a:srgbClr val="1F2A44"/>
                 </a:solidFill>
-                <a:latin typeface="맑은 고딕"/>
-                <a:ea typeface="맑은 고딕"/>
+                <a:latin typeface="Pretendard"/>
+                <a:ea typeface="Pretendard"/>
               </a:rPr>
               <a:t>detection-api FastAPI 엔드포인트 27개가 Loki·Prometheus를 단일 BFF로 통합</a:t>
             </a:r>
@@ -18090,8 +18034,8 @@
                 <a:solidFill>
                   <a:srgbClr val="2563EB"/>
                 </a:solidFill>
-                <a:latin typeface="맑은 고딕"/>
-                <a:ea typeface="맑은 고딕"/>
+                <a:latin typeface="Pretendard"/>
+                <a:ea typeface="Pretendard"/>
               </a:rPr>
               <a:t>·  </a:t>
             </a:r>
@@ -18100,8 +18044,8 @@
                 <a:solidFill>
                   <a:srgbClr val="1F2A44"/>
                 </a:solidFill>
-                <a:latin typeface="맑은 고딕"/>
-                <a:ea typeface="맑은 고딕"/>
+                <a:latin typeface="Pretendard"/>
+                <a:ea typeface="Pretendard"/>
               </a:rPr>
               <a:t>탐지 로직은 Isolation Forest·변동계수·엔트로피 등 4종을 병렬로 두고 교차 확인</a:t>
             </a:r>
@@ -18136,8 +18080,8 @@
                 <a:solidFill>
                   <a:srgbClr val="5B667A"/>
                 </a:solidFill>
-                <a:latin typeface="맑은 고딕"/>
-                <a:ea typeface="맑은 고딕"/>
+                <a:latin typeface="Pretendard"/>
+                <a:ea typeface="Pretendard"/>
               </a:rPr>
               <a:t>STACK</a:t>
             </a:r>
@@ -18192,8 +18136,8 @@
                 <a:solidFill>
                   <a:srgbClr val="1F2A44"/>
                 </a:solidFill>
-                <a:latin typeface="맑은 고딕"/>
-                <a:ea typeface="맑은 고딕"/>
+                <a:latin typeface="Pretendard"/>
+                <a:ea typeface="Pretendard"/>
               </a:rPr>
               <a:t>Python 3.12</a:t>
             </a:r>
@@ -18248,8 +18192,8 @@
                 <a:solidFill>
                   <a:srgbClr val="1F2A44"/>
                 </a:solidFill>
-                <a:latin typeface="맑은 고딕"/>
-                <a:ea typeface="맑은 고딕"/>
+                <a:latin typeface="Pretendard"/>
+                <a:ea typeface="Pretendard"/>
               </a:rPr>
               <a:t>FastAPI</a:t>
             </a:r>
@@ -18304,8 +18248,8 @@
                 <a:solidFill>
                   <a:srgbClr val="1F2A44"/>
                 </a:solidFill>
-                <a:latin typeface="맑은 고딕"/>
-                <a:ea typeface="맑은 고딕"/>
+                <a:latin typeface="Pretendard"/>
+                <a:ea typeface="Pretendard"/>
               </a:rPr>
               <a:t>Loki</a:t>
             </a:r>
@@ -18360,8 +18304,8 @@
                 <a:solidFill>
                   <a:srgbClr val="1F2A44"/>
                 </a:solidFill>
-                <a:latin typeface="맑은 고딕"/>
-                <a:ea typeface="맑은 고딕"/>
+                <a:latin typeface="Pretendard"/>
+                <a:ea typeface="Pretendard"/>
               </a:rPr>
               <a:t>Prometheus</a:t>
             </a:r>
@@ -18416,8 +18360,8 @@
                 <a:solidFill>
                   <a:srgbClr val="1F2A44"/>
                 </a:solidFill>
-                <a:latin typeface="맑은 고딕"/>
-                <a:ea typeface="맑은 고딕"/>
+                <a:latin typeface="Pretendard"/>
+                <a:ea typeface="Pretendard"/>
               </a:rPr>
               <a:t>Wazuh</a:t>
             </a:r>
@@ -18472,8 +18416,8 @@
                 <a:solidFill>
                   <a:srgbClr val="1F2A44"/>
                 </a:solidFill>
-                <a:latin typeface="맑은 고딕"/>
-                <a:ea typeface="맑은 고딕"/>
+                <a:latin typeface="Pretendard"/>
+                <a:ea typeface="Pretendard"/>
               </a:rPr>
               <a:t>Suricata</a:t>
             </a:r>
@@ -18528,8 +18472,8 @@
                 <a:solidFill>
                   <a:srgbClr val="1F2A44"/>
                 </a:solidFill>
-                <a:latin typeface="맑은 고딕"/>
-                <a:ea typeface="맑은 고딕"/>
+                <a:latin typeface="Pretendard"/>
+                <a:ea typeface="Pretendard"/>
               </a:rPr>
               <a:t>Zeek</a:t>
             </a:r>
@@ -18584,8 +18528,8 @@
                 <a:solidFill>
                   <a:srgbClr val="1F2A44"/>
                 </a:solidFill>
-                <a:latin typeface="맑은 고딕"/>
-                <a:ea typeface="맑은 고딕"/>
+                <a:latin typeface="Pretendard"/>
+                <a:ea typeface="Pretendard"/>
               </a:rPr>
               <a:t>scikit-learn</a:t>
             </a:r>
@@ -18640,8 +18584,8 @@
                 <a:solidFill>
                   <a:srgbClr val="1F2A44"/>
                 </a:solidFill>
-                <a:latin typeface="맑은 고딕"/>
-                <a:ea typeface="맑은 고딕"/>
+                <a:latin typeface="Pretendard"/>
+                <a:ea typeface="Pretendard"/>
               </a:rPr>
               <a:t>Ollama</a:t>
             </a:r>
@@ -18696,8 +18640,8 @@
                 <a:solidFill>
                   <a:srgbClr val="1F2A44"/>
                 </a:solidFill>
-                <a:latin typeface="맑은 고딕"/>
-                <a:ea typeface="맑은 고딕"/>
+                <a:latin typeface="Pretendard"/>
+                <a:ea typeface="Pretendard"/>
               </a:rPr>
               <a:t>ChromaDB</a:t>
             </a:r>
@@ -18752,8 +18696,8 @@
                 <a:solidFill>
                   <a:srgbClr val="1F2A44"/>
                 </a:solidFill>
-                <a:latin typeface="맑은 고딕"/>
-                <a:ea typeface="맑은 고딕"/>
+                <a:latin typeface="Pretendard"/>
+                <a:ea typeface="Pretendard"/>
               </a:rPr>
               <a:t>React 18</a:t>
             </a:r>
@@ -18808,8 +18752,8 @@
                 <a:solidFill>
                   <a:srgbClr val="1F2A44"/>
                 </a:solidFill>
-                <a:latin typeface="맑은 고딕"/>
-                <a:ea typeface="맑은 고딕"/>
+                <a:latin typeface="Pretendard"/>
+                <a:ea typeface="Pretendard"/>
               </a:rPr>
               <a:t>Docker Compose</a:t>
             </a:r>
@@ -18950,8 +18894,8 @@
                 <a:solidFill>
                   <a:srgbClr val="2563EB"/>
                 </a:solidFill>
-                <a:latin typeface="맑은 고딕"/>
-                <a:ea typeface="맑은 고딕"/>
+                <a:latin typeface="Pretendard"/>
+                <a:ea typeface="Pretendard"/>
               </a:rPr>
               <a:t>PROJECT 01 · 개인 (adorahelen/siem-trinity)</a:t>
             </a:r>
@@ -18986,8 +18930,8 @@
                 <a:solidFill>
                   <a:srgbClr val="1F2A44"/>
                 </a:solidFill>
-                <a:latin typeface="맑은 고딕"/>
-                <a:ea typeface="맑은 고딕"/>
+                <a:latin typeface="Pretendard"/>
+                <a:ea typeface="Pretendard"/>
               </a:rPr>
               <a:t>SIEM-Trinity — 아키텍처</a:t>
             </a:r>
@@ -19022,8 +18966,8 @@
                 <a:solidFill>
                   <a:srgbClr val="5B667A"/>
                 </a:solidFill>
-                <a:latin typeface="맑은 고딕"/>
-                <a:ea typeface="맑은 고딕"/>
+                <a:latin typeface="Pretendard"/>
+                <a:ea typeface="Pretendard"/>
               </a:rPr>
               <a:t>4</a:t>
             </a:r>
@@ -19080,8 +19024,8 @@
                 <a:solidFill>
                   <a:srgbClr val="1F2A44"/>
                 </a:solidFill>
-                <a:latin typeface="맑은 고딕"/>
-                <a:ea typeface="맑은 고딕"/>
+                <a:latin typeface="Pretendard"/>
+                <a:ea typeface="Pretendard"/>
               </a:rPr>
               <a:t>01 수집</a:t>
             </a:r>
@@ -19093,8 +19037,8 @@
                 <a:solidFill>
                   <a:srgbClr val="5B667A"/>
                 </a:solidFill>
-                <a:latin typeface="맑은 고딕"/>
-                <a:ea typeface="맑은 고딕"/>
+                <a:latin typeface="Pretendard"/>
+                <a:ea typeface="Pretendard"/>
               </a:rPr>
               <a:t>Zeek · Suricata · Wazuh agent
 fail2ban · ufw · syslog</a:t>
@@ -19152,8 +19096,8 @@
                 <a:solidFill>
                   <a:srgbClr val="1F2A44"/>
                 </a:solidFill>
-                <a:latin typeface="맑은 고딕"/>
-                <a:ea typeface="맑은 고딕"/>
+                <a:latin typeface="Pretendard"/>
+                <a:ea typeface="Pretendard"/>
               </a:rPr>
               <a:t>Promtail</a:t>
             </a:r>
@@ -19165,8 +19109,8 @@
                 <a:solidFill>
                   <a:srgbClr val="5B667A"/>
                 </a:solidFill>
-                <a:latin typeface="맑은 고딕"/>
-                <a:ea typeface="맑은 고딕"/>
+                <a:latin typeface="Pretendard"/>
+                <a:ea typeface="Pretendard"/>
               </a:rPr>
               <a:t>라벨링 · 전송</a:t>
             </a:r>
@@ -19223,8 +19167,8 @@
                 <a:solidFill>
                   <a:srgbClr val="1F2A44"/>
                 </a:solidFill>
-                <a:latin typeface="맑은 고딕"/>
-                <a:ea typeface="맑은 고딕"/>
+                <a:latin typeface="Pretendard"/>
+                <a:ea typeface="Pretendard"/>
               </a:rPr>
               <a:t>데이터 허브</a:t>
             </a:r>
@@ -19236,8 +19180,8 @@
                 <a:solidFill>
                   <a:srgbClr val="5B667A"/>
                 </a:solidFill>
-                <a:latin typeface="맑은 고딕"/>
-                <a:ea typeface="맑은 고딕"/>
+                <a:latin typeface="Pretendard"/>
+                <a:ea typeface="Pretendard"/>
               </a:rPr>
               <a:t>Loki (로그) · Prometheus (메트릭)</a:t>
             </a:r>
@@ -19294,8 +19238,8 @@
                 <a:solidFill>
                   <a:srgbClr val="1F2A44"/>
                 </a:solidFill>
-                <a:latin typeface="맑은 고딕"/>
-                <a:ea typeface="맑은 고딕"/>
+                <a:latin typeface="Pretendard"/>
+                <a:ea typeface="Pretendard"/>
               </a:rPr>
               <a:t>02 detection-api</a:t>
             </a:r>
@@ -19307,8 +19251,8 @@
                 <a:solidFill>
                   <a:srgbClr val="5B667A"/>
                 </a:solidFill>
-                <a:latin typeface="맑은 고딕"/>
-                <a:ea typeface="맑은 고딕"/>
+                <a:latin typeface="Pretendard"/>
+                <a:ea typeface="Pretendard"/>
               </a:rPr>
               <a:t>FastAPI BFF · 27 엔드포인트
 ML 탐지기 4종</a:t>
@@ -19366,8 +19310,8 @@
                 <a:solidFill>
                   <a:srgbClr val="1F2A44"/>
                 </a:solidFill>
-                <a:latin typeface="맑은 고딕"/>
-                <a:ea typeface="맑은 고딕"/>
+                <a:latin typeface="Pretendard"/>
+                <a:ea typeface="Pretendard"/>
               </a:rPr>
               <a:t>03 분석</a:t>
             </a:r>
@@ -19379,8 +19323,8 @@
                 <a:solidFill>
                   <a:srgbClr val="5B667A"/>
                 </a:solidFill>
-                <a:latin typeface="맑은 고딕"/>
-                <a:ea typeface="맑은 고딕"/>
+                <a:latin typeface="Pretendard"/>
+                <a:ea typeface="Pretendard"/>
               </a:rPr>
               <a:t>Ollama gemma4
 ChromaDB · ATT&amp;CK 697</a:t>
@@ -19438,8 +19382,8 @@
                 <a:solidFill>
                   <a:srgbClr val="1F2A44"/>
                 </a:solidFill>
-                <a:latin typeface="맑은 고딕"/>
-                <a:ea typeface="맑은 고딕"/>
+                <a:latin typeface="Pretendard"/>
+                <a:ea typeface="Pretendard"/>
               </a:rPr>
               <a:t>04 TrinitySOC</a:t>
             </a:r>
@@ -19451,8 +19395,8 @@
                 <a:solidFill>
                   <a:srgbClr val="5B667A"/>
                 </a:solidFill>
-                <a:latin typeface="맑은 고딕"/>
-                <a:ea typeface="맑은 고딕"/>
+                <a:latin typeface="Pretendard"/>
+                <a:ea typeface="Pretendard"/>
               </a:rPr>
               <a:t>React 18 · 위젯 23 · 2탭 CRUD</a:t>
             </a:r>
@@ -19509,8 +19453,8 @@
                 <a:solidFill>
                   <a:srgbClr val="1F2A44"/>
                 </a:solidFill>
-                <a:latin typeface="맑은 고딕"/>
-                <a:ea typeface="맑은 고딕"/>
+                <a:latin typeface="Pretendard"/>
+                <a:ea typeface="Pretendard"/>
               </a:rPr>
               <a:t>자동 대응 체인 6단계  (코드 ✅ · 운영 토글 OFF = dry-run)</a:t>
             </a:r>
@@ -19522,8 +19466,8 @@
                 <a:solidFill>
                   <a:srgbClr val="5B667A"/>
                 </a:solidFill>
-                <a:latin typeface="맑은 고딕"/>
-                <a:ea typeface="맑은 고딕"/>
+                <a:latin typeface="Pretendard"/>
+                <a:ea typeface="Pretendard"/>
               </a:rPr>
               <a:t>① Wazuh 가시성  →  ② fail2ban 자동차단  →  ③ Wazuh active-response  →  ④ MISP IOC 매칭  →  ⑤ Shuffle SOAR  →  ⑥ TheHive 케이스</a:t>
             </a:r>
@@ -19781,8 +19725,8 @@
                 <a:solidFill>
                   <a:srgbClr val="5B667A"/>
                 </a:solidFill>
-                <a:latin typeface="맑은 고딕"/>
-                <a:ea typeface="맑은 고딕"/>
+                <a:latin typeface="Pretendard"/>
+                <a:ea typeface="Pretendard"/>
               </a:rPr>
               <a:t>탐지 → 대응 호출 (기본 dry-run)</a:t>
             </a:r>
@@ -19817,8 +19761,8 @@
                 <a:solidFill>
                   <a:srgbClr val="1E40AF"/>
                 </a:solidFill>
-                <a:latin typeface="맑은 고딕"/>
-                <a:ea typeface="맑은 고딕"/>
+                <a:latin typeface="Pretendard"/>
+                <a:ea typeface="Pretendard"/>
               </a:rPr>
               <a:t>외부 노출</a:t>
             </a:r>
@@ -19830,8 +19774,8 @@
                 <a:solidFill>
                   <a:srgbClr val="5B667A"/>
                 </a:solidFill>
-                <a:latin typeface="맑은 고딕"/>
-                <a:ea typeface="맑은 고딕"/>
+                <a:latin typeface="Pretendard"/>
+                <a:ea typeface="Pretendard"/>
               </a:rPr>
               <a:t>콘솔 1포트
 나머지 localhost</a:t>
@@ -19973,10 +19917,10 @@
                 <a:solidFill>
                   <a:srgbClr val="2563EB"/>
                 </a:solidFill>
-                <a:latin typeface="맑은 고딕"/>
-                <a:ea typeface="맑은 고딕"/>
-              </a:rPr>
-              <a:t>PROJECT 02 · 개인 (adorahelen/signum)</a:t>
+                <a:latin typeface="Pretendard"/>
+                <a:ea typeface="Pretendard"/>
+              </a:rPr>
+              <a:t>PROJECT 02 · 개인 (adorahelen/paper-notes)</a:t>
             </a:r>
           </a:p>
         </p:txBody>
@@ -20009,10 +19953,10 @@
                 <a:solidFill>
                   <a:srgbClr val="1F2A44"/>
                 </a:solidFill>
-                <a:latin typeface="맑은 고딕"/>
-                <a:ea typeface="맑은 고딕"/>
-              </a:rPr>
-              <a:t>signum — 상용 SIEM 역분석 후 Go로 재설계</a:t>
+                <a:latin typeface="Pretendard"/>
+                <a:ea typeface="Pretendard"/>
+              </a:rPr>
+              <a:t>LLM 정렬 취약성 실증 — abliteration 재현</a:t>
             </a:r>
           </a:p>
         </p:txBody>
@@ -20045,8 +19989,8 @@
                 <a:solidFill>
                   <a:srgbClr val="5B667A"/>
                 </a:solidFill>
-                <a:latin typeface="맑은 고딕"/>
-                <a:ea typeface="맑은 고딕"/>
+                <a:latin typeface="Pretendard"/>
+                <a:ea typeface="Pretendard"/>
               </a:rPr>
               <a:t>5</a:t>
             </a:r>
@@ -20081,10 +20025,10 @@
                 <a:solidFill>
                   <a:srgbClr val="1E40AF"/>
                 </a:solidFill>
-                <a:latin typeface="맑은 고딕"/>
-                <a:ea typeface="맑은 고딕"/>
-              </a:rPr>
-              <a:t>Java/OSGi 128번들 상용 SIEM을 디컴파일해 기능 축을 뽑고, 같은 축을 Go 마이크로서비스 11개로 다시 지었다</a:t>
+                <a:latin typeface="Pretendard"/>
+                <a:ea typeface="Pretendard"/>
+              </a:rPr>
+              <a:t>"거부는 잔차 스트림의 단일 방향이 매개한다"(Arditi et al., 2024)를 직접 재현해, 모델의 안전이 얼마나 얇은 계층인지 수치로 측정</a:t>
             </a:r>
           </a:p>
         </p:txBody>
@@ -20121,8 +20065,8 @@
                 <a:solidFill>
                   <a:srgbClr val="2563EB"/>
                 </a:solidFill>
-                <a:latin typeface="맑은 고딕"/>
-                <a:ea typeface="맑은 고딕"/>
+                <a:latin typeface="Pretendard"/>
+                <a:ea typeface="Pretendard"/>
               </a:rPr>
               <a:t>·  </a:t>
             </a:r>
@@ -20131,10 +20075,10 @@
                 <a:solidFill>
                   <a:srgbClr val="1F2A44"/>
                 </a:solidFill>
-                <a:latin typeface="맑은 고딕"/>
-                <a:ea typeface="맑은 고딕"/>
-              </a:rPr>
-              <a:t>원본 분석 — OSGi 번들 129개를 CFR로 디컴파일(.java 22,844개)해 A/B/C/D 분류, 번들 128개 전수 매핑표 작성. 미구현은 사유까지 기록</a:t>
+                <a:latin typeface="Pretendard"/>
+                <a:ea typeface="Pretendard"/>
+              </a:rPr>
+              <a:t>거부 방향 추출 — 매칭 프롬프트 쌍(유해 24 / 무해 24)의 마지막 토큰 잔차 평균차를 레이어별로 정규화</a:t>
             </a:r>
           </a:p>
           <a:p>
@@ -20148,8 +20092,8 @@
                 <a:solidFill>
                   <a:srgbClr val="2563EB"/>
                 </a:solidFill>
-                <a:latin typeface="맑은 고딕"/>
-                <a:ea typeface="맑은 고딕"/>
+                <a:latin typeface="Pretendard"/>
+                <a:ea typeface="Pretendard"/>
               </a:rPr>
               <a:t>·  </a:t>
             </a:r>
@@ -20158,10 +20102,10 @@
                 <a:solidFill>
                   <a:srgbClr val="1F2A44"/>
                 </a:solidFill>
-                <a:latin typeface="맑은 고딕"/>
-                <a:ea typeface="맑은 고딕"/>
-              </a:rPr>
-              <a:t>마이크로서비스 11개 직접 설계·구현 — 수집·정규화·저장·검색·탐지상관·알림·워크플로·연동어댑터·설정인증·포워더·콘솔</a:t>
+                <a:latin typeface="Pretendard"/>
+                <a:ea typeface="Pretendard"/>
+              </a:rPr>
+              <a:t>레이어 스윕 0.3·L ~ 0.8·L — 후보 6곳에 추론-time ablation을 걸고 분리한 검증셋(12개) 거부율로 best 선택</a:t>
             </a:r>
           </a:p>
           <a:p>
@@ -20175,8 +20119,8 @@
                 <a:solidFill>
                   <a:srgbClr val="2563EB"/>
                 </a:solidFill>
-                <a:latin typeface="맑은 고딕"/>
-                <a:ea typeface="맑은 고딕"/>
+                <a:latin typeface="Pretendard"/>
+                <a:ea typeface="Pretendard"/>
               </a:rPr>
               <a:t>·  </a:t>
             </a:r>
@@ -20185,10 +20129,10 @@
                 <a:solidFill>
                   <a:srgbClr val="1F2A44"/>
                 </a:solidFill>
-                <a:latin typeface="맑은 고딕"/>
-                <a:ea typeface="맑은 고딕"/>
-              </a:rPr>
-              <a:t>탐지 룰 DSL을 직접 설계하고 파서를 구현(internal/ruledsl) — 룰을 쓰는 쪽이 아니라 룰 언어를 만드는 쪽</a:t>
+                <a:latin typeface="Pretendard"/>
+                <a:ea typeface="Pretendard"/>
+              </a:rPr>
+              <a:t>3단계 측정 — BEFORE → 추론 ablation → 영구 weight 직교제거(o_proj·down_proj 72개 행렬)</a:t>
             </a:r>
           </a:p>
           <a:p>
@@ -20202,8 +20146,8 @@
                 <a:solidFill>
                   <a:srgbClr val="2563EB"/>
                 </a:solidFill>
-                <a:latin typeface="맑은 고딕"/>
-                <a:ea typeface="맑은 고딕"/>
+                <a:latin typeface="Pretendard"/>
+                <a:ea typeface="Pretendard"/>
               </a:rPr>
               <a:t>·  </a:t>
             </a:r>
@@ -20212,10 +20156,10 @@
                 <a:solidFill>
                   <a:srgbClr val="1F2A44"/>
                 </a:solidFill>
-                <a:latin typeface="맑은 고딕"/>
-                <a:ea typeface="맑은 고딕"/>
-              </a:rPr>
-              <a:t>파이프라인 쿼리 언어 10개 명령(where·stats·top·timechart 등)과 탐지 유형 7종(pattern·threshold·sequence·session·anomaly 등)</a:t>
+                <a:latin typeface="Pretendard"/>
+                <a:ea typeface="Pretendard"/>
+              </a:rPr>
+              <a:t>책임 설계 — 유해셋은 거부율만 집계하고 생성 텍스트는 저장하지 않으며, 수술된 가중치는 배포하지 않는다</a:t>
             </a:r>
           </a:p>
           <a:p>
@@ -20229,8 +20173,8 @@
                 <a:solidFill>
                   <a:srgbClr val="2563EB"/>
                 </a:solidFill>
-                <a:latin typeface="맑은 고딕"/>
-                <a:ea typeface="맑은 고딕"/>
+                <a:latin typeface="Pretendard"/>
+                <a:ea typeface="Pretendard"/>
               </a:rPr>
               <a:t>·  </a:t>
             </a:r>
@@ -20239,10 +20183,10 @@
                 <a:solidFill>
                   <a:srgbClr val="1F2A44"/>
                 </a:solidFill>
-                <a:latin typeface="맑은 고딕"/>
-                <a:ea typeface="맑은 고딕"/>
-              </a:rPr>
-              <a:t>원본에 없던 것을 더했다 — SOAR 워크플로 엔진, CTI/TAXII 2.1 + STIX 파싱, JWT + LDAP/AD + TOTP MFA</a:t>
+                <a:latin typeface="Pretendard"/>
+                <a:ea typeface="Pretendard"/>
+              </a:rPr>
+              <a:t>영문·국문 글로 발행 — 이 덱의 프로젝트 중 유일하게 외부에서 검증 가능하다</a:t>
             </a:r>
           </a:p>
         </p:txBody>
@@ -20321,8 +20265,8 @@
                 <a:solidFill>
                   <a:srgbClr val="1E40AF"/>
                 </a:solidFill>
-                <a:latin typeface="맑은 고딕"/>
-                <a:ea typeface="맑은 고딕"/>
+                <a:latin typeface="Pretendard"/>
+                <a:ea typeface="Pretendard"/>
               </a:rPr>
               <a:t>핵심 성과 · 실측</a:t>
             </a:r>
@@ -20361,8 +20305,8 @@
                 <a:solidFill>
                   <a:srgbClr val="2563EB"/>
                 </a:solidFill>
-                <a:latin typeface="맑은 고딕"/>
-                <a:ea typeface="맑은 고딕"/>
+                <a:latin typeface="Pretendard"/>
+                <a:ea typeface="Pretendard"/>
               </a:rPr>
               <a:t>·  </a:t>
             </a:r>
@@ -20371,10 +20315,10 @@
                 <a:solidFill>
                   <a:srgbClr val="1F2A44"/>
                 </a:solidFill>
-                <a:latin typeface="맑은 고딕"/>
-                <a:ea typeface="맑은 고딕"/>
-              </a:rPr>
-              <a:t>번들 기능 구현 103/128 · E2E 테스트 22/22 통과 · Go 21,791줄 · 테스트 파일 38개</a:t>
+                <a:latin typeface="Pretendard"/>
+                <a:ea typeface="Pretendard"/>
+              </a:rPr>
+              <a:t>거부율 1.00 → 0.00 (추론 ablation) / 0.04 (영구 수술) — 재학습 없이 방향 하나 제거로</a:t>
             </a:r>
           </a:p>
           <a:p>
@@ -20388,8 +20332,8 @@
                 <a:solidFill>
                   <a:srgbClr val="2563EB"/>
                 </a:solidFill>
-                <a:latin typeface="맑은 고딕"/>
-                <a:ea typeface="맑은 고딕"/>
+                <a:latin typeface="Pretendard"/>
+                <a:ea typeface="Pretendard"/>
               </a:rPr>
               <a:t>·  </a:t>
             </a:r>
@@ -20398,10 +20342,10 @@
                 <a:solidFill>
                   <a:srgbClr val="1F2A44"/>
                 </a:solidFill>
-                <a:latin typeface="맑은 고딕"/>
-                <a:ea typeface="맑은 고딕"/>
-              </a:rPr>
-              <a:t>Docker 컨테이너 13개 구성, NATS를 protobuf 직렬화 이벤트 버스로 사용</a:t>
+                <a:latin typeface="Pretendard"/>
+                <a:ea typeface="Pretendard"/>
+              </a:rPr>
+              <a:t>후보 레이어 6곳 중 3곳은 효과가 정확히 0 — 스윕을 안 하면 "안 뚫린다"는 위음성이 나온다</a:t>
             </a:r>
           </a:p>
           <a:p>
@@ -20415,8 +20359,8 @@
                 <a:solidFill>
                   <a:srgbClr val="2563EB"/>
                 </a:solidFill>
-                <a:latin typeface="맑은 고딕"/>
-                <a:ea typeface="맑은 고딕"/>
+                <a:latin typeface="Pretendard"/>
+                <a:ea typeface="Pretendard"/>
               </a:rPr>
               <a:t>·  </a:t>
             </a:r>
@@ -20425,10 +20369,10 @@
                 <a:solidFill>
                   <a:srgbClr val="1F2A44"/>
                 </a:solidFill>
-                <a:latin typeface="맑은 고딕"/>
-                <a:ea typeface="맑은 고딕"/>
-              </a:rPr>
-              <a:t>저장은 OpenSearch, 설정은 BadgerDB로 분리 — 원본의 커스텀 Lucene·confdb 대체</a:t>
+                <a:latin typeface="Pretendard"/>
+                <a:ea typeface="Pretendard"/>
+              </a:rPr>
+              <a:t>거부율 0% ≠ 지식 해금 — 이 모델은 수술 전에도 정당한 보안 질문에 전부 답했다(과잉거부 0.00)</a:t>
             </a:r>
           </a:p>
           <a:p>
@@ -20442,8 +20386,8 @@
                 <a:solidFill>
                   <a:srgbClr val="2563EB"/>
                 </a:solidFill>
-                <a:latin typeface="맑은 고딕"/>
-                <a:ea typeface="맑은 고딕"/>
+                <a:latin typeface="Pretendard"/>
+                <a:ea typeface="Pretendard"/>
               </a:rPr>
               <a:t>·  </a:t>
             </a:r>
@@ -20452,10 +20396,10 @@
                 <a:solidFill>
                   <a:srgbClr val="1F2A44"/>
                 </a:solidFill>
-                <a:latin typeface="맑은 고딕"/>
-                <a:ea typeface="맑은 고딕"/>
-              </a:rPr>
-              <a:t>통계적 이상 탐지 3종(Z-score · IQR · 이동평균)을 룰 엔진과 별도 축으로 구성</a:t>
+                <a:latin typeface="Pretendard"/>
+                <a:ea typeface="Pretendard"/>
+              </a:rPr>
+              <a:t>조잡한 제거는 모델을 손상시킨다 — 17×23을 "39"로 답하고, 손상이 하필 공격·보안 주제에 집중</a:t>
             </a:r>
           </a:p>
           <a:p>
@@ -20469,8 +20413,8 @@
                 <a:solidFill>
                   <a:srgbClr val="2563EB"/>
                 </a:solidFill>
-                <a:latin typeface="맑은 고딕"/>
-                <a:ea typeface="맑은 고딕"/>
+                <a:latin typeface="Pretendard"/>
+                <a:ea typeface="Pretendard"/>
               </a:rPr>
               <a:t>·  </a:t>
             </a:r>
@@ -20479,10 +20423,10 @@
                 <a:solidFill>
                   <a:srgbClr val="1F2A44"/>
                 </a:solidFill>
-                <a:latin typeface="맑은 고딕"/>
-                <a:ea typeface="맑은 고딕"/>
-              </a:rPr>
-              <a:t>SOC 대시보드 — React + Recharts, 시계열·도넛·히트맵·피벗 분석</a:t>
+                <a:latin typeface="Pretendard"/>
+                <a:ea typeface="Pretendard"/>
+              </a:rPr>
+              <a:t>거부율만 보면 안 된다 — 전후 모두 0.00인데 실제 답변은 XSS·EternalBlue·CSRF에서 무너져 있었다</a:t>
             </a:r>
           </a:p>
         </p:txBody>
@@ -20515,8 +20459,8 @@
                 <a:solidFill>
                   <a:srgbClr val="5B667A"/>
                 </a:solidFill>
-                <a:latin typeface="맑은 고딕"/>
-                <a:ea typeface="맑은 고딕"/>
+                <a:latin typeface="Pretendard"/>
+                <a:ea typeface="Pretendard"/>
               </a:rPr>
               <a:t>STACK</a:t>
             </a:r>
@@ -20532,7 +20476,7 @@
         <p:spPr>
           <a:xfrm>
             <a:off x="1600200" y="5888736"/>
-            <a:ext cx="851306" cy="310896"/>
+            <a:ext cx="1871776" cy="310896"/>
           </a:xfrm>
           <a:prstGeom prst="roundRect">
             <a:avLst>
@@ -20571,10 +20515,10 @@
                 <a:solidFill>
                   <a:srgbClr val="1F2A44"/>
                 </a:solidFill>
-                <a:latin typeface="맑은 고딕"/>
-                <a:ea typeface="맑은 고딕"/>
-              </a:rPr>
-              <a:t>Go 1.25</a:t>
+                <a:latin typeface="Pretendard"/>
+                <a:ea typeface="Pretendard"/>
+              </a:rPr>
+              <a:t>Qwen2.5-3B-Instruct</a:t>
             </a:r>
           </a:p>
         </p:txBody>
@@ -20587,8 +20531,8 @@
         </p:nvSpPr>
         <p:spPr>
           <a:xfrm>
-            <a:off x="2561234" y="5888736"/>
-            <a:ext cx="936345" cy="310896"/>
+            <a:off x="3581704" y="5888736"/>
+            <a:ext cx="851306" cy="310896"/>
           </a:xfrm>
           <a:prstGeom prst="roundRect">
             <a:avLst>
@@ -20627,10 +20571,10 @@
                 <a:solidFill>
                   <a:srgbClr val="1F2A44"/>
                 </a:solidFill>
-                <a:latin typeface="맑은 고딕"/>
-                <a:ea typeface="맑은 고딕"/>
-              </a:rPr>
-              <a:t>React 19</a:t>
+                <a:latin typeface="Pretendard"/>
+                <a:ea typeface="Pretendard"/>
+              </a:rPr>
+              <a:t>PyTorch</a:t>
             </a:r>
           </a:p>
         </p:txBody>
@@ -20643,8 +20587,8 @@
         </p:nvSpPr>
         <p:spPr>
           <a:xfrm>
-            <a:off x="3607307" y="5888736"/>
-            <a:ext cx="1106424" cy="310896"/>
+            <a:off x="4542738" y="5888736"/>
+            <a:ext cx="1276502" cy="310896"/>
           </a:xfrm>
           <a:prstGeom prst="roundRect">
             <a:avLst>
@@ -20683,10 +20627,10 @@
                 <a:solidFill>
                   <a:srgbClr val="1F2A44"/>
                 </a:solidFill>
-                <a:latin typeface="맑은 고딕"/>
-                <a:ea typeface="맑은 고딕"/>
-              </a:rPr>
-              <a:t>OpenSearch</a:t>
+                <a:latin typeface="Pretendard"/>
+                <a:ea typeface="Pretendard"/>
+              </a:rPr>
+              <a:t>transformers</a:t>
             </a:r>
           </a:p>
         </p:txBody>
@@ -20699,8 +20643,8 @@
         </p:nvSpPr>
         <p:spPr>
           <a:xfrm>
-            <a:off x="4823459" y="5888736"/>
-            <a:ext cx="596188" cy="310896"/>
+            <a:off x="5928968" y="5888736"/>
+            <a:ext cx="1021384" cy="310896"/>
           </a:xfrm>
           <a:prstGeom prst="roundRect">
             <a:avLst>
@@ -20739,10 +20683,10 @@
                 <a:solidFill>
                   <a:srgbClr val="1F2A44"/>
                 </a:solidFill>
-                <a:latin typeface="맑은 고딕"/>
-                <a:ea typeface="맑은 고딕"/>
-              </a:rPr>
-              <a:t>NATS</a:t>
+                <a:latin typeface="Pretendard"/>
+                <a:ea typeface="Pretendard"/>
+              </a:rPr>
+              <a:t>잔차 스트림 개입</a:t>
             </a:r>
           </a:p>
         </p:txBody>
@@ -20755,8 +20699,8 @@
         </p:nvSpPr>
         <p:spPr>
           <a:xfrm>
-            <a:off x="5529375" y="5888736"/>
-            <a:ext cx="936345" cy="310896"/>
+            <a:off x="7060080" y="5888736"/>
+            <a:ext cx="1276502" cy="310896"/>
           </a:xfrm>
           <a:prstGeom prst="roundRect">
             <a:avLst>
@@ -20795,10 +20739,10 @@
                 <a:solidFill>
                   <a:srgbClr val="1F2A44"/>
                 </a:solidFill>
-                <a:latin typeface="맑은 고딕"/>
-                <a:ea typeface="맑은 고딕"/>
-              </a:rPr>
-              <a:t>BadgerDB</a:t>
+                <a:latin typeface="Pretendard"/>
+                <a:ea typeface="Pretendard"/>
+              </a:rPr>
+              <a:t>forward hook</a:t>
             </a:r>
           </a:p>
         </p:txBody>
@@ -20811,8 +20755,8 @@
         </p:nvSpPr>
         <p:spPr>
           <a:xfrm>
-            <a:off x="6575448" y="5888736"/>
-            <a:ext cx="936345" cy="310896"/>
+            <a:off x="8446310" y="5888736"/>
+            <a:ext cx="681228" cy="310896"/>
           </a:xfrm>
           <a:prstGeom prst="roundRect">
             <a:avLst>
@@ -20851,10 +20795,10 @@
                 <a:solidFill>
                   <a:srgbClr val="1F2A44"/>
                 </a:solidFill>
-                <a:latin typeface="맑은 고딕"/>
-                <a:ea typeface="맑은 고딕"/>
-              </a:rPr>
-              <a:t>protobuf</a:t>
+                <a:latin typeface="Pretendard"/>
+                <a:ea typeface="Pretendard"/>
+              </a:rPr>
+              <a:t>직교 투영</a:t>
             </a:r>
           </a:p>
         </p:txBody>
@@ -20867,7 +20811,7 @@
         </p:nvSpPr>
         <p:spPr>
           <a:xfrm>
-            <a:off x="7621521" y="5888736"/>
+            <a:off x="9237266" y="5888736"/>
             <a:ext cx="766267" cy="310896"/>
           </a:xfrm>
           <a:prstGeom prst="roundRect">
@@ -20907,234 +20851,10 @@
                 <a:solidFill>
                   <a:srgbClr val="1F2A44"/>
                 </a:solidFill>
-                <a:latin typeface="맑은 고딕"/>
-                <a:ea typeface="맑은 고딕"/>
-              </a:rPr>
-              <a:t>Docker</a:t>
-            </a:r>
-          </a:p>
-        </p:txBody>
-      </p:sp>
-      <p:sp>
-        <p:nvSpPr>
-          <p:cNvPr id="20" name="Rounded Rectangle 19"/>
-          <p:cNvSpPr/>
-          <p:nvPr/>
-        </p:nvSpPr>
-        <p:spPr>
-          <a:xfrm>
-            <a:off x="8497516" y="5888736"/>
-            <a:ext cx="1616659" cy="310896"/>
-          </a:xfrm>
-          <a:prstGeom prst="roundRect">
-            <a:avLst>
-              <a:gd name="adj" fmla="val 50000"/>
-            </a:avLst>
-          </a:prstGeom>
-          <a:solidFill>
-            <a:srgbClr val="F1F5F9"/>
-          </a:solidFill>
-          <a:ln>
-            <a:noFill/>
-          </a:ln>
-          <a:effectLst/>
-        </p:spPr>
-        <p:style>
-          <a:lnRef idx="1">
-            <a:schemeClr val="accent1"/>
-          </a:lnRef>
-          <a:fillRef idx="3">
-            <a:schemeClr val="accent1"/>
-          </a:fillRef>
-          <a:effectRef idx="2">
-            <a:schemeClr val="accent1"/>
-          </a:effectRef>
-          <a:fontRef idx="minor">
-            <a:schemeClr val="lt1"/>
-          </a:fontRef>
-        </p:style>
-        <p:txBody>
-          <a:bodyPr rtlCol="0" anchor="ctr" wrap="square" lIns="50800" rIns="50800" tIns="25400" bIns="25400"/>
-          <a:lstStyle/>
-          <a:p>
-            <a:pPr algn="ctr"/>
-            <a:r>
-              <a:rPr sz="950" b="0">
-                <a:solidFill>
-                  <a:srgbClr val="1F2A44"/>
-                </a:solidFill>
-                <a:latin typeface="맑은 고딕"/>
-                <a:ea typeface="맑은 고딕"/>
-              </a:rPr>
-              <a:t>TAXII 2.1 / STIX</a:t>
-            </a:r>
-          </a:p>
-        </p:txBody>
-      </p:sp>
-      <p:sp>
-        <p:nvSpPr>
-          <p:cNvPr id="21" name="Rounded Rectangle 20"/>
-          <p:cNvSpPr/>
-          <p:nvPr/>
-        </p:nvSpPr>
-        <p:spPr>
-          <a:xfrm>
-            <a:off x="10223903" y="5888736"/>
-            <a:ext cx="851306" cy="310896"/>
-          </a:xfrm>
-          <a:prstGeom prst="roundRect">
-            <a:avLst>
-              <a:gd name="adj" fmla="val 50000"/>
-            </a:avLst>
-          </a:prstGeom>
-          <a:solidFill>
-            <a:srgbClr val="F1F5F9"/>
-          </a:solidFill>
-          <a:ln>
-            <a:noFill/>
-          </a:ln>
-          <a:effectLst/>
-        </p:spPr>
-        <p:style>
-          <a:lnRef idx="1">
-            <a:schemeClr val="accent1"/>
-          </a:lnRef>
-          <a:fillRef idx="3">
-            <a:schemeClr val="accent1"/>
-          </a:fillRef>
-          <a:effectRef idx="2">
-            <a:schemeClr val="accent1"/>
-          </a:effectRef>
-          <a:fontRef idx="minor">
-            <a:schemeClr val="lt1"/>
-          </a:fontRef>
-        </p:style>
-        <p:txBody>
-          <a:bodyPr rtlCol="0" anchor="ctr" wrap="square" lIns="50800" rIns="50800" tIns="25400" bIns="25400"/>
-          <a:lstStyle/>
-          <a:p>
-            <a:pPr algn="ctr"/>
-            <a:r>
-              <a:rPr sz="950" b="0">
-                <a:solidFill>
-                  <a:srgbClr val="1F2A44"/>
-                </a:solidFill>
-                <a:latin typeface="맑은 고딕"/>
-                <a:ea typeface="맑은 고딕"/>
-              </a:rPr>
-              <a:t>LDAP/AD</a:t>
-            </a:r>
-          </a:p>
-        </p:txBody>
-      </p:sp>
-      <p:sp>
-        <p:nvSpPr>
-          <p:cNvPr id="22" name="Rounded Rectangle 21"/>
-          <p:cNvSpPr/>
-          <p:nvPr/>
-        </p:nvSpPr>
-        <p:spPr>
-          <a:xfrm>
-            <a:off x="1600200" y="6309360"/>
-            <a:ext cx="936345" cy="310896"/>
-          </a:xfrm>
-          <a:prstGeom prst="roundRect">
-            <a:avLst>
-              <a:gd name="adj" fmla="val 50000"/>
-            </a:avLst>
-          </a:prstGeom>
-          <a:solidFill>
-            <a:srgbClr val="F1F5F9"/>
-          </a:solidFill>
-          <a:ln>
-            <a:noFill/>
-          </a:ln>
-          <a:effectLst/>
-        </p:spPr>
-        <p:style>
-          <a:lnRef idx="1">
-            <a:schemeClr val="accent1"/>
-          </a:lnRef>
-          <a:fillRef idx="3">
-            <a:schemeClr val="accent1"/>
-          </a:fillRef>
-          <a:effectRef idx="2">
-            <a:schemeClr val="accent1"/>
-          </a:effectRef>
-          <a:fontRef idx="minor">
-            <a:schemeClr val="lt1"/>
-          </a:fontRef>
-        </p:style>
-        <p:txBody>
-          <a:bodyPr rtlCol="0" anchor="ctr" wrap="square" lIns="50800" rIns="50800" tIns="25400" bIns="25400"/>
-          <a:lstStyle/>
-          <a:p>
-            <a:pPr algn="ctr"/>
-            <a:r>
-              <a:rPr sz="950" b="0">
-                <a:solidFill>
-                  <a:srgbClr val="1F2A44"/>
-                </a:solidFill>
-                <a:latin typeface="맑은 고딕"/>
-                <a:ea typeface="맑은 고딕"/>
-              </a:rPr>
-              <a:t>TOTP MFA</a:t>
-            </a:r>
-          </a:p>
-        </p:txBody>
-      </p:sp>
-      <p:sp>
-        <p:nvSpPr>
-          <p:cNvPr id="23" name="Rounded Rectangle 22"/>
-          <p:cNvSpPr/>
-          <p:nvPr/>
-        </p:nvSpPr>
-        <p:spPr>
-          <a:xfrm>
-            <a:off x="2646273" y="6309360"/>
-            <a:ext cx="681228" cy="310896"/>
-          </a:xfrm>
-          <a:prstGeom prst="roundRect">
-            <a:avLst>
-              <a:gd name="adj" fmla="val 50000"/>
-            </a:avLst>
-          </a:prstGeom>
-          <a:solidFill>
-            <a:srgbClr val="F1F5F9"/>
-          </a:solidFill>
-          <a:ln>
-            <a:noFill/>
-          </a:ln>
-          <a:effectLst/>
-        </p:spPr>
-        <p:style>
-          <a:lnRef idx="1">
-            <a:schemeClr val="accent1"/>
-          </a:lnRef>
-          <a:fillRef idx="3">
-            <a:schemeClr val="accent1"/>
-          </a:fillRef>
-          <a:effectRef idx="2">
-            <a:schemeClr val="accent1"/>
-          </a:effectRef>
-          <a:fontRef idx="minor">
-            <a:schemeClr val="lt1"/>
-          </a:fontRef>
-        </p:style>
-        <p:txBody>
-          <a:bodyPr rtlCol="0" anchor="ctr" wrap="square" lIns="50800" rIns="50800" tIns="25400" bIns="25400"/>
-          <a:lstStyle/>
-          <a:p>
-            <a:pPr algn="ctr"/>
-            <a:r>
-              <a:rPr sz="950" b="0">
-                <a:solidFill>
-                  <a:srgbClr val="1F2A44"/>
-                </a:solidFill>
-                <a:latin typeface="맑은 고딕"/>
-                <a:ea typeface="맑은 고딕"/>
-              </a:rPr>
-              <a:t>GeoIP</a:t>
+                <a:latin typeface="Pretendard"/>
+                <a:ea typeface="Pretendard"/>
+              </a:rPr>
+              <a:t>골든셋 평가</a:t>
             </a:r>
           </a:p>
         </p:txBody>
@@ -21273,10 +20993,10 @@
                 <a:solidFill>
                   <a:srgbClr val="2563EB"/>
                 </a:solidFill>
-                <a:latin typeface="맑은 고딕"/>
-                <a:ea typeface="맑은 고딕"/>
-              </a:rPr>
-              <a:t>PROJECT 02 · 개인 (adorahelen/signum)</a:t>
+                <a:latin typeface="Pretendard"/>
+                <a:ea typeface="Pretendard"/>
+              </a:rPr>
+              <a:t>PROJECT 02 · 개인 (adorahelen/paper-notes)</a:t>
             </a:r>
           </a:p>
         </p:txBody>
@@ -21309,10 +21029,10 @@
                 <a:solidFill>
                   <a:srgbClr val="1F2A44"/>
                 </a:solidFill>
-                <a:latin typeface="맑은 고딕"/>
-                <a:ea typeface="맑은 고딕"/>
-              </a:rPr>
-              <a:t>signum — 아키텍처</a:t>
+                <a:latin typeface="Pretendard"/>
+                <a:ea typeface="Pretendard"/>
+              </a:rPr>
+              <a:t>abliteration — 무엇을 측정했나</a:t>
             </a:r>
           </a:p>
         </p:txBody>
@@ -21345,8 +21065,8 @@
                 <a:solidFill>
                   <a:srgbClr val="5B667A"/>
                 </a:solidFill>
-                <a:latin typeface="맑은 고딕"/>
-                <a:ea typeface="맑은 고딕"/>
+                <a:latin typeface="Pretendard"/>
+                <a:ea typeface="Pretendard"/>
               </a:rPr>
               <a:t>6</a:t>
             </a:r>
@@ -21355,14 +21075,50 @@
       </p:sp>
       <p:sp>
         <p:nvSpPr>
-          <p:cNvPr id="7" name="Rounded Rectangle 6"/>
+          <p:cNvPr id="7" name="TextBox 6"/>
+          <p:cNvSpPr txBox="1"/>
+          <p:nvPr/>
+        </p:nvSpPr>
+        <p:spPr>
+          <a:xfrm>
+            <a:off x="640080" y="1463040"/>
+            <a:ext cx="6035040" cy="320040"/>
+          </a:xfrm>
+          <a:prstGeom prst="rect">
+            <a:avLst/>
+          </a:prstGeom>
+          <a:noFill/>
+        </p:spPr>
+        <p:txBody>
+          <a:bodyPr wrap="square" anchor="t" lIns="0" rIns="0" tIns="0" bIns="0">
+            <a:spAutoFit/>
+          </a:bodyPr>
+          <a:lstStyle/>
+          <a:p>
+            <a:pPr algn="l"/>
+            <a:r>
+              <a:rPr sz="1200" b="1">
+                <a:solidFill>
+                  <a:srgbClr val="1E40AF"/>
+                </a:solidFill>
+                <a:latin typeface="Pretendard"/>
+                <a:ea typeface="Pretendard"/>
+              </a:rPr>
+              <a:t>레이어 스윕 — 거부가 매개되는 지점 찾기</a:t>
+            </a:r>
+          </a:p>
+        </p:txBody>
+      </p:sp>
+      <p:sp>
+        <p:nvSpPr>
+          <p:cNvPr id="8" name="Rounded Rectangle 7"/>
           <p:cNvSpPr/>
           <p:nvPr/>
         </p:nvSpPr>
         <p:spPr>
           <a:xfrm>
-            <a:off x="640080" y="1554480"/>
-            <a:ext cx="2011680" cy="822960"/>
+            <a:off x="640080" y="1874519"/>
+            <a:ext cx="914400" cy="868680"/>
           </a:xfrm>
           <a:prstGeom prst="roundRect">
             <a:avLst>
@@ -21372,9 +21128,9 @@
           <a:solidFill>
             <a:srgbClr val="FFFFFF"/>
           </a:solidFill>
-          <a:ln w="15875">
+          <a:ln w="12700">
             <a:solidFill>
-              <a:srgbClr val="2563EB"/>
+              <a:srgbClr val="CBD5E1"/>
             </a:solidFill>
           </a:ln>
           <a:effectLst/>
@@ -21394,46 +21150,95 @@
           </a:fontRef>
         </p:style>
         <p:txBody>
-          <a:bodyPr rtlCol="0" anchor="ctr" wrap="square" lIns="50800" rIns="50800" tIns="25400" bIns="25400"/>
-          <a:lstStyle/>
-          <a:p>
-            <a:pPr algn="ctr"/>
-            <a:r>
-              <a:rPr sz="1150" b="1">
-                <a:solidFill>
-                  <a:srgbClr val="1F2A44"/>
-                </a:solidFill>
-                <a:latin typeface="맑은 고딕"/>
-                <a:ea typeface="맑은 고딕"/>
-              </a:rPr>
-              <a:t>forwarder</a:t>
-            </a:r>
-          </a:p>
-          <a:p>
-            <a:pPr algn="ctr"/>
-            <a:r>
-              <a:rPr sz="900" b="0">
+          <a:bodyPr rtlCol="0" anchor="ctr"/>
+          <a:lstStyle/>
+          <a:p>
+            <a:pPr algn="ctr"/>
+          </a:p>
+        </p:txBody>
+      </p:sp>
+      <p:sp>
+        <p:nvSpPr>
+          <p:cNvPr id="9" name="TextBox 8"/>
+          <p:cNvSpPr txBox="1"/>
+          <p:nvPr/>
+        </p:nvSpPr>
+        <p:spPr>
+          <a:xfrm>
+            <a:off x="640080" y="1965960"/>
+            <a:ext cx="914400" cy="274320"/>
+          </a:xfrm>
+          <a:prstGeom prst="rect">
+            <a:avLst/>
+          </a:prstGeom>
+          <a:noFill/>
+        </p:spPr>
+        <p:txBody>
+          <a:bodyPr wrap="square" anchor="t" lIns="0" rIns="0" tIns="0" bIns="0">
+            <a:spAutoFit/>
+          </a:bodyPr>
+          <a:lstStyle/>
+          <a:p>
+            <a:pPr algn="ctr"/>
+            <a:r>
+              <a:rPr sz="1100" b="0">
                 <a:solidFill>
                   <a:srgbClr val="5B667A"/>
                 </a:solidFill>
-                <a:latin typeface="맑은 고딕"/>
-                <a:ea typeface="맑은 고딕"/>
-              </a:rPr>
-              <a:t>file tail · journald · mTLS</a:t>
-            </a:r>
-          </a:p>
-        </p:txBody>
-      </p:sp>
-      <p:sp>
-        <p:nvSpPr>
-          <p:cNvPr id="8" name="Rounded Rectangle 7"/>
+                <a:latin typeface="Pretendard"/>
+                <a:ea typeface="Pretendard"/>
+              </a:rPr>
+              <a:t>L10</a:t>
+            </a:r>
+          </a:p>
+        </p:txBody>
+      </p:sp>
+      <p:sp>
+        <p:nvSpPr>
+          <p:cNvPr id="10" name="TextBox 9"/>
+          <p:cNvSpPr txBox="1"/>
+          <p:nvPr/>
+        </p:nvSpPr>
+        <p:spPr>
+          <a:xfrm>
+            <a:off x="640080" y="2286000"/>
+            <a:ext cx="914400" cy="365760"/>
+          </a:xfrm>
+          <a:prstGeom prst="rect">
+            <a:avLst/>
+          </a:prstGeom>
+          <a:noFill/>
+        </p:spPr>
+        <p:txBody>
+          <a:bodyPr wrap="square" anchor="t" lIns="0" rIns="0" tIns="0" bIns="0">
+            <a:spAutoFit/>
+          </a:bodyPr>
+          <a:lstStyle/>
+          <a:p>
+            <a:pPr algn="ctr"/>
+            <a:r>
+              <a:rPr sz="1500" b="1">
+                <a:solidFill>
+                  <a:srgbClr val="1F2A44"/>
+                </a:solidFill>
+                <a:latin typeface="Pretendard"/>
+                <a:ea typeface="Pretendard"/>
+              </a:rPr>
+              <a:t>1.00</a:t>
+            </a:r>
+          </a:p>
+        </p:txBody>
+      </p:sp>
+      <p:sp>
+        <p:nvSpPr>
+          <p:cNvPr id="11" name="Rounded Rectangle 10"/>
           <p:cNvSpPr/>
           <p:nvPr/>
         </p:nvSpPr>
         <p:spPr>
           <a:xfrm>
-            <a:off x="640080" y="2697480"/>
-            <a:ext cx="2011680" cy="822960"/>
+            <a:off x="1664208" y="1874519"/>
+            <a:ext cx="914400" cy="868680"/>
           </a:xfrm>
           <a:prstGeom prst="roundRect">
             <a:avLst>
@@ -21443,9 +21248,9 @@
           <a:solidFill>
             <a:srgbClr val="FFFFFF"/>
           </a:solidFill>
-          <a:ln w="15875">
+          <a:ln w="12700">
             <a:solidFill>
-              <a:srgbClr val="2563EB"/>
+              <a:srgbClr val="CBD5E1"/>
             </a:solidFill>
           </a:ln>
           <a:effectLst/>
@@ -21465,46 +21270,95 @@
           </a:fontRef>
         </p:style>
         <p:txBody>
-          <a:bodyPr rtlCol="0" anchor="ctr" wrap="square" lIns="50800" rIns="50800" tIns="25400" bIns="25400"/>
-          <a:lstStyle/>
-          <a:p>
-            <a:pPr algn="ctr"/>
-            <a:r>
-              <a:rPr sz="1150" b="1">
-                <a:solidFill>
-                  <a:srgbClr val="1F2A44"/>
-                </a:solidFill>
-                <a:latin typeface="맑은 고딕"/>
-                <a:ea typeface="맑은 고딕"/>
-              </a:rPr>
-              <a:t>ingest-gateway</a:t>
-            </a:r>
-          </a:p>
-          <a:p>
-            <a:pPr algn="ctr"/>
-            <a:r>
-              <a:rPr sz="900" b="0">
+          <a:bodyPr rtlCol="0" anchor="ctr"/>
+          <a:lstStyle/>
+          <a:p>
+            <a:pPr algn="ctr"/>
+          </a:p>
+        </p:txBody>
+      </p:sp>
+      <p:sp>
+        <p:nvSpPr>
+          <p:cNvPr id="12" name="TextBox 11"/>
+          <p:cNvSpPr txBox="1"/>
+          <p:nvPr/>
+        </p:nvSpPr>
+        <p:spPr>
+          <a:xfrm>
+            <a:off x="1664208" y="1965960"/>
+            <a:ext cx="914400" cy="274320"/>
+          </a:xfrm>
+          <a:prstGeom prst="rect">
+            <a:avLst/>
+          </a:prstGeom>
+          <a:noFill/>
+        </p:spPr>
+        <p:txBody>
+          <a:bodyPr wrap="square" anchor="t" lIns="0" rIns="0" tIns="0" bIns="0">
+            <a:spAutoFit/>
+          </a:bodyPr>
+          <a:lstStyle/>
+          <a:p>
+            <a:pPr algn="ctr"/>
+            <a:r>
+              <a:rPr sz="1100" b="0">
                 <a:solidFill>
                   <a:srgbClr val="5B667A"/>
                 </a:solidFill>
-                <a:latin typeface="맑은 고딕"/>
-                <a:ea typeface="맑은 고딕"/>
-              </a:rPr>
-              <a:t>Syslog :5514 · HTTP :8080</a:t>
-            </a:r>
-          </a:p>
-        </p:txBody>
-      </p:sp>
-      <p:sp>
-        <p:nvSpPr>
-          <p:cNvPr id="9" name="Rounded Rectangle 8"/>
+                <a:latin typeface="Pretendard"/>
+                <a:ea typeface="Pretendard"/>
+              </a:rPr>
+              <a:t>L14</a:t>
+            </a:r>
+          </a:p>
+        </p:txBody>
+      </p:sp>
+      <p:sp>
+        <p:nvSpPr>
+          <p:cNvPr id="13" name="TextBox 12"/>
+          <p:cNvSpPr txBox="1"/>
+          <p:nvPr/>
+        </p:nvSpPr>
+        <p:spPr>
+          <a:xfrm>
+            <a:off x="1664208" y="2286000"/>
+            <a:ext cx="914400" cy="365760"/>
+          </a:xfrm>
+          <a:prstGeom prst="rect">
+            <a:avLst/>
+          </a:prstGeom>
+          <a:noFill/>
+        </p:spPr>
+        <p:txBody>
+          <a:bodyPr wrap="square" anchor="t" lIns="0" rIns="0" tIns="0" bIns="0">
+            <a:spAutoFit/>
+          </a:bodyPr>
+          <a:lstStyle/>
+          <a:p>
+            <a:pPr algn="ctr"/>
+            <a:r>
+              <a:rPr sz="1500" b="1">
+                <a:solidFill>
+                  <a:srgbClr val="1F2A44"/>
+                </a:solidFill>
+                <a:latin typeface="Pretendard"/>
+                <a:ea typeface="Pretendard"/>
+              </a:rPr>
+              <a:t>1.00</a:t>
+            </a:r>
+          </a:p>
+        </p:txBody>
+      </p:sp>
+      <p:sp>
+        <p:nvSpPr>
+          <p:cNvPr id="14" name="Rounded Rectangle 13"/>
           <p:cNvSpPr/>
           <p:nvPr/>
         </p:nvSpPr>
         <p:spPr>
           <a:xfrm>
-            <a:off x="640080" y="3840480"/>
-            <a:ext cx="2011680" cy="822960"/>
+            <a:off x="2688336" y="1874519"/>
+            <a:ext cx="914400" cy="868680"/>
           </a:xfrm>
           <a:prstGeom prst="roundRect">
             <a:avLst>
@@ -21514,9 +21368,9 @@
           <a:solidFill>
             <a:srgbClr val="FFFFFF"/>
           </a:solidFill>
-          <a:ln w="15875">
+          <a:ln w="12700">
             <a:solidFill>
-              <a:srgbClr val="2563EB"/>
+              <a:srgbClr val="CBD5E1"/>
             </a:solidFill>
           </a:ln>
           <a:effectLst/>
@@ -21536,46 +21390,95 @@
           </a:fontRef>
         </p:style>
         <p:txBody>
-          <a:bodyPr rtlCol="0" anchor="ctr" wrap="square" lIns="50800" rIns="50800" tIns="25400" bIns="25400"/>
-          <a:lstStyle/>
-          <a:p>
-            <a:pPr algn="ctr"/>
-            <a:r>
-              <a:rPr sz="1150" b="1">
-                <a:solidFill>
-                  <a:srgbClr val="1F2A44"/>
-                </a:solidFill>
-                <a:latin typeface="맑은 고딕"/>
-                <a:ea typeface="맑은 고딕"/>
-              </a:rPr>
-              <a:t>integration-adapter</a:t>
-            </a:r>
-          </a:p>
-          <a:p>
-            <a:pPr algn="ctr"/>
-            <a:r>
-              <a:rPr sz="900" b="0">
+          <a:bodyPr rtlCol="0" anchor="ctr"/>
+          <a:lstStyle/>
+          <a:p>
+            <a:pPr algn="ctr"/>
+          </a:p>
+        </p:txBody>
+      </p:sp>
+      <p:sp>
+        <p:nvSpPr>
+          <p:cNvPr id="15" name="TextBox 14"/>
+          <p:cNvSpPr txBox="1"/>
+          <p:nvPr/>
+        </p:nvSpPr>
+        <p:spPr>
+          <a:xfrm>
+            <a:off x="2688336" y="1965960"/>
+            <a:ext cx="914400" cy="274320"/>
+          </a:xfrm>
+          <a:prstGeom prst="rect">
+            <a:avLst/>
+          </a:prstGeom>
+          <a:noFill/>
+        </p:spPr>
+        <p:txBody>
+          <a:bodyPr wrap="square" anchor="t" lIns="0" rIns="0" tIns="0" bIns="0">
+            <a:spAutoFit/>
+          </a:bodyPr>
+          <a:lstStyle/>
+          <a:p>
+            <a:pPr algn="ctr"/>
+            <a:r>
+              <a:rPr sz="1100" b="0">
                 <a:solidFill>
                   <a:srgbClr val="5B667A"/>
                 </a:solidFill>
-                <a:latin typeface="맑은 고딕"/>
-                <a:ea typeface="맑은 고딕"/>
-              </a:rPr>
-              <a:t>SNMP · NetFlow · sFlow</a:t>
-            </a:r>
-          </a:p>
-        </p:txBody>
-      </p:sp>
-      <p:sp>
-        <p:nvSpPr>
-          <p:cNvPr id="10" name="Rounded Rectangle 9"/>
+                <a:latin typeface="Pretendard"/>
+                <a:ea typeface="Pretendard"/>
+              </a:rPr>
+              <a:t>L18</a:t>
+            </a:r>
+          </a:p>
+        </p:txBody>
+      </p:sp>
+      <p:sp>
+        <p:nvSpPr>
+          <p:cNvPr id="16" name="TextBox 15"/>
+          <p:cNvSpPr txBox="1"/>
+          <p:nvPr/>
+        </p:nvSpPr>
+        <p:spPr>
+          <a:xfrm>
+            <a:off x="2688336" y="2286000"/>
+            <a:ext cx="914400" cy="365760"/>
+          </a:xfrm>
+          <a:prstGeom prst="rect">
+            <a:avLst/>
+          </a:prstGeom>
+          <a:noFill/>
+        </p:spPr>
+        <p:txBody>
+          <a:bodyPr wrap="square" anchor="t" lIns="0" rIns="0" tIns="0" bIns="0">
+            <a:spAutoFit/>
+          </a:bodyPr>
+          <a:lstStyle/>
+          <a:p>
+            <a:pPr algn="ctr"/>
+            <a:r>
+              <a:rPr sz="1500" b="1">
+                <a:solidFill>
+                  <a:srgbClr val="1F2A44"/>
+                </a:solidFill>
+                <a:latin typeface="Pretendard"/>
+                <a:ea typeface="Pretendard"/>
+              </a:rPr>
+              <a:t>1.00</a:t>
+            </a:r>
+          </a:p>
+        </p:txBody>
+      </p:sp>
+      <p:sp>
+        <p:nvSpPr>
+          <p:cNvPr id="17" name="Rounded Rectangle 16"/>
           <p:cNvSpPr/>
           <p:nvPr/>
         </p:nvSpPr>
         <p:spPr>
           <a:xfrm>
-            <a:off x="3200400" y="2468880"/>
-            <a:ext cx="1371600" cy="2194560"/>
+            <a:off x="3712464" y="1874519"/>
+            <a:ext cx="914400" cy="868680"/>
           </a:xfrm>
           <a:prstGeom prst="roundRect">
             <a:avLst>
@@ -21583,11 +21486,11 @@
             </a:avLst>
           </a:prstGeom>
           <a:solidFill>
-            <a:srgbClr val="F3ECFE"/>
+            <a:srgbClr val="EAF1FD"/>
           </a:solidFill>
-          <a:ln w="15875">
+          <a:ln w="17780">
             <a:solidFill>
-              <a:srgbClr val="8B5CF6"/>
+              <a:srgbClr val="1E40AF"/>
             </a:solidFill>
           </a:ln>
           <a:effectLst/>
@@ -21607,47 +21510,95 @@
           </a:fontRef>
         </p:style>
         <p:txBody>
-          <a:bodyPr rtlCol="0" anchor="ctr" wrap="square" lIns="50800" rIns="50800" tIns="25400" bIns="25400"/>
-          <a:lstStyle/>
-          <a:p>
-            <a:pPr algn="ctr"/>
-            <a:r>
-              <a:rPr sz="1150" b="1">
-                <a:solidFill>
-                  <a:srgbClr val="1F2A44"/>
-                </a:solidFill>
-                <a:latin typeface="맑은 고딕"/>
-                <a:ea typeface="맑은 고딕"/>
-              </a:rPr>
-              <a:t>NATS</a:t>
-            </a:r>
-          </a:p>
-          <a:p>
-            <a:pPr algn="ctr"/>
-            <a:r>
-              <a:rPr sz="900" b="0">
+          <a:bodyPr rtlCol="0" anchor="ctr"/>
+          <a:lstStyle/>
+          <a:p>
+            <a:pPr algn="ctr"/>
+          </a:p>
+        </p:txBody>
+      </p:sp>
+      <p:sp>
+        <p:nvSpPr>
+          <p:cNvPr id="18" name="TextBox 17"/>
+          <p:cNvSpPr txBox="1"/>
+          <p:nvPr/>
+        </p:nvSpPr>
+        <p:spPr>
+          <a:xfrm>
+            <a:off x="3712464" y="1965960"/>
+            <a:ext cx="914400" cy="274320"/>
+          </a:xfrm>
+          <a:prstGeom prst="rect">
+            <a:avLst/>
+          </a:prstGeom>
+          <a:noFill/>
+        </p:spPr>
+        <p:txBody>
+          <a:bodyPr wrap="square" anchor="t" lIns="0" rIns="0" tIns="0" bIns="0">
+            <a:spAutoFit/>
+          </a:bodyPr>
+          <a:lstStyle/>
+          <a:p>
+            <a:pPr algn="ctr"/>
+            <a:r>
+              <a:rPr sz="1100" b="0">
                 <a:solidFill>
                   <a:srgbClr val="5B667A"/>
                 </a:solidFill>
-                <a:latin typeface="맑은 고딕"/>
-                <a:ea typeface="맑은 고딕"/>
-              </a:rPr>
-              <a:t>이벤트 버스
-protobuf</a:t>
-            </a:r>
-          </a:p>
-        </p:txBody>
-      </p:sp>
-      <p:sp>
-        <p:nvSpPr>
-          <p:cNvPr id="11" name="Rounded Rectangle 10"/>
+                <a:latin typeface="Pretendard"/>
+                <a:ea typeface="Pretendard"/>
+              </a:rPr>
+              <a:t>L21</a:t>
+            </a:r>
+          </a:p>
+        </p:txBody>
+      </p:sp>
+      <p:sp>
+        <p:nvSpPr>
+          <p:cNvPr id="19" name="TextBox 18"/>
+          <p:cNvSpPr txBox="1"/>
+          <p:nvPr/>
+        </p:nvSpPr>
+        <p:spPr>
+          <a:xfrm>
+            <a:off x="3712464" y="2286000"/>
+            <a:ext cx="914400" cy="365760"/>
+          </a:xfrm>
+          <a:prstGeom prst="rect">
+            <a:avLst/>
+          </a:prstGeom>
+          <a:noFill/>
+        </p:spPr>
+        <p:txBody>
+          <a:bodyPr wrap="square" anchor="t" lIns="0" rIns="0" tIns="0" bIns="0">
+            <a:spAutoFit/>
+          </a:bodyPr>
+          <a:lstStyle/>
+          <a:p>
+            <a:pPr algn="ctr"/>
+            <a:r>
+              <a:rPr sz="1500" b="1">
+                <a:solidFill>
+                  <a:srgbClr val="1E40AF"/>
+                </a:solidFill>
+                <a:latin typeface="Pretendard"/>
+                <a:ea typeface="Pretendard"/>
+              </a:rPr>
+              <a:t>0.00</a:t>
+            </a:r>
+          </a:p>
+        </p:txBody>
+      </p:sp>
+      <p:sp>
+        <p:nvSpPr>
+          <p:cNvPr id="20" name="Rounded Rectangle 19"/>
           <p:cNvSpPr/>
           <p:nvPr/>
         </p:nvSpPr>
         <p:spPr>
           <a:xfrm>
-            <a:off x="5120640" y="1554480"/>
-            <a:ext cx="2468880" cy="777240"/>
+            <a:off x="4736592" y="1874519"/>
+            <a:ext cx="914400" cy="868680"/>
           </a:xfrm>
           <a:prstGeom prst="roundRect">
             <a:avLst>
@@ -21657,9 +21608,9 @@
           <a:solidFill>
             <a:srgbClr val="FFFFFF"/>
           </a:solidFill>
-          <a:ln w="15875">
+          <a:ln w="12700">
             <a:solidFill>
-              <a:srgbClr val="2563EB"/>
+              <a:srgbClr val="CBD5E1"/>
             </a:solidFill>
           </a:ln>
           <a:effectLst/>
@@ -21679,46 +21630,95 @@
           </a:fontRef>
         </p:style>
         <p:txBody>
-          <a:bodyPr rtlCol="0" anchor="ctr" wrap="square" lIns="50800" rIns="50800" tIns="25400" bIns="25400"/>
-          <a:lstStyle/>
-          <a:p>
-            <a:pPr algn="ctr"/>
-            <a:r>
-              <a:rPr sz="1150" b="1">
-                <a:solidFill>
-                  <a:srgbClr val="1F2A44"/>
-                </a:solidFill>
-                <a:latin typeface="맑은 고딕"/>
-                <a:ea typeface="맑은 고딕"/>
-              </a:rPr>
-              <a:t>parser-normalizer</a:t>
-            </a:r>
-          </a:p>
-          <a:p>
-            <a:pPr algn="ctr"/>
-            <a:r>
-              <a:rPr sz="900" b="0">
+          <a:bodyPr rtlCol="0" anchor="ctr"/>
+          <a:lstStyle/>
+          <a:p>
+            <a:pPr algn="ctr"/>
+          </a:p>
+        </p:txBody>
+      </p:sp>
+      <p:sp>
+        <p:nvSpPr>
+          <p:cNvPr id="21" name="TextBox 20"/>
+          <p:cNvSpPr txBox="1"/>
+          <p:nvPr/>
+        </p:nvSpPr>
+        <p:spPr>
+          <a:xfrm>
+            <a:off x="4736592" y="1965960"/>
+            <a:ext cx="914400" cy="274320"/>
+          </a:xfrm>
+          <a:prstGeom prst="rect">
+            <a:avLst/>
+          </a:prstGeom>
+          <a:noFill/>
+        </p:spPr>
+        <p:txBody>
+          <a:bodyPr wrap="square" anchor="t" lIns="0" rIns="0" tIns="0" bIns="0">
+            <a:spAutoFit/>
+          </a:bodyPr>
+          <a:lstStyle/>
+          <a:p>
+            <a:pPr algn="ctr"/>
+            <a:r>
+              <a:rPr sz="1100" b="0">
                 <a:solidFill>
                   <a:srgbClr val="5B667A"/>
                 </a:solidFill>
-                <a:latin typeface="맑은 고딕"/>
-                <a:ea typeface="맑은 고딕"/>
-              </a:rPr>
-              <a:t>정규화 · GeoIP</a:t>
-            </a:r>
-          </a:p>
-        </p:txBody>
-      </p:sp>
-      <p:sp>
-        <p:nvSpPr>
-          <p:cNvPr id="12" name="Rounded Rectangle 11"/>
+                <a:latin typeface="Pretendard"/>
+                <a:ea typeface="Pretendard"/>
+              </a:rPr>
+              <a:t>L25</a:t>
+            </a:r>
+          </a:p>
+        </p:txBody>
+      </p:sp>
+      <p:sp>
+        <p:nvSpPr>
+          <p:cNvPr id="22" name="TextBox 21"/>
+          <p:cNvSpPr txBox="1"/>
+          <p:nvPr/>
+        </p:nvSpPr>
+        <p:spPr>
+          <a:xfrm>
+            <a:off x="4736592" y="2286000"/>
+            <a:ext cx="914400" cy="365760"/>
+          </a:xfrm>
+          <a:prstGeom prst="rect">
+            <a:avLst/>
+          </a:prstGeom>
+          <a:noFill/>
+        </p:spPr>
+        <p:txBody>
+          <a:bodyPr wrap="square" anchor="t" lIns="0" rIns="0" tIns="0" bIns="0">
+            <a:spAutoFit/>
+          </a:bodyPr>
+          <a:lstStyle/>
+          <a:p>
+            <a:pPr algn="ctr"/>
+            <a:r>
+              <a:rPr sz="1500" b="1">
+                <a:solidFill>
+                  <a:srgbClr val="1F2A44"/>
+                </a:solidFill>
+                <a:latin typeface="Pretendard"/>
+                <a:ea typeface="Pretendard"/>
+              </a:rPr>
+              <a:t>0.00</a:t>
+            </a:r>
+          </a:p>
+        </p:txBody>
+      </p:sp>
+      <p:sp>
+        <p:nvSpPr>
+          <p:cNvPr id="23" name="Rounded Rectangle 22"/>
           <p:cNvSpPr/>
           <p:nvPr/>
         </p:nvSpPr>
         <p:spPr>
           <a:xfrm>
-            <a:off x="5120640" y="2560320"/>
-            <a:ext cx="2468880" cy="777240"/>
+            <a:off x="5760720" y="1874519"/>
+            <a:ext cx="914400" cy="868680"/>
           </a:xfrm>
           <a:prstGeom prst="roundRect">
             <a:avLst>
@@ -21728,9 +21728,9 @@
           <a:solidFill>
             <a:srgbClr val="FFFFFF"/>
           </a:solidFill>
-          <a:ln w="15875">
+          <a:ln w="12700">
             <a:solidFill>
-              <a:srgbClr val="2563EB"/>
+              <a:srgbClr val="CBD5E1"/>
             </a:solidFill>
           </a:ln>
           <a:effectLst/>
@@ -21750,46 +21750,180 @@
           </a:fontRef>
         </p:style>
         <p:txBody>
-          <a:bodyPr rtlCol="0" anchor="ctr" wrap="square" lIns="50800" rIns="50800" tIns="25400" bIns="25400"/>
-          <a:lstStyle/>
-          <a:p>
-            <a:pPr algn="ctr"/>
-            <a:r>
-              <a:rPr sz="1150" b="1">
-                <a:solidFill>
-                  <a:srgbClr val="1F2A44"/>
-                </a:solidFill>
-                <a:latin typeface="맑은 고딕"/>
-                <a:ea typeface="맑은 고딕"/>
-              </a:rPr>
-              <a:t>storage-writer</a:t>
-            </a:r>
-          </a:p>
-          <a:p>
-            <a:pPr algn="ctr"/>
-            <a:r>
-              <a:rPr sz="900" b="0">
+          <a:bodyPr rtlCol="0" anchor="ctr"/>
+          <a:lstStyle/>
+          <a:p>
+            <a:pPr algn="ctr"/>
+          </a:p>
+        </p:txBody>
+      </p:sp>
+      <p:sp>
+        <p:nvSpPr>
+          <p:cNvPr id="24" name="TextBox 23"/>
+          <p:cNvSpPr txBox="1"/>
+          <p:nvPr/>
+        </p:nvSpPr>
+        <p:spPr>
+          <a:xfrm>
+            <a:off x="5760720" y="1965960"/>
+            <a:ext cx="914400" cy="274320"/>
+          </a:xfrm>
+          <a:prstGeom prst="rect">
+            <a:avLst/>
+          </a:prstGeom>
+          <a:noFill/>
+        </p:spPr>
+        <p:txBody>
+          <a:bodyPr wrap="square" anchor="t" lIns="0" rIns="0" tIns="0" bIns="0">
+            <a:spAutoFit/>
+          </a:bodyPr>
+          <a:lstStyle/>
+          <a:p>
+            <a:pPr algn="ctr"/>
+            <a:r>
+              <a:rPr sz="1100" b="0">
                 <a:solidFill>
                   <a:srgbClr val="5B667A"/>
                 </a:solidFill>
-                <a:latin typeface="맑은 고딕"/>
-                <a:ea typeface="맑은 고딕"/>
-              </a:rPr>
-              <a:t>ISM · DLQ</a:t>
-            </a:r>
-          </a:p>
-        </p:txBody>
-      </p:sp>
-      <p:sp>
-        <p:nvSpPr>
-          <p:cNvPr id="13" name="Rounded Rectangle 12"/>
+                <a:latin typeface="Pretendard"/>
+                <a:ea typeface="Pretendard"/>
+              </a:rPr>
+              <a:t>L28</a:t>
+            </a:r>
+          </a:p>
+        </p:txBody>
+      </p:sp>
+      <p:sp>
+        <p:nvSpPr>
+          <p:cNvPr id="25" name="TextBox 24"/>
+          <p:cNvSpPr txBox="1"/>
+          <p:nvPr/>
+        </p:nvSpPr>
+        <p:spPr>
+          <a:xfrm>
+            <a:off x="5760720" y="2286000"/>
+            <a:ext cx="914400" cy="365760"/>
+          </a:xfrm>
+          <a:prstGeom prst="rect">
+            <a:avLst/>
+          </a:prstGeom>
+          <a:noFill/>
+        </p:spPr>
+        <p:txBody>
+          <a:bodyPr wrap="square" anchor="t" lIns="0" rIns="0" tIns="0" bIns="0">
+            <a:spAutoFit/>
+          </a:bodyPr>
+          <a:lstStyle/>
+          <a:p>
+            <a:pPr algn="ctr"/>
+            <a:r>
+              <a:rPr sz="1500" b="1">
+                <a:solidFill>
+                  <a:srgbClr val="1F2A44"/>
+                </a:solidFill>
+                <a:latin typeface="Pretendard"/>
+                <a:ea typeface="Pretendard"/>
+              </a:rPr>
+              <a:t>0.00</a:t>
+            </a:r>
+          </a:p>
+        </p:txBody>
+      </p:sp>
+      <p:sp>
+        <p:nvSpPr>
+          <p:cNvPr id="26" name="TextBox 25"/>
+          <p:cNvSpPr txBox="1"/>
+          <p:nvPr/>
+        </p:nvSpPr>
+        <p:spPr>
+          <a:xfrm>
+            <a:off x="640080" y="2852928"/>
+            <a:ext cx="6309360" cy="548640"/>
+          </a:xfrm>
+          <a:prstGeom prst="rect">
+            <a:avLst/>
+          </a:prstGeom>
+          <a:noFill/>
+        </p:spPr>
+        <p:txBody>
+          <a:bodyPr wrap="square" anchor="t" lIns="0" rIns="0" tIns="0" bIns="0">
+            <a:spAutoFit/>
+          </a:bodyPr>
+          <a:lstStyle/>
+          <a:p>
+            <a:pPr algn="l"/>
+            <a:r>
+              <a:rPr sz="1050" b="0">
+                <a:solidFill>
+                  <a:srgbClr val="5B667A"/>
+                </a:solidFill>
+                <a:latin typeface="Pretendard"/>
+                <a:ea typeface="Pretendard"/>
+              </a:rPr>
+              <a:t>앞·중간 레이어(10·14·18)에서는 효과가 정확히 0 — 튜닝을 안 해서 생긴 위음성이다</a:t>
+            </a:r>
+          </a:p>
+          <a:p>
+            <a:pPr algn="l"/>
+            <a:r>
+              <a:rPr sz="1050" b="1">
+                <a:solidFill>
+                  <a:srgbClr val="1E40AF"/>
+                </a:solidFill>
+                <a:latin typeface="Pretendard"/>
+                <a:ea typeface="Pretendard"/>
+              </a:rPr>
+              <a:t>거부 방향은 네트워크 후반부(≈0.6 depth)에서 매개된다 → best = L21</a:t>
+            </a:r>
+          </a:p>
+        </p:txBody>
+      </p:sp>
+      <p:sp>
+        <p:nvSpPr>
+          <p:cNvPr id="27" name="TextBox 26"/>
+          <p:cNvSpPr txBox="1"/>
+          <p:nvPr/>
+        </p:nvSpPr>
+        <p:spPr>
+          <a:xfrm>
+            <a:off x="7223760" y="1463040"/>
+            <a:ext cx="4389120" cy="320040"/>
+          </a:xfrm>
+          <a:prstGeom prst="rect">
+            <a:avLst/>
+          </a:prstGeom>
+          <a:noFill/>
+        </p:spPr>
+        <p:txBody>
+          <a:bodyPr wrap="square" anchor="t" lIns="0" rIns="0" tIns="0" bIns="0">
+            <a:spAutoFit/>
+          </a:bodyPr>
+          <a:lstStyle/>
+          <a:p>
+            <a:pPr algn="l"/>
+            <a:r>
+              <a:rPr sz="1200" b="1">
+                <a:solidFill>
+                  <a:srgbClr val="1E40AF"/>
+                </a:solidFill>
+                <a:latin typeface="Pretendard"/>
+                <a:ea typeface="Pretendard"/>
+              </a:rPr>
+              <a:t>거부율 — 3단계 측정</a:t>
+            </a:r>
+          </a:p>
+        </p:txBody>
+      </p:sp>
+      <p:sp>
+        <p:nvSpPr>
+          <p:cNvPr id="28" name="Rounded Rectangle 27"/>
           <p:cNvSpPr/>
           <p:nvPr/>
         </p:nvSpPr>
         <p:spPr>
           <a:xfrm>
-            <a:off x="5120640" y="3566160"/>
-            <a:ext cx="2468880" cy="777240"/>
+            <a:off x="7223760" y="1874519"/>
+            <a:ext cx="4434840" cy="384048"/>
           </a:xfrm>
           <a:prstGeom prst="roundRect">
             <a:avLst>
@@ -21797,12 +21931,10 @@
             </a:avLst>
           </a:prstGeom>
           <a:solidFill>
-            <a:srgbClr val="EAF1FD"/>
+            <a:srgbClr val="F1F5F9"/>
           </a:solidFill>
-          <a:ln w="15875">
-            <a:solidFill>
-              <a:srgbClr val="1E40AF"/>
-            </a:solidFill>
+          <a:ln>
+            <a:noFill/>
           </a:ln>
           <a:effectLst/>
         </p:spPr>
@@ -21821,46 +21953,504 @@
           </a:fontRef>
         </p:style>
         <p:txBody>
-          <a:bodyPr rtlCol="0" anchor="ctr" wrap="square" lIns="50800" rIns="50800" tIns="25400" bIns="25400"/>
+          <a:bodyPr rtlCol="0" anchor="ctr"/>
+          <a:lstStyle/>
+          <a:p>
+            <a:pPr algn="ctr"/>
+          </a:p>
+        </p:txBody>
+      </p:sp>
+      <p:sp>
+        <p:nvSpPr>
+          <p:cNvPr id="29" name="TextBox 28"/>
+          <p:cNvSpPr txBox="1"/>
+          <p:nvPr/>
+        </p:nvSpPr>
+        <p:spPr>
+          <a:xfrm>
+            <a:off x="7360920" y="1947672"/>
+            <a:ext cx="2011680" cy="274320"/>
+          </a:xfrm>
+          <a:prstGeom prst="rect">
+            <a:avLst/>
+          </a:prstGeom>
+          <a:noFill/>
+        </p:spPr>
+        <p:txBody>
+          <a:bodyPr wrap="square" anchor="t" lIns="0" rIns="0" tIns="0" bIns="0">
+            <a:spAutoFit/>
+          </a:bodyPr>
+          <a:lstStyle/>
+          <a:p>
+            <a:pPr algn="l"/>
+            <a:r>
+              <a:rPr sz="1000" b="1">
+                <a:solidFill>
+                  <a:srgbClr val="5B667A"/>
+                </a:solidFill>
+                <a:latin typeface="Pretendard"/>
+                <a:ea typeface="Pretendard"/>
+              </a:rPr>
+              <a:t>단계</a:t>
+            </a:r>
+          </a:p>
+        </p:txBody>
+      </p:sp>
+      <p:sp>
+        <p:nvSpPr>
+          <p:cNvPr id="30" name="TextBox 29"/>
+          <p:cNvSpPr txBox="1"/>
+          <p:nvPr/>
+        </p:nvSpPr>
+        <p:spPr>
+          <a:xfrm>
+            <a:off x="9601200" y="1947672"/>
+            <a:ext cx="1005840" cy="274320"/>
+          </a:xfrm>
+          <a:prstGeom prst="rect">
+            <a:avLst/>
+          </a:prstGeom>
+          <a:noFill/>
+        </p:spPr>
+        <p:txBody>
+          <a:bodyPr wrap="square" anchor="t" lIns="0" rIns="0" tIns="0" bIns="0">
+            <a:spAutoFit/>
+          </a:bodyPr>
+          <a:lstStyle/>
+          <a:p>
+            <a:pPr algn="ctr"/>
+            <a:r>
+              <a:rPr sz="1000" b="1">
+                <a:solidFill>
+                  <a:srgbClr val="5B667A"/>
+                </a:solidFill>
+                <a:latin typeface="Pretendard"/>
+                <a:ea typeface="Pretendard"/>
+              </a:rPr>
+              <a:t>유해</a:t>
+            </a:r>
+          </a:p>
+        </p:txBody>
+      </p:sp>
+      <p:sp>
+        <p:nvSpPr>
+          <p:cNvPr id="31" name="TextBox 30"/>
+          <p:cNvSpPr txBox="1"/>
+          <p:nvPr/>
+        </p:nvSpPr>
+        <p:spPr>
+          <a:xfrm>
+            <a:off x="10607040" y="1947672"/>
+            <a:ext cx="1005840" cy="274320"/>
+          </a:xfrm>
+          <a:prstGeom prst="rect">
+            <a:avLst/>
+          </a:prstGeom>
+          <a:noFill/>
+        </p:spPr>
+        <p:txBody>
+          <a:bodyPr wrap="square" anchor="t" lIns="0" rIns="0" tIns="0" bIns="0">
+            <a:spAutoFit/>
+          </a:bodyPr>
+          <a:lstStyle/>
+          <a:p>
+            <a:pPr algn="ctr"/>
+            <a:r>
+              <a:rPr sz="1000" b="1">
+                <a:solidFill>
+                  <a:srgbClr val="5B667A"/>
+                </a:solidFill>
+                <a:latin typeface="Pretendard"/>
+                <a:ea typeface="Pretendard"/>
+              </a:rPr>
+              <a:t>과잉거부</a:t>
+            </a:r>
+          </a:p>
+        </p:txBody>
+      </p:sp>
+      <p:sp>
+        <p:nvSpPr>
+          <p:cNvPr id="32" name="TextBox 31"/>
+          <p:cNvSpPr txBox="1"/>
+          <p:nvPr/>
+        </p:nvSpPr>
+        <p:spPr>
+          <a:xfrm>
+            <a:off x="7360920" y="2286000"/>
+            <a:ext cx="2194560" cy="320040"/>
+          </a:xfrm>
+          <a:prstGeom prst="rect">
+            <a:avLst/>
+          </a:prstGeom>
+          <a:noFill/>
+        </p:spPr>
+        <p:txBody>
+          <a:bodyPr wrap="square" anchor="t" lIns="0" rIns="0" tIns="0" bIns="0">
+            <a:spAutoFit/>
+          </a:bodyPr>
+          <a:lstStyle/>
+          <a:p>
+            <a:pPr algn="l"/>
+            <a:r>
+              <a:rPr sz="1050" b="0">
+                <a:solidFill>
+                  <a:srgbClr val="1F2A44"/>
+                </a:solidFill>
+                <a:latin typeface="Pretendard"/>
+                <a:ea typeface="Pretendard"/>
+              </a:rPr>
+              <a:t>BEFORE (원본)</a:t>
+            </a:r>
+          </a:p>
+        </p:txBody>
+      </p:sp>
+      <p:sp>
+        <p:nvSpPr>
+          <p:cNvPr id="33" name="TextBox 32"/>
+          <p:cNvSpPr txBox="1"/>
+          <p:nvPr/>
+        </p:nvSpPr>
+        <p:spPr>
+          <a:xfrm>
+            <a:off x="9601200" y="2286000"/>
+            <a:ext cx="1005840" cy="320040"/>
+          </a:xfrm>
+          <a:prstGeom prst="rect">
+            <a:avLst/>
+          </a:prstGeom>
+          <a:noFill/>
+        </p:spPr>
+        <p:txBody>
+          <a:bodyPr wrap="square" anchor="t" lIns="0" rIns="0" tIns="0" bIns="0">
+            <a:spAutoFit/>
+          </a:bodyPr>
           <a:lstStyle/>
           <a:p>
             <a:pPr algn="ctr"/>
             <a:r>
               <a:rPr sz="1150" b="1">
                 <a:solidFill>
-                  <a:srgbClr val="1F2A44"/>
-                </a:solidFill>
-                <a:latin typeface="맑은 고딕"/>
-                <a:ea typeface="맑은 고딕"/>
-              </a:rPr>
-              <a:t>detection-correlation</a:t>
-            </a:r>
-          </a:p>
-          <a:p>
-            <a:pPr algn="ctr"/>
-            <a:r>
-              <a:rPr sz="900" b="0">
+                  <a:srgbClr val="1E40AF"/>
+                </a:solidFill>
+                <a:latin typeface="Pretendard"/>
+                <a:ea typeface="Pretendard"/>
+              </a:rPr>
+              <a:t>1.00</a:t>
+            </a:r>
+          </a:p>
+        </p:txBody>
+      </p:sp>
+      <p:sp>
+        <p:nvSpPr>
+          <p:cNvPr id="34" name="TextBox 33"/>
+          <p:cNvSpPr txBox="1"/>
+          <p:nvPr/>
+        </p:nvSpPr>
+        <p:spPr>
+          <a:xfrm>
+            <a:off x="10607040" y="2286000"/>
+            <a:ext cx="1005840" cy="320040"/>
+          </a:xfrm>
+          <a:prstGeom prst="rect">
+            <a:avLst/>
+          </a:prstGeom>
+          <a:noFill/>
+        </p:spPr>
+        <p:txBody>
+          <a:bodyPr wrap="square" anchor="t" lIns="0" rIns="0" tIns="0" bIns="0">
+            <a:spAutoFit/>
+          </a:bodyPr>
+          <a:lstStyle/>
+          <a:p>
+            <a:pPr algn="ctr"/>
+            <a:r>
+              <a:rPr sz="1150" b="0">
                 <a:solidFill>
                   <a:srgbClr val="5B667A"/>
                 </a:solidFill>
-                <a:latin typeface="맑은 고딕"/>
-                <a:ea typeface="맑은 고딕"/>
-              </a:rPr>
-              <a:t>탐지 7종 + 룰 DSL 파서</a:t>
-            </a:r>
-          </a:p>
-        </p:txBody>
-      </p:sp>
-      <p:sp>
-        <p:nvSpPr>
-          <p:cNvPr id="14" name="Rounded Rectangle 13"/>
+                <a:latin typeface="Pretendard"/>
+                <a:ea typeface="Pretendard"/>
+              </a:rPr>
+              <a:t>0.00</a:t>
+            </a:r>
+          </a:p>
+        </p:txBody>
+      </p:sp>
+      <p:sp>
+        <p:nvSpPr>
+          <p:cNvPr id="35" name="TextBox 34"/>
+          <p:cNvSpPr txBox="1"/>
+          <p:nvPr/>
+        </p:nvSpPr>
+        <p:spPr>
+          <a:xfrm>
+            <a:off x="7360920" y="2706624"/>
+            <a:ext cx="2194560" cy="320040"/>
+          </a:xfrm>
+          <a:prstGeom prst="rect">
+            <a:avLst/>
+          </a:prstGeom>
+          <a:noFill/>
+        </p:spPr>
+        <p:txBody>
+          <a:bodyPr wrap="square" anchor="t" lIns="0" rIns="0" tIns="0" bIns="0">
+            <a:spAutoFit/>
+          </a:bodyPr>
+          <a:lstStyle/>
+          <a:p>
+            <a:pPr algn="l"/>
+            <a:r>
+              <a:rPr sz="1050" b="0">
+                <a:solidFill>
+                  <a:srgbClr val="1F2A44"/>
+                </a:solidFill>
+                <a:latin typeface="Pretendard"/>
+                <a:ea typeface="Pretendard"/>
+              </a:rPr>
+              <a:t>추론 ablation (L21)</a:t>
+            </a:r>
+          </a:p>
+        </p:txBody>
+      </p:sp>
+      <p:sp>
+        <p:nvSpPr>
+          <p:cNvPr id="36" name="TextBox 35"/>
+          <p:cNvSpPr txBox="1"/>
+          <p:nvPr/>
+        </p:nvSpPr>
+        <p:spPr>
+          <a:xfrm>
+            <a:off x="9601200" y="2706624"/>
+            <a:ext cx="1005840" cy="320040"/>
+          </a:xfrm>
+          <a:prstGeom prst="rect">
+            <a:avLst/>
+          </a:prstGeom>
+          <a:noFill/>
+        </p:spPr>
+        <p:txBody>
+          <a:bodyPr wrap="square" anchor="t" lIns="0" rIns="0" tIns="0" bIns="0">
+            <a:spAutoFit/>
+          </a:bodyPr>
+          <a:lstStyle/>
+          <a:p>
+            <a:pPr algn="ctr"/>
+            <a:r>
+              <a:rPr sz="1150" b="1">
+                <a:solidFill>
+                  <a:srgbClr val="1E40AF"/>
+                </a:solidFill>
+                <a:latin typeface="Pretendard"/>
+                <a:ea typeface="Pretendard"/>
+              </a:rPr>
+              <a:t>0.00</a:t>
+            </a:r>
+          </a:p>
+        </p:txBody>
+      </p:sp>
+      <p:sp>
+        <p:nvSpPr>
+          <p:cNvPr id="37" name="TextBox 36"/>
+          <p:cNvSpPr txBox="1"/>
+          <p:nvPr/>
+        </p:nvSpPr>
+        <p:spPr>
+          <a:xfrm>
+            <a:off x="10607040" y="2706624"/>
+            <a:ext cx="1005840" cy="320040"/>
+          </a:xfrm>
+          <a:prstGeom prst="rect">
+            <a:avLst/>
+          </a:prstGeom>
+          <a:noFill/>
+        </p:spPr>
+        <p:txBody>
+          <a:bodyPr wrap="square" anchor="t" lIns="0" rIns="0" tIns="0" bIns="0">
+            <a:spAutoFit/>
+          </a:bodyPr>
+          <a:lstStyle/>
+          <a:p>
+            <a:pPr algn="ctr"/>
+            <a:r>
+              <a:rPr sz="1150" b="0">
+                <a:solidFill>
+                  <a:srgbClr val="5B667A"/>
+                </a:solidFill>
+                <a:latin typeface="Pretendard"/>
+                <a:ea typeface="Pretendard"/>
+              </a:rPr>
+              <a:t>0.00</a:t>
+            </a:r>
+          </a:p>
+        </p:txBody>
+      </p:sp>
+      <p:sp>
+        <p:nvSpPr>
+          <p:cNvPr id="38" name="TextBox 37"/>
+          <p:cNvSpPr txBox="1"/>
+          <p:nvPr/>
+        </p:nvSpPr>
+        <p:spPr>
+          <a:xfrm>
+            <a:off x="7360920" y="3127248"/>
+            <a:ext cx="2194560" cy="320040"/>
+          </a:xfrm>
+          <a:prstGeom prst="rect">
+            <a:avLst/>
+          </a:prstGeom>
+          <a:noFill/>
+        </p:spPr>
+        <p:txBody>
+          <a:bodyPr wrap="square" anchor="t" lIns="0" rIns="0" tIns="0" bIns="0">
+            <a:spAutoFit/>
+          </a:bodyPr>
+          <a:lstStyle/>
+          <a:p>
+            <a:pPr algn="l"/>
+            <a:r>
+              <a:rPr sz="1050" b="0">
+                <a:solidFill>
+                  <a:srgbClr val="1F2A44"/>
+                </a:solidFill>
+                <a:latin typeface="Pretendard"/>
+                <a:ea typeface="Pretendard"/>
+              </a:rPr>
+              <a:t>영구 weight 수술</a:t>
+            </a:r>
+          </a:p>
+        </p:txBody>
+      </p:sp>
+      <p:sp>
+        <p:nvSpPr>
+          <p:cNvPr id="39" name="TextBox 38"/>
+          <p:cNvSpPr txBox="1"/>
+          <p:nvPr/>
+        </p:nvSpPr>
+        <p:spPr>
+          <a:xfrm>
+            <a:off x="9601200" y="3127248"/>
+            <a:ext cx="1005840" cy="320040"/>
+          </a:xfrm>
+          <a:prstGeom prst="rect">
+            <a:avLst/>
+          </a:prstGeom>
+          <a:noFill/>
+        </p:spPr>
+        <p:txBody>
+          <a:bodyPr wrap="square" anchor="t" lIns="0" rIns="0" tIns="0" bIns="0">
+            <a:spAutoFit/>
+          </a:bodyPr>
+          <a:lstStyle/>
+          <a:p>
+            <a:pPr algn="ctr"/>
+            <a:r>
+              <a:rPr sz="1150" b="1">
+                <a:solidFill>
+                  <a:srgbClr val="1E40AF"/>
+                </a:solidFill>
+                <a:latin typeface="Pretendard"/>
+                <a:ea typeface="Pretendard"/>
+              </a:rPr>
+              <a:t>0.04</a:t>
+            </a:r>
+          </a:p>
+        </p:txBody>
+      </p:sp>
+      <p:sp>
+        <p:nvSpPr>
+          <p:cNvPr id="40" name="TextBox 39"/>
+          <p:cNvSpPr txBox="1"/>
+          <p:nvPr/>
+        </p:nvSpPr>
+        <p:spPr>
+          <a:xfrm>
+            <a:off x="10607040" y="3127248"/>
+            <a:ext cx="1005840" cy="320040"/>
+          </a:xfrm>
+          <a:prstGeom prst="rect">
+            <a:avLst/>
+          </a:prstGeom>
+          <a:noFill/>
+        </p:spPr>
+        <p:txBody>
+          <a:bodyPr wrap="square" anchor="t" lIns="0" rIns="0" tIns="0" bIns="0">
+            <a:spAutoFit/>
+          </a:bodyPr>
+          <a:lstStyle/>
+          <a:p>
+            <a:pPr algn="ctr"/>
+            <a:r>
+              <a:rPr sz="1150" b="0">
+                <a:solidFill>
+                  <a:srgbClr val="5B667A"/>
+                </a:solidFill>
+                <a:latin typeface="Pretendard"/>
+                <a:ea typeface="Pretendard"/>
+              </a:rPr>
+              <a:t>0.00</a:t>
+            </a:r>
+          </a:p>
+        </p:txBody>
+      </p:sp>
+      <p:sp>
+        <p:nvSpPr>
+          <p:cNvPr id="41" name="TextBox 40"/>
+          <p:cNvSpPr txBox="1"/>
+          <p:nvPr/>
+        </p:nvSpPr>
+        <p:spPr>
+          <a:xfrm>
+            <a:off x="7223760" y="3611880"/>
+            <a:ext cx="4434840" cy="457200"/>
+          </a:xfrm>
+          <a:prstGeom prst="rect">
+            <a:avLst/>
+          </a:prstGeom>
+          <a:noFill/>
+        </p:spPr>
+        <p:txBody>
+          <a:bodyPr wrap="square" anchor="t" lIns="0" rIns="0" tIns="0" bIns="0">
+            <a:spAutoFit/>
+          </a:bodyPr>
+          <a:lstStyle/>
+          <a:p>
+            <a:pPr algn="l"/>
+            <a:r>
+              <a:rPr sz="1000" b="0">
+                <a:solidFill>
+                  <a:srgbClr val="5B667A"/>
+                </a:solidFill>
+                <a:latin typeface="Pretendard"/>
+                <a:ea typeface="Pretendard"/>
+              </a:rPr>
+              <a:t>과잉거부는 처음부터 끝까지 0.00 — 벗겨진 것은 행동 족쇄이지</a:t>
+            </a:r>
+          </a:p>
+          <a:p>
+            <a:pPr algn="l"/>
+            <a:r>
+              <a:rPr sz="1000" b="0">
+                <a:solidFill>
+                  <a:srgbClr val="5B667A"/>
+                </a:solidFill>
+                <a:latin typeface="Pretendard"/>
+                <a:ea typeface="Pretendard"/>
+              </a:rPr>
+              <a:t>능력이 더해진 게 아니다</a:t>
+            </a:r>
+          </a:p>
+        </p:txBody>
+      </p:sp>
+      <p:sp>
+        <p:nvSpPr>
+          <p:cNvPr id="42" name="Rounded Rectangle 41"/>
           <p:cNvSpPr/>
           <p:nvPr/>
         </p:nvSpPr>
         <p:spPr>
           <a:xfrm>
-            <a:off x="5120640" y="4572000"/>
-            <a:ext cx="2468880" cy="777240"/>
+            <a:off x="640080" y="4114800"/>
+            <a:ext cx="10972800" cy="1143000"/>
           </a:xfrm>
           <a:prstGeom prst="roundRect">
             <a:avLst>
@@ -21868,278 +22458,7 @@
             </a:avLst>
           </a:prstGeom>
           <a:solidFill>
-            <a:srgbClr val="FFFFFF"/>
-          </a:solidFill>
-          <a:ln w="15875">
-            <a:solidFill>
-              <a:srgbClr val="2563EB"/>
-            </a:solidFill>
-          </a:ln>
-          <a:effectLst/>
-        </p:spPr>
-        <p:style>
-          <a:lnRef idx="1">
-            <a:schemeClr val="accent1"/>
-          </a:lnRef>
-          <a:fillRef idx="3">
-            <a:schemeClr val="accent1"/>
-          </a:fillRef>
-          <a:effectRef idx="2">
-            <a:schemeClr val="accent1"/>
-          </a:effectRef>
-          <a:fontRef idx="minor">
-            <a:schemeClr val="lt1"/>
-          </a:fontRef>
-        </p:style>
-        <p:txBody>
-          <a:bodyPr rtlCol="0" anchor="ctr" wrap="square" lIns="50800" rIns="50800" tIns="25400" bIns="25400"/>
-          <a:lstStyle/>
-          <a:p>
-            <a:pPr algn="ctr"/>
-            <a:r>
-              <a:rPr sz="1150" b="1">
-                <a:solidFill>
-                  <a:srgbClr val="1F2A44"/>
-                </a:solidFill>
-                <a:latin typeface="맑은 고딕"/>
-                <a:ea typeface="맑은 고딕"/>
-              </a:rPr>
-              <a:t>alerting</a:t>
-            </a:r>
-          </a:p>
-          <a:p>
-            <a:pPr algn="ctr"/>
-            <a:r>
-              <a:rPr sz="900" b="0">
-                <a:solidFill>
-                  <a:srgbClr val="5B667A"/>
-                </a:solidFill>
-                <a:latin typeface="맑은 고딕"/>
-                <a:ea typeface="맑은 고딕"/>
-              </a:rPr>
-              <a:t>Webhook · Slack</a:t>
-            </a:r>
-          </a:p>
-        </p:txBody>
-      </p:sp>
-      <p:sp>
-        <p:nvSpPr>
-          <p:cNvPr id="15" name="Rounded Rectangle 14"/>
-          <p:cNvSpPr/>
-          <p:nvPr/>
-        </p:nvSpPr>
-        <p:spPr>
-          <a:xfrm>
-            <a:off x="8229600" y="2560320"/>
-            <a:ext cx="1737360" cy="777240"/>
-          </a:xfrm>
-          <a:prstGeom prst="roundRect">
-            <a:avLst>
-              <a:gd name="adj" fmla="val 8000"/>
-            </a:avLst>
-          </a:prstGeom>
-          <a:solidFill>
-            <a:srgbClr val="FFFFFF"/>
-          </a:solidFill>
-          <a:ln w="15875">
-            <a:solidFill>
-              <a:srgbClr val="2563EB"/>
-            </a:solidFill>
-          </a:ln>
-          <a:effectLst/>
-        </p:spPr>
-        <p:style>
-          <a:lnRef idx="1">
-            <a:schemeClr val="accent1"/>
-          </a:lnRef>
-          <a:fillRef idx="3">
-            <a:schemeClr val="accent1"/>
-          </a:fillRef>
-          <a:effectRef idx="2">
-            <a:schemeClr val="accent1"/>
-          </a:effectRef>
-          <a:fontRef idx="minor">
-            <a:schemeClr val="lt1"/>
-          </a:fontRef>
-        </p:style>
-        <p:txBody>
-          <a:bodyPr rtlCol="0" anchor="ctr" wrap="square" lIns="50800" rIns="50800" tIns="25400" bIns="25400"/>
-          <a:lstStyle/>
-          <a:p>
-            <a:pPr algn="ctr"/>
-            <a:r>
-              <a:rPr sz="1150" b="1">
-                <a:solidFill>
-                  <a:srgbClr val="1F2A44"/>
-                </a:solidFill>
-                <a:latin typeface="맑은 고딕"/>
-                <a:ea typeface="맑은 고딕"/>
-              </a:rPr>
-              <a:t>OpenSearch</a:t>
-            </a:r>
-          </a:p>
-        </p:txBody>
-      </p:sp>
-      <p:sp>
-        <p:nvSpPr>
-          <p:cNvPr id="16" name="Rounded Rectangle 15"/>
-          <p:cNvSpPr/>
-          <p:nvPr/>
-        </p:nvSpPr>
-        <p:spPr>
-          <a:xfrm>
-            <a:off x="8229600" y="4069080"/>
-            <a:ext cx="3383280" cy="822960"/>
-          </a:xfrm>
-          <a:prstGeom prst="roundRect">
-            <a:avLst>
-              <a:gd name="adj" fmla="val 8000"/>
-            </a:avLst>
-          </a:prstGeom>
-          <a:solidFill>
-            <a:srgbClr val="FDF6E7"/>
-          </a:solidFill>
-          <a:ln w="15875">
-            <a:solidFill>
-              <a:srgbClr val="B45309"/>
-            </a:solidFill>
-          </a:ln>
-          <a:effectLst/>
-        </p:spPr>
-        <p:style>
-          <a:lnRef idx="1">
-            <a:schemeClr val="accent1"/>
-          </a:lnRef>
-          <a:fillRef idx="3">
-            <a:schemeClr val="accent1"/>
-          </a:fillRef>
-          <a:effectRef idx="2">
-            <a:schemeClr val="accent1"/>
-          </a:effectRef>
-          <a:fontRef idx="minor">
-            <a:schemeClr val="lt1"/>
-          </a:fontRef>
-        </p:style>
-        <p:txBody>
-          <a:bodyPr rtlCol="0" anchor="ctr" wrap="square" lIns="50800" rIns="50800" tIns="25400" bIns="25400"/>
-          <a:lstStyle/>
-          <a:p>
-            <a:pPr algn="ctr"/>
-            <a:r>
-              <a:rPr sz="1150" b="1">
-                <a:solidFill>
-                  <a:srgbClr val="1F2A44"/>
-                </a:solidFill>
-                <a:latin typeface="맑은 고딕"/>
-                <a:ea typeface="맑은 고딕"/>
-              </a:rPr>
-              <a:t>workflow-engine  =  SOAR</a:t>
-            </a:r>
-          </a:p>
-          <a:p>
-            <a:pPr algn="ctr"/>
-            <a:r>
-              <a:rPr sz="900" b="0">
-                <a:solidFill>
-                  <a:srgbClr val="5B667A"/>
-                </a:solidFill>
-                <a:latin typeface="맑은 고딕"/>
-                <a:ea typeface="맑은 고딕"/>
-              </a:rPr>
-              <a:t>Playbook · webhook · block_ip · enrich</a:t>
-            </a:r>
-          </a:p>
-        </p:txBody>
-      </p:sp>
-      <p:sp>
-        <p:nvSpPr>
-          <p:cNvPr id="17" name="Rounded Rectangle 16"/>
-          <p:cNvSpPr/>
-          <p:nvPr/>
-        </p:nvSpPr>
-        <p:spPr>
-          <a:xfrm>
-            <a:off x="10241280" y="1554480"/>
-            <a:ext cx="1371600" cy="777240"/>
-          </a:xfrm>
-          <a:prstGeom prst="roundRect">
-            <a:avLst>
-              <a:gd name="adj" fmla="val 8000"/>
-            </a:avLst>
-          </a:prstGeom>
-          <a:solidFill>
-            <a:srgbClr val="FFFFFF"/>
-          </a:solidFill>
-          <a:ln w="15875">
-            <a:solidFill>
-              <a:srgbClr val="2563EB"/>
-            </a:solidFill>
-          </a:ln>
-          <a:effectLst/>
-        </p:spPr>
-        <p:style>
-          <a:lnRef idx="1">
-            <a:schemeClr val="accent1"/>
-          </a:lnRef>
-          <a:fillRef idx="3">
-            <a:schemeClr val="accent1"/>
-          </a:fillRef>
-          <a:effectRef idx="2">
-            <a:schemeClr val="accent1"/>
-          </a:effectRef>
-          <a:fontRef idx="minor">
-            <a:schemeClr val="lt1"/>
-          </a:fontRef>
-        </p:style>
-        <p:txBody>
-          <a:bodyPr rtlCol="0" anchor="ctr" wrap="square" lIns="50800" rIns="50800" tIns="25400" bIns="25400"/>
-          <a:lstStyle/>
-          <a:p>
-            <a:pPr algn="ctr"/>
-            <a:r>
-              <a:rPr sz="1150" b="1">
-                <a:solidFill>
-                  <a:srgbClr val="1F2A44"/>
-                </a:solidFill>
-                <a:latin typeface="맑은 고딕"/>
-                <a:ea typeface="맑은 고딕"/>
-              </a:rPr>
-              <a:t>config-identity</a:t>
-            </a:r>
-          </a:p>
-          <a:p>
-            <a:pPr algn="ctr"/>
-            <a:r>
-              <a:rPr sz="900" b="0">
-                <a:solidFill>
-                  <a:srgbClr val="5B667A"/>
-                </a:solidFill>
-                <a:latin typeface="맑은 고딕"/>
-                <a:ea typeface="맑은 고딕"/>
-              </a:rPr>
-              <a:t>JWT·LDAP·TOTP</a:t>
-            </a:r>
-          </a:p>
-        </p:txBody>
-      </p:sp>
-      <p:sp>
-        <p:nvSpPr>
-          <p:cNvPr id="18" name="Rounded Rectangle 17"/>
-          <p:cNvSpPr/>
-          <p:nvPr/>
-        </p:nvSpPr>
-        <p:spPr>
-          <a:xfrm>
-            <a:off x="8229600" y="1554480"/>
-            <a:ext cx="1737360" cy="777240"/>
-          </a:xfrm>
-          <a:prstGeom prst="roundRect">
-            <a:avLst>
-              <a:gd name="adj" fmla="val 8000"/>
-            </a:avLst>
-          </a:prstGeom>
-          <a:solidFill>
-            <a:srgbClr val="F1F5F9"/>
+            <a:srgbClr val="EEF7F6"/>
           </a:solidFill>
           <a:ln w="15875">
             <a:solidFill>
@@ -22168,448 +22487,42 @@
           <a:p>
             <a:pPr algn="ctr"/>
             <a:r>
-              <a:rPr sz="1150" b="1">
-                <a:solidFill>
-                  <a:srgbClr val="1F2A44"/>
-                </a:solidFill>
-                <a:latin typeface="맑은 고딕"/>
-                <a:ea typeface="맑은 고딕"/>
-              </a:rPr>
-              <a:t>web-console</a:t>
-            </a:r>
-          </a:p>
-          <a:p>
-            <a:pPr algn="ctr"/>
-            <a:r>
-              <a:rPr sz="900" b="0">
+              <a:rPr sz="1200" b="1">
+                <a:solidFill>
+                  <a:srgbClr val="1F2A44"/>
+                </a:solidFill>
+                <a:latin typeface="Pretendard"/>
+                <a:ea typeface="Pretendard"/>
+              </a:rPr>
+              <a:t>방어 산출물로의 전환 — 같은 벡터가 공격에도 방어에도 쓰인다</a:t>
+            </a:r>
+          </a:p>
+          <a:p>
+            <a:pPr algn="ctr"/>
+            <a:r>
+              <a:rPr sz="1050" b="0">
                 <a:solidFill>
                   <a:srgbClr val="5B667A"/>
                 </a:solidFill>
-                <a:latin typeface="맑은 고딕"/>
-                <a:ea typeface="맑은 고딕"/>
-              </a:rPr>
-              <a:t>SOC 대시보드</a:t>
-            </a:r>
-          </a:p>
-        </p:txBody>
-      </p:sp>
-      <p:cxnSp>
-        <p:nvCxnSpPr>
-          <p:cNvPr id="19" name="Connector 18"/>
-          <p:cNvCxnSpPr/>
-          <p:nvPr/>
-        </p:nvCxnSpPr>
-        <p:spPr>
-          <a:xfrm>
-            <a:off x="2651760" y="1965960"/>
-            <a:ext cx="548640" cy="1600200"/>
-          </a:xfrm>
-          <a:prstGeom prst="line">
-            <a:avLst/>
-          </a:prstGeom>
-          <a:ln w="19050">
-            <a:solidFill>
-              <a:srgbClr val="5B667A"/>
-            </a:solidFill>
-            <a:tailEnd type="triangle" w="med" len="med"/>
-          </a:ln>
-          <a:effectLst/>
-        </p:spPr>
-        <p:style>
-          <a:lnRef idx="2">
-            <a:schemeClr val="accent1"/>
-          </a:lnRef>
-          <a:fillRef idx="0">
-            <a:schemeClr val="accent1"/>
-          </a:fillRef>
-          <a:effectRef idx="1">
-            <a:schemeClr val="accent1"/>
-          </a:effectRef>
-          <a:fontRef idx="minor">
-            <a:schemeClr val="tx1"/>
-          </a:fontRef>
-        </p:style>
-      </p:cxnSp>
-      <p:cxnSp>
-        <p:nvCxnSpPr>
-          <p:cNvPr id="20" name="Connector 19"/>
-          <p:cNvCxnSpPr/>
-          <p:nvPr/>
-        </p:nvCxnSpPr>
-        <p:spPr>
-          <a:xfrm>
-            <a:off x="2651760" y="3108960"/>
-            <a:ext cx="548640" cy="457200"/>
-          </a:xfrm>
-          <a:prstGeom prst="line">
-            <a:avLst/>
-          </a:prstGeom>
-          <a:ln w="19050">
-            <a:solidFill>
-              <a:srgbClr val="5B667A"/>
-            </a:solidFill>
-            <a:tailEnd type="triangle" w="med" len="med"/>
-          </a:ln>
-          <a:effectLst/>
-        </p:spPr>
-        <p:style>
-          <a:lnRef idx="2">
-            <a:schemeClr val="accent1"/>
-          </a:lnRef>
-          <a:fillRef idx="0">
-            <a:schemeClr val="accent1"/>
-          </a:fillRef>
-          <a:effectRef idx="1">
-            <a:schemeClr val="accent1"/>
-          </a:effectRef>
-          <a:fontRef idx="minor">
-            <a:schemeClr val="tx1"/>
-          </a:fontRef>
-        </p:style>
-      </p:cxnSp>
-      <p:cxnSp>
-        <p:nvCxnSpPr>
-          <p:cNvPr id="21" name="Connector 20"/>
-          <p:cNvCxnSpPr/>
-          <p:nvPr/>
-        </p:nvCxnSpPr>
-        <p:spPr>
-          <a:xfrm flipV="1">
-            <a:off x="2651760" y="3566160"/>
-            <a:ext cx="548640" cy="685800"/>
-          </a:xfrm>
-          <a:prstGeom prst="line">
-            <a:avLst/>
-          </a:prstGeom>
-          <a:ln w="19050">
-            <a:solidFill>
-              <a:srgbClr val="5B667A"/>
-            </a:solidFill>
-            <a:tailEnd type="triangle" w="med" len="med"/>
-          </a:ln>
-          <a:effectLst/>
-        </p:spPr>
-        <p:style>
-          <a:lnRef idx="2">
-            <a:schemeClr val="accent1"/>
-          </a:lnRef>
-          <a:fillRef idx="0">
-            <a:schemeClr val="accent1"/>
-          </a:fillRef>
-          <a:effectRef idx="1">
-            <a:schemeClr val="accent1"/>
-          </a:effectRef>
-          <a:fontRef idx="minor">
-            <a:schemeClr val="tx1"/>
-          </a:fontRef>
-        </p:style>
-      </p:cxnSp>
-      <p:cxnSp>
-        <p:nvCxnSpPr>
-          <p:cNvPr id="22" name="Connector 21"/>
-          <p:cNvCxnSpPr/>
-          <p:nvPr/>
-        </p:nvCxnSpPr>
-        <p:spPr>
-          <a:xfrm flipV="1">
-            <a:off x="4572000" y="1943100"/>
-            <a:ext cx="548640" cy="1623060"/>
-          </a:xfrm>
-          <a:prstGeom prst="line">
-            <a:avLst/>
-          </a:prstGeom>
-          <a:ln w="19050">
-            <a:solidFill>
-              <a:srgbClr val="5B667A"/>
-            </a:solidFill>
-            <a:tailEnd type="triangle" w="med" len="med"/>
-          </a:ln>
-          <a:effectLst/>
-        </p:spPr>
-        <p:style>
-          <a:lnRef idx="2">
-            <a:schemeClr val="accent1"/>
-          </a:lnRef>
-          <a:fillRef idx="0">
-            <a:schemeClr val="accent1"/>
-          </a:fillRef>
-          <a:effectRef idx="1">
-            <a:schemeClr val="accent1"/>
-          </a:effectRef>
-          <a:fontRef idx="minor">
-            <a:schemeClr val="tx1"/>
-          </a:fontRef>
-        </p:style>
-      </p:cxnSp>
-      <p:cxnSp>
-        <p:nvCxnSpPr>
-          <p:cNvPr id="23" name="Connector 22"/>
-          <p:cNvCxnSpPr/>
-          <p:nvPr/>
-        </p:nvCxnSpPr>
-        <p:spPr>
-          <a:xfrm flipV="1">
-            <a:off x="4572000" y="2948940"/>
-            <a:ext cx="548640" cy="617220"/>
-          </a:xfrm>
-          <a:prstGeom prst="line">
-            <a:avLst/>
-          </a:prstGeom>
-          <a:ln w="19050">
-            <a:solidFill>
-              <a:srgbClr val="5B667A"/>
-            </a:solidFill>
-            <a:tailEnd type="triangle" w="med" len="med"/>
-          </a:ln>
-          <a:effectLst/>
-        </p:spPr>
-        <p:style>
-          <a:lnRef idx="2">
-            <a:schemeClr val="accent1"/>
-          </a:lnRef>
-          <a:fillRef idx="0">
-            <a:schemeClr val="accent1"/>
-          </a:fillRef>
-          <a:effectRef idx="1">
-            <a:schemeClr val="accent1"/>
-          </a:effectRef>
-          <a:fontRef idx="minor">
-            <a:schemeClr val="tx1"/>
-          </a:fontRef>
-        </p:style>
-      </p:cxnSp>
-      <p:cxnSp>
-        <p:nvCxnSpPr>
-          <p:cNvPr id="24" name="Connector 23"/>
-          <p:cNvCxnSpPr/>
-          <p:nvPr/>
-        </p:nvCxnSpPr>
-        <p:spPr>
-          <a:xfrm>
-            <a:off x="4572000" y="3566160"/>
-            <a:ext cx="548640" cy="388620"/>
-          </a:xfrm>
-          <a:prstGeom prst="line">
-            <a:avLst/>
-          </a:prstGeom>
-          <a:ln w="19050">
-            <a:solidFill>
-              <a:srgbClr val="5B667A"/>
-            </a:solidFill>
-            <a:tailEnd type="triangle" w="med" len="med"/>
-          </a:ln>
-          <a:effectLst/>
-        </p:spPr>
-        <p:style>
-          <a:lnRef idx="2">
-            <a:schemeClr val="accent1"/>
-          </a:lnRef>
-          <a:fillRef idx="0">
-            <a:schemeClr val="accent1"/>
-          </a:fillRef>
-          <a:effectRef idx="1">
-            <a:schemeClr val="accent1"/>
-          </a:effectRef>
-          <a:fontRef idx="minor">
-            <a:schemeClr val="tx1"/>
-          </a:fontRef>
-        </p:style>
-      </p:cxnSp>
-      <p:cxnSp>
-        <p:nvCxnSpPr>
-          <p:cNvPr id="25" name="Connector 24"/>
-          <p:cNvCxnSpPr/>
-          <p:nvPr/>
-        </p:nvCxnSpPr>
-        <p:spPr>
-          <a:xfrm>
-            <a:off x="4572000" y="3566160"/>
-            <a:ext cx="548640" cy="1394460"/>
-          </a:xfrm>
-          <a:prstGeom prst="line">
-            <a:avLst/>
-          </a:prstGeom>
-          <a:ln w="19050">
-            <a:solidFill>
-              <a:srgbClr val="5B667A"/>
-            </a:solidFill>
-            <a:tailEnd type="triangle" w="med" len="med"/>
-          </a:ln>
-          <a:effectLst/>
-        </p:spPr>
-        <p:style>
-          <a:lnRef idx="2">
-            <a:schemeClr val="accent1"/>
-          </a:lnRef>
-          <a:fillRef idx="0">
-            <a:schemeClr val="accent1"/>
-          </a:fillRef>
-          <a:effectRef idx="1">
-            <a:schemeClr val="accent1"/>
-          </a:effectRef>
-          <a:fontRef idx="minor">
-            <a:schemeClr val="tx1"/>
-          </a:fontRef>
-        </p:style>
-      </p:cxnSp>
-      <p:cxnSp>
-        <p:nvCxnSpPr>
-          <p:cNvPr id="26" name="Connector 25"/>
-          <p:cNvCxnSpPr/>
-          <p:nvPr/>
-        </p:nvCxnSpPr>
-        <p:spPr>
-          <a:xfrm>
-            <a:off x="7589520" y="2948940"/>
-            <a:ext cx="640080" cy="0"/>
-          </a:xfrm>
-          <a:prstGeom prst="line">
-            <a:avLst/>
-          </a:prstGeom>
-          <a:ln w="19050">
-            <a:solidFill>
-              <a:srgbClr val="5B667A"/>
-            </a:solidFill>
-            <a:tailEnd type="triangle" w="med" len="med"/>
-          </a:ln>
-          <a:effectLst/>
-        </p:spPr>
-        <p:style>
-          <a:lnRef idx="2">
-            <a:schemeClr val="accent1"/>
-          </a:lnRef>
-          <a:fillRef idx="0">
-            <a:schemeClr val="accent1"/>
-          </a:fillRef>
-          <a:effectRef idx="1">
-            <a:schemeClr val="accent1"/>
-          </a:effectRef>
-          <a:fontRef idx="minor">
-            <a:schemeClr val="tx1"/>
-          </a:fontRef>
-        </p:style>
-      </p:cxnSp>
-      <p:cxnSp>
-        <p:nvCxnSpPr>
-          <p:cNvPr id="27" name="Connector 26"/>
-          <p:cNvCxnSpPr/>
-          <p:nvPr/>
-        </p:nvCxnSpPr>
-        <p:spPr>
-          <a:xfrm flipV="1">
-            <a:off x="7589520" y="4480560"/>
-            <a:ext cx="640080" cy="475488"/>
-          </a:xfrm>
-          <a:prstGeom prst="line">
-            <a:avLst/>
-          </a:prstGeom>
-          <a:ln w="19050">
-            <a:solidFill>
-              <a:srgbClr val="5B667A"/>
-            </a:solidFill>
-            <a:tailEnd type="triangle" w="med" len="med"/>
-          </a:ln>
-          <a:effectLst/>
-        </p:spPr>
-        <p:style>
-          <a:lnRef idx="2">
-            <a:schemeClr val="accent1"/>
-          </a:lnRef>
-          <a:fillRef idx="0">
-            <a:schemeClr val="accent1"/>
-          </a:fillRef>
-          <a:effectRef idx="1">
-            <a:schemeClr val="accent1"/>
-          </a:effectRef>
-          <a:fontRef idx="minor">
-            <a:schemeClr val="tx1"/>
-          </a:fontRef>
-        </p:style>
-      </p:cxnSp>
-      <p:cxnSp>
-        <p:nvCxnSpPr>
-          <p:cNvPr id="28" name="Connector 27"/>
-          <p:cNvCxnSpPr/>
-          <p:nvPr/>
-        </p:nvCxnSpPr>
-        <p:spPr>
-          <a:xfrm>
-            <a:off x="9966960" y="1943100"/>
-            <a:ext cx="274320" cy="0"/>
-          </a:xfrm>
-          <a:prstGeom prst="line">
-            <a:avLst/>
-          </a:prstGeom>
-          <a:ln w="19050">
-            <a:solidFill>
-              <a:srgbClr val="5B667A"/>
-            </a:solidFill>
-            <a:tailEnd type="triangle" w="med" len="med"/>
-          </a:ln>
-          <a:effectLst/>
-        </p:spPr>
-        <p:style>
-          <a:lnRef idx="2">
-            <a:schemeClr val="accent1"/>
-          </a:lnRef>
-          <a:fillRef idx="0">
-            <a:schemeClr val="accent1"/>
-          </a:fillRef>
-          <a:effectRef idx="1">
-            <a:schemeClr val="accent1"/>
-          </a:effectRef>
-          <a:fontRef idx="minor">
-            <a:schemeClr val="tx1"/>
-          </a:fontRef>
-        </p:style>
-      </p:cxnSp>
-      <p:cxnSp>
-        <p:nvCxnSpPr>
-          <p:cNvPr id="29" name="Connector 28"/>
-          <p:cNvCxnSpPr/>
-          <p:nvPr/>
-        </p:nvCxnSpPr>
-        <p:spPr>
-          <a:xfrm>
-            <a:off x="9098280" y="2331720"/>
-            <a:ext cx="0" cy="228600"/>
-          </a:xfrm>
-          <a:prstGeom prst="line">
-            <a:avLst/>
-          </a:prstGeom>
-          <a:ln w="19050">
-            <a:solidFill>
-              <a:srgbClr val="5B667A"/>
-            </a:solidFill>
-            <a:tailEnd type="triangle" w="med" len="med"/>
-          </a:ln>
-          <a:effectLst/>
-        </p:spPr>
-        <p:style>
-          <a:lnRef idx="2">
-            <a:schemeClr val="accent1"/>
-          </a:lnRef>
-          <a:fillRef idx="0">
-            <a:schemeClr val="accent1"/>
-          </a:fillRef>
-          <a:effectRef idx="1">
-            <a:schemeClr val="accent1"/>
-          </a:effectRef>
-          <a:fontRef idx="minor">
-            <a:schemeClr val="tx1"/>
-          </a:fontRef>
-        </p:style>
-      </p:cxnSp>
-      <p:sp>
-        <p:nvSpPr>
-          <p:cNvPr id="30" name="TextBox 29"/>
+                <a:latin typeface="Pretendard"/>
+                <a:ea typeface="Pretendard"/>
+              </a:rPr>
+              <a:t>제거 대상이던 거부 방향 r 을 추론 시 활성 모니터로 쓰면, 잔차 스트림을 r 에 투영한 값이 탈옥·우회 시도를 알아채는 실시간 탐지 신호가 된다.
+결론은 "정렬은 뚫린다"가 아니라 — rank-1 편집으로 지워지는 것을 보안 경계로 삼으면 안 되고, 통제는 지워질 수 없는 곳(API·검색 계층·출력 필터)에 두어야 한다.</a:t>
+            </a:r>
+          </a:p>
+        </p:txBody>
+      </p:sp>
+      <p:sp>
+        <p:nvSpPr>
+          <p:cNvPr id="43" name="TextBox 42"/>
           <p:cNvSpPr txBox="1"/>
           <p:nvPr/>
         </p:nvSpPr>
         <p:spPr>
           <a:xfrm>
-            <a:off x="640080" y="5120640"/>
-            <a:ext cx="3931920" cy="731520"/>
+            <a:off x="640080" y="5440680"/>
+            <a:ext cx="10972800" cy="320040"/>
           </a:xfrm>
           <a:prstGeom prst="rect">
             <a:avLst/>
@@ -22624,27 +22537,14 @@
           <a:p>
             <a:pPr algn="l"/>
             <a:r>
-              <a:rPr sz="1050" b="0">
+              <a:rPr sz="950" b="0">
                 <a:solidFill>
                   <a:srgbClr val="5B667A"/>
                 </a:solidFill>
-                <a:latin typeface="맑은 고딕"/>
-                <a:ea typeface="맑은 고딕"/>
-              </a:rPr>
-              <a:t>원본: Java/OSGi 128 번들 → 디컴파일 .java 22,844개 → 전수 매핑</a:t>
-            </a:r>
-          </a:p>
-          <a:p>
-            <a:pPr algn="l"/>
-            <a:r>
-              <a:rPr sz="1050" b="1">
-                <a:solidFill>
-                  <a:srgbClr val="1E40AF"/>
-                </a:solidFill>
-                <a:latin typeface="맑은 고딕"/>
-                <a:ea typeface="맑은 고딕"/>
-              </a:rPr>
-              <a:t>재설계 결과: Go 마이크로서비스 11개 · 번들 기능 103/128 구현</a:t>
+                <a:latin typeface="Pretendard"/>
+                <a:ea typeface="Pretendard"/>
+              </a:rPr>
+              <a:t>Arditi, A. et al. (2024). Refusal in Language Models Is Mediated by a Single Direction. arXiv:2406.11717</a:t>
             </a:r>
           </a:p>
         </p:txBody>
@@ -22783,8 +22683,8 @@
                 <a:solidFill>
                   <a:srgbClr val="2563EB"/>
                 </a:solidFill>
-                <a:latin typeface="맑은 고딕"/>
-                <a:ea typeface="맑은 고딕"/>
+                <a:latin typeface="Pretendard"/>
+                <a:ea typeface="Pretendard"/>
               </a:rPr>
               <a:t>PROJECT 03 · 개인 (adorahelen/edr-lab)</a:t>
             </a:r>
@@ -22819,8 +22719,8 @@
                 <a:solidFill>
                   <a:srgbClr val="1F2A44"/>
                 </a:solidFill>
-                <a:latin typeface="맑은 고딕"/>
-                <a:ea typeface="맑은 고딕"/>
+                <a:latin typeface="Pretendard"/>
+                <a:ea typeface="Pretendard"/>
               </a:rPr>
               <a:t>edr-lab — 커널 없이 어디까지 관측되는가</a:t>
             </a:r>
@@ -22855,8 +22755,8 @@
                 <a:solidFill>
                   <a:srgbClr val="5B667A"/>
                 </a:solidFill>
-                <a:latin typeface="맑은 고딕"/>
-                <a:ea typeface="맑은 고딕"/>
+                <a:latin typeface="Pretendard"/>
+                <a:ea typeface="Pretendard"/>
               </a:rPr>
               <a:t>7</a:t>
             </a:r>
@@ -22891,8 +22791,8 @@
                 <a:solidFill>
                   <a:srgbClr val="1E40AF"/>
                 </a:solidFill>
-                <a:latin typeface="맑은 고딕"/>
-                <a:ea typeface="맑은 고딕"/>
+                <a:latin typeface="Pretendard"/>
+                <a:ea typeface="Pretendard"/>
               </a:rPr>
               <a:t>상용 EDR이 커널 드라이버로 하는 일을 User-mode(Ring 3)에서 재현하고, 안 되는 것은 안 되는 이유까지 남긴다</a:t>
             </a:r>
@@ -22931,8 +22831,8 @@
                 <a:solidFill>
                   <a:srgbClr val="2563EB"/>
                 </a:solidFill>
-                <a:latin typeface="맑은 고딕"/>
-                <a:ea typeface="맑은 고딕"/>
+                <a:latin typeface="Pretendard"/>
+                <a:ea typeface="Pretendard"/>
               </a:rPr>
               <a:t>·  </a:t>
             </a:r>
@@ -22941,8 +22841,8 @@
                 <a:solidFill>
                   <a:srgbClr val="1F2A44"/>
                 </a:solidFill>
-                <a:latin typeface="맑은 고딕"/>
-                <a:ea typeface="맑은 고딕"/>
+                <a:latin typeface="Pretendard"/>
+                <a:ea typeface="Pretendard"/>
               </a:rPr>
               <a:t>센서를 C++ 2,840줄로 구현 — 프로세스(WMI Trace)·파일(ReadDirectoryChangesW)·네트워크(GetExtendedTcpTable)·레지스트리(RegNotifyChangeKeyValue) 관측</a:t>
             </a:r>
@@ -22958,8 +22858,8 @@
                 <a:solidFill>
                   <a:srgbClr val="2563EB"/>
                 </a:solidFill>
-                <a:latin typeface="맑은 고딕"/>
-                <a:ea typeface="맑은 고딕"/>
+                <a:latin typeface="Pretendard"/>
+                <a:ea typeface="Pretendard"/>
               </a:rPr>
               <a:t>·  </a:t>
             </a:r>
@@ -22968,8 +22868,8 @@
                 <a:solidFill>
                   <a:srgbClr val="1F2A44"/>
                 </a:solidFill>
-                <a:latin typeface="맑은 고딕"/>
-                <a:ea typeface="맑은 고딕"/>
+                <a:latin typeface="Pretendard"/>
+                <a:ea typeface="Pretendard"/>
               </a:rPr>
               <a:t>커널 콜백마다 Ring 3 우회로를 대응시키고 그 대가를 표로 명시 — 파일 변경은 유발 PID를 알 수 없고, 네트워크는 3초 폴링 사이 단명 연결을 놓친다</a:t>
             </a:r>
@@ -22985,8 +22885,8 @@
                 <a:solidFill>
                   <a:srgbClr val="2563EB"/>
                 </a:solidFill>
-                <a:latin typeface="맑은 고딕"/>
-                <a:ea typeface="맑은 고딕"/>
+                <a:latin typeface="Pretendard"/>
+                <a:ea typeface="Pretendard"/>
               </a:rPr>
               <a:t>·  </a:t>
             </a:r>
@@ -22995,8 +22895,8 @@
                 <a:solidFill>
                   <a:srgbClr val="1F2A44"/>
                 </a:solidFill>
-                <a:latin typeface="맑은 고딕"/>
-                <a:ea typeface="맑은 고딕"/>
+                <a:latin typeface="Pretendard"/>
+                <a:ea typeface="Pretendard"/>
               </a:rPr>
               <a:t>규칙 엔진(*.rule) 14종 + 부모-자식 프로세스 상관까지 동작 → DETECTION 알림. 다중 이벤트 시간 윈도우 상관은 미구현으로 명시</a:t>
             </a:r>
@@ -23012,8 +22912,8 @@
                 <a:solidFill>
                   <a:srgbClr val="2563EB"/>
                 </a:solidFill>
-                <a:latin typeface="맑은 고딕"/>
-                <a:ea typeface="맑은 고딕"/>
+                <a:latin typeface="Pretendard"/>
+                <a:ea typeface="Pretendard"/>
               </a:rPr>
               <a:t>·  </a:t>
             </a:r>
@@ -23022,8 +22922,8 @@
                 <a:solidFill>
                   <a:srgbClr val="1F2A44"/>
                 </a:solidFill>
-                <a:latin typeface="맑은 고딕"/>
-                <a:ea typeface="맑은 고딕"/>
+                <a:latin typeface="Pretendard"/>
+                <a:ea typeface="Pretendard"/>
               </a:rPr>
               <a:t>포렌식 수집 모드 별도 — $MFT · 레지스트리 하이브 · .evtx · Prefetch를 매니페스트와 해시로 수집</a:t>
             </a:r>
@@ -23039,8 +22939,8 @@
                 <a:solidFill>
                   <a:srgbClr val="2563EB"/>
                 </a:solidFill>
-                <a:latin typeface="맑은 고딕"/>
-                <a:ea typeface="맑은 고딕"/>
+                <a:latin typeface="Pretendard"/>
+                <a:ea typeface="Pretendard"/>
               </a:rPr>
               <a:t>·  </a:t>
             </a:r>
@@ -23049,8 +22949,8 @@
                 <a:solidFill>
                   <a:srgbClr val="1F2A44"/>
                 </a:solidFill>
-                <a:latin typeface="맑은 고딕"/>
-                <a:ea typeface="맑은 고딕"/>
+                <a:latin typeface="Pretendard"/>
+                <a:ea typeface="Pretendard"/>
               </a:rPr>
               <a:t>Sysmon 14개 이벤트 기준으로 커버리지를 자체 채점 — 6종 미커버(DLL 로드·인젝션·lsass 접근·DNS·드라이버·WMI 구독)를 사각으로 공개</a:t>
             </a:r>
@@ -23131,8 +23031,8 @@
                 <a:solidFill>
                   <a:srgbClr val="1E40AF"/>
                 </a:solidFill>
-                <a:latin typeface="맑은 고딕"/>
-                <a:ea typeface="맑은 고딕"/>
+                <a:latin typeface="Pretendard"/>
+                <a:ea typeface="Pretendard"/>
               </a:rPr>
               <a:t>핵심 성과 · 실측</a:t>
             </a:r>
@@ -23171,8 +23071,8 @@
                 <a:solidFill>
                   <a:srgbClr val="2563EB"/>
                 </a:solidFill>
-                <a:latin typeface="맑은 고딕"/>
-                <a:ea typeface="맑은 고딕"/>
+                <a:latin typeface="Pretendard"/>
+                <a:ea typeface="Pretendard"/>
               </a:rPr>
               <a:t>·  </a:t>
             </a:r>
@@ -23181,8 +23081,8 @@
                 <a:solidFill>
                   <a:srgbClr val="1F2A44"/>
                 </a:solidFill>
-                <a:latin typeface="맑은 고딕"/>
-                <a:ea typeface="맑은 고딕"/>
+                <a:latin typeface="Pretendard"/>
+                <a:ea typeface="Pretendard"/>
               </a:rPr>
               <a:t>이벤트 → SQLite(WAL) 적재 → Electron 콘솔이 1초 증분 폴링, Windows 실기기 종단 확인</a:t>
             </a:r>
@@ -23198,8 +23098,8 @@
                 <a:solidFill>
                   <a:srgbClr val="2563EB"/>
                 </a:solidFill>
-                <a:latin typeface="맑은 고딕"/>
-                <a:ea typeface="맑은 고딕"/>
+                <a:latin typeface="Pretendard"/>
+                <a:ea typeface="Pretendard"/>
               </a:rPr>
               <a:t>·  </a:t>
             </a:r>
@@ -23208,8 +23108,8 @@
                 <a:solidFill>
                   <a:srgbClr val="1F2A44"/>
                 </a:solidFill>
-                <a:latin typeface="맑은 고딕"/>
-                <a:ea typeface="맑은 고딕"/>
+                <a:latin typeface="Pretendard"/>
+                <a:ea typeface="Pretendard"/>
               </a:rPr>
               <a:t>런타임 의존성 없는 정적 링크 · MSVC / MinGW-w64 양쪽 툴체인 빌드 검증</a:t>
             </a:r>
@@ -23225,8 +23125,8 @@
                 <a:solidFill>
                   <a:srgbClr val="2563EB"/>
                 </a:solidFill>
-                <a:latin typeface="맑은 고딕"/>
-                <a:ea typeface="맑은 고딕"/>
+                <a:latin typeface="Pretendard"/>
+                <a:ea typeface="Pretendard"/>
               </a:rPr>
               <a:t>·  </a:t>
             </a:r>
@@ -23235,8 +23135,8 @@
                 <a:solidFill>
                   <a:srgbClr val="1F2A44"/>
                 </a:solidFill>
-                <a:latin typeface="맑은 고딕"/>
-                <a:ea typeface="맑은 고딕"/>
+                <a:latin typeface="Pretendard"/>
+                <a:ea typeface="Pretendard"/>
               </a:rPr>
               <a:t>저장소 C/C++ 총량은 298,925줄이지만 본인 코드는 2,840줄 — 나머지는 벤더(SQLite·httplib) 정적 동봉. 면접에서 절대 부풀리지 않는다</a:t>
             </a:r>
@@ -23252,8 +23152,8 @@
                 <a:solidFill>
                   <a:srgbClr val="2563EB"/>
                 </a:solidFill>
-                <a:latin typeface="맑은 고딕"/>
-                <a:ea typeface="맑은 고딕"/>
+                <a:latin typeface="Pretendard"/>
+                <a:ea typeface="Pretendard"/>
               </a:rPr>
               <a:t>·  </a:t>
             </a:r>
@@ -23262,8 +23162,8 @@
                 <a:solidFill>
                   <a:srgbClr val="1F2A44"/>
                 </a:solidFill>
-                <a:latin typeface="맑은 고딕"/>
-                <a:ea typeface="맑은 고딕"/>
+                <a:latin typeface="Pretendard"/>
+                <a:ea typeface="Pretendard"/>
               </a:rPr>
               <a:t>두 저장소(센서·콘솔)를 커밋 히스토리 보존한 채 통합 — "센서는 있는데 볼 방법이 없던 상태"를 잇는 것이 목적</a:t>
             </a:r>
@@ -23279,8 +23179,8 @@
                 <a:solidFill>
                   <a:srgbClr val="2563EB"/>
                 </a:solidFill>
-                <a:latin typeface="맑은 고딕"/>
-                <a:ea typeface="맑은 고딕"/>
+                <a:latin typeface="Pretendard"/>
+                <a:ea typeface="Pretendard"/>
               </a:rPr>
               <a:t>·  </a:t>
             </a:r>
@@ -23289,8 +23189,8 @@
                 <a:solidFill>
                   <a:srgbClr val="1F2A44"/>
                 </a:solidFill>
-                <a:latin typeface="맑은 고딕"/>
-                <a:ea typeface="맑은 고딕"/>
+                <a:latin typeface="Pretendard"/>
+                <a:ea typeface="Pretendard"/>
               </a:rPr>
               <a:t>이름이 실물을 앞서지 않도록 README에 "아직 EDR이 아니다"를 E·D·R 글자별로 자기 채점</a:t>
             </a:r>
@@ -23325,8 +23225,8 @@
                 <a:solidFill>
                   <a:srgbClr val="5B667A"/>
                 </a:solidFill>
-                <a:latin typeface="맑은 고딕"/>
-                <a:ea typeface="맑은 고딕"/>
+                <a:latin typeface="Pretendard"/>
+                <a:ea typeface="Pretendard"/>
               </a:rPr>
               <a:t>STACK</a:t>
             </a:r>
@@ -23381,8 +23281,8 @@
                 <a:solidFill>
                   <a:srgbClr val="1F2A44"/>
                 </a:solidFill>
-                <a:latin typeface="맑은 고딕"/>
-                <a:ea typeface="맑은 고딕"/>
+                <a:latin typeface="Pretendard"/>
+                <a:ea typeface="Pretendard"/>
               </a:rPr>
               <a:t>C++17</a:t>
             </a:r>
@@ -23437,8 +23337,8 @@
                 <a:solidFill>
                   <a:srgbClr val="1F2A44"/>
                 </a:solidFill>
-                <a:latin typeface="맑은 고딕"/>
-                <a:ea typeface="맑은 고딕"/>
+                <a:latin typeface="Pretendard"/>
+                <a:ea typeface="Pretendard"/>
               </a:rPr>
               <a:t>Win32 API</a:t>
             </a:r>
@@ -23493,8 +23393,8 @@
                 <a:solidFill>
                   <a:srgbClr val="1F2A44"/>
                 </a:solidFill>
-                <a:latin typeface="맑은 고딕"/>
-                <a:ea typeface="맑은 고딕"/>
+                <a:latin typeface="Pretendard"/>
+                <a:ea typeface="Pretendard"/>
               </a:rPr>
               <a:t>WMI</a:t>
             </a:r>
@@ -23549,8 +23449,8 @@
                 <a:solidFill>
                   <a:srgbClr val="1F2A44"/>
                 </a:solidFill>
-                <a:latin typeface="맑은 고딕"/>
-                <a:ea typeface="맑은 고딕"/>
+                <a:latin typeface="Pretendard"/>
+                <a:ea typeface="Pretendard"/>
               </a:rPr>
               <a:t>SQLite (WAL)</a:t>
             </a:r>
@@ -23605,8 +23505,8 @@
                 <a:solidFill>
                   <a:srgbClr val="1F2A44"/>
                 </a:solidFill>
-                <a:latin typeface="맑은 고딕"/>
-                <a:ea typeface="맑은 고딕"/>
+                <a:latin typeface="Pretendard"/>
+                <a:ea typeface="Pretendard"/>
               </a:rPr>
               <a:t>Electron 39</a:t>
             </a:r>
@@ -23661,8 +23561,8 @@
                 <a:solidFill>
                   <a:srgbClr val="1F2A44"/>
                 </a:solidFill>
-                <a:latin typeface="맑은 고딕"/>
-                <a:ea typeface="맑은 고딕"/>
+                <a:latin typeface="Pretendard"/>
+                <a:ea typeface="Pretendard"/>
               </a:rPr>
               <a:t>TypeScript 5.9</a:t>
             </a:r>
@@ -23717,8 +23617,8 @@
                 <a:solidFill>
                   <a:srgbClr val="1F2A44"/>
                 </a:solidFill>
-                <a:latin typeface="맑은 고딕"/>
-                <a:ea typeface="맑은 고딕"/>
+                <a:latin typeface="Pretendard"/>
+                <a:ea typeface="Pretendard"/>
               </a:rPr>
               <a:t>CMake</a:t>
             </a:r>
@@ -23773,8 +23673,8 @@
                 <a:solidFill>
                   <a:srgbClr val="1F2A44"/>
                 </a:solidFill>
-                <a:latin typeface="맑은 고딕"/>
-                <a:ea typeface="맑은 고딕"/>
+                <a:latin typeface="Pretendard"/>
+                <a:ea typeface="Pretendard"/>
               </a:rPr>
               <a:t>MSVC · MinGW-w64</a:t>
             </a:r>
@@ -23915,8 +23815,8 @@
                 <a:solidFill>
                   <a:srgbClr val="2563EB"/>
                 </a:solidFill>
-                <a:latin typeface="맑은 고딕"/>
-                <a:ea typeface="맑은 고딕"/>
+                <a:latin typeface="Pretendard"/>
+                <a:ea typeface="Pretendard"/>
               </a:rPr>
               <a:t>PROJECT 03 · 개인 (adorahelen/edr-lab)</a:t>
             </a:r>
@@ -23951,8 +23851,8 @@
                 <a:solidFill>
                   <a:srgbClr val="1F2A44"/>
                 </a:solidFill>
-                <a:latin typeface="맑은 고딕"/>
-                <a:ea typeface="맑은 고딕"/>
+                <a:latin typeface="Pretendard"/>
+                <a:ea typeface="Pretendard"/>
               </a:rPr>
               <a:t>edr-lab — 아키텍처</a:t>
             </a:r>
@@ -23987,8 +23887,8 @@
                 <a:solidFill>
                   <a:srgbClr val="5B667A"/>
                 </a:solidFill>
-                <a:latin typeface="맑은 고딕"/>
-                <a:ea typeface="맑은 고딕"/>
+                <a:latin typeface="Pretendard"/>
+                <a:ea typeface="Pretendard"/>
               </a:rPr>
               <a:t>8</a:t>
             </a:r>
@@ -24071,8 +23971,8 @@
                 <a:solidFill>
                   <a:srgbClr val="B91C1C"/>
                 </a:solidFill>
-                <a:latin typeface="맑은 고딕"/>
-                <a:ea typeface="맑은 고딕"/>
+                <a:latin typeface="Pretendard"/>
+                <a:ea typeface="Pretendard"/>
               </a:rPr>
               <a:t>Ring 0 — 일부러 넘지 않은 선 (드라이버 서명·커널 디버깅의 세계)</a:t>
             </a:r>
@@ -24129,8 +24029,8 @@
                 <a:solidFill>
                   <a:srgbClr val="1F2A44"/>
                 </a:solidFill>
-                <a:latin typeface="맑은 고딕"/>
-                <a:ea typeface="맑은 고딕"/>
+                <a:latin typeface="Pretendard"/>
+                <a:ea typeface="Pretendard"/>
               </a:rPr>
               <a:t>MiniFilter</a:t>
             </a:r>
@@ -24142,8 +24042,8 @@
                 <a:solidFill>
                   <a:srgbClr val="5B667A"/>
                 </a:solidFill>
-                <a:latin typeface="맑은 고딕"/>
-                <a:ea typeface="맑은 고딕"/>
+                <a:latin typeface="Pretendard"/>
+                <a:ea typeface="Pretendard"/>
               </a:rPr>
               <a:t>파일 I/O</a:t>
             </a:r>
@@ -24200,8 +24100,8 @@
                 <a:solidFill>
                   <a:srgbClr val="1F2A44"/>
                 </a:solidFill>
-                <a:latin typeface="맑은 고딕"/>
-                <a:ea typeface="맑은 고딕"/>
+                <a:latin typeface="Pretendard"/>
+                <a:ea typeface="Pretendard"/>
               </a:rPr>
               <a:t>PsNotify</a:t>
             </a:r>
@@ -24213,8 +24113,8 @@
                 <a:solidFill>
                   <a:srgbClr val="5B667A"/>
                 </a:solidFill>
-                <a:latin typeface="맑은 고딕"/>
-                <a:ea typeface="맑은 고딕"/>
+                <a:latin typeface="Pretendard"/>
+                <a:ea typeface="Pretendard"/>
               </a:rPr>
               <a:t>프로세스 콜백</a:t>
             </a:r>
@@ -24271,8 +24171,8 @@
                 <a:solidFill>
                   <a:srgbClr val="1F2A44"/>
                 </a:solidFill>
-                <a:latin typeface="맑은 고딕"/>
-                <a:ea typeface="맑은 고딕"/>
+                <a:latin typeface="Pretendard"/>
+                <a:ea typeface="Pretendard"/>
               </a:rPr>
               <a:t>WFP / NDIS</a:t>
             </a:r>
@@ -24284,8 +24184,8 @@
                 <a:solidFill>
                   <a:srgbClr val="5B667A"/>
                 </a:solidFill>
-                <a:latin typeface="맑은 고딕"/>
-                <a:ea typeface="맑은 고딕"/>
+                <a:latin typeface="Pretendard"/>
+                <a:ea typeface="Pretendard"/>
               </a:rPr>
               <a:t>패킷 계층</a:t>
             </a:r>
@@ -24342,8 +24242,8 @@
                 <a:solidFill>
                   <a:srgbClr val="1F2A44"/>
                 </a:solidFill>
-                <a:latin typeface="맑은 고딕"/>
-                <a:ea typeface="맑은 고딕"/>
+                <a:latin typeface="Pretendard"/>
+                <a:ea typeface="Pretendard"/>
               </a:rPr>
               <a:t>ReadDirectory
 ChangesW</a:t>
@@ -24356,8 +24256,8 @@
                 <a:solidFill>
                   <a:srgbClr val="5B667A"/>
                 </a:solidFill>
-                <a:latin typeface="맑은 고딕"/>
-                <a:ea typeface="맑은 고딕"/>
+                <a:latin typeface="Pretendard"/>
+                <a:ea typeface="Pretendard"/>
               </a:rPr>
               <a:t>유발 PID 없음</a:t>
             </a:r>
@@ -24414,8 +24314,8 @@
                 <a:solidFill>
                   <a:srgbClr val="1F2A44"/>
                 </a:solidFill>
-                <a:latin typeface="맑은 고딕"/>
-                <a:ea typeface="맑은 고딕"/>
+                <a:latin typeface="Pretendard"/>
+                <a:ea typeface="Pretendard"/>
               </a:rPr>
               <a:t>WMI Trace</a:t>
             </a:r>
@@ -24427,8 +24327,8 @@
                 <a:solidFill>
                   <a:srgbClr val="5B667A"/>
                 </a:solidFill>
-                <a:latin typeface="맑은 고딕"/>
-                <a:ea typeface="맑은 고딕"/>
+                <a:latin typeface="Pretendard"/>
+                <a:ea typeface="Pretendard"/>
               </a:rPr>
               <a:t>지연 · 차단 불가</a:t>
             </a:r>
@@ -24485,8 +24385,8 @@
                 <a:solidFill>
                   <a:srgbClr val="1F2A44"/>
                 </a:solidFill>
-                <a:latin typeface="맑은 고딕"/>
-                <a:ea typeface="맑은 고딕"/>
+                <a:latin typeface="Pretendard"/>
+                <a:ea typeface="Pretendard"/>
               </a:rPr>
               <a:t>GetExtended
 TcpTable</a:t>
@@ -24499,8 +24399,8 @@
                 <a:solidFill>
                   <a:srgbClr val="5B667A"/>
                 </a:solidFill>
-                <a:latin typeface="맑은 고딕"/>
-                <a:ea typeface="맑은 고딕"/>
+                <a:latin typeface="Pretendard"/>
+                <a:ea typeface="Pretendard"/>
               </a:rPr>
               <a:t>3초 폴링</a:t>
             </a:r>
@@ -24649,8 +24549,8 @@
                 <a:solidFill>
                   <a:srgbClr val="0E7C7B"/>
                 </a:solidFill>
-                <a:latin typeface="맑은 고딕"/>
-                <a:ea typeface="맑은 고딕"/>
+                <a:latin typeface="Pretendard"/>
+                <a:ea typeface="Pretendard"/>
               </a:rPr>
               <a:t>Ring 3 — 이 프로젝트가 쓰는 우회로 (각각 값을 치른다)</a:t>
             </a:r>
@@ -24707,8 +24607,8 @@
                 <a:solidFill>
                   <a:srgbClr val="1F2A44"/>
                 </a:solidFill>
-                <a:latin typeface="맑은 고딕"/>
-                <a:ea typeface="맑은 고딕"/>
+                <a:latin typeface="Pretendard"/>
+                <a:ea typeface="Pretendard"/>
               </a:rPr>
               <a:t>SQLite (WAL)</a:t>
             </a:r>
@@ -24720,8 +24620,8 @@
                 <a:solidFill>
                   <a:srgbClr val="5B667A"/>
                 </a:solidFill>
-                <a:latin typeface="맑은 고딕"/>
-                <a:ea typeface="맑은 고딕"/>
+                <a:latin typeface="Pretendard"/>
+                <a:ea typeface="Pretendard"/>
               </a:rPr>
               <a:t>이벤트 적재</a:t>
             </a:r>
@@ -24778,8 +24678,8 @@
                 <a:solidFill>
                   <a:srgbClr val="1F2A44"/>
                 </a:solidFill>
-                <a:latin typeface="맑은 고딕"/>
-                <a:ea typeface="맑은 고딕"/>
+                <a:latin typeface="Pretendard"/>
+                <a:ea typeface="Pretendard"/>
               </a:rPr>
               <a:t>규칙 엔진</a:t>
             </a:r>
@@ -24791,8 +24691,8 @@
                 <a:solidFill>
                   <a:srgbClr val="5B667A"/>
                 </a:solidFill>
-                <a:latin typeface="맑은 고딕"/>
-                <a:ea typeface="맑은 고딕"/>
+                <a:latin typeface="Pretendard"/>
+                <a:ea typeface="Pretendard"/>
               </a:rPr>
               <a:t>*.rule 14종 · 부모-자식 상관</a:t>
             </a:r>
@@ -24849,8 +24749,8 @@
                 <a:solidFill>
                   <a:srgbClr val="1F2A44"/>
                 </a:solidFill>
-                <a:latin typeface="맑은 고딕"/>
-                <a:ea typeface="맑은 고딕"/>
+                <a:latin typeface="Pretendard"/>
+                <a:ea typeface="Pretendard"/>
               </a:rPr>
               <a:t>로컬 REST API</a:t>
             </a:r>
@@ -24862,8 +24762,8 @@
                 <a:solidFill>
                   <a:srgbClr val="5B667A"/>
                 </a:solidFill>
-                <a:latin typeface="맑은 고딕"/>
-                <a:ea typeface="맑은 고딕"/>
+                <a:latin typeface="Pretendard"/>
+                <a:ea typeface="Pretendard"/>
               </a:rPr>
               <a:t>1초 증분 조회</a:t>
             </a:r>
@@ -24920,8 +24820,8 @@
                 <a:solidFill>
                   <a:srgbClr val="1F2A44"/>
                 </a:solidFill>
-                <a:latin typeface="맑은 고딕"/>
-                <a:ea typeface="맑은 고딕"/>
+                <a:latin typeface="Pretendard"/>
+                <a:ea typeface="Pretendard"/>
               </a:rPr>
               <a:t>Electron 콘솔</a:t>
             </a:r>
@@ -24933,8 +24833,8 @@
                 <a:solidFill>
                   <a:srgbClr val="5B667A"/>
                 </a:solidFill>
-                <a:latin typeface="맑은 고딕"/>
-                <a:ea typeface="맑은 고딕"/>
+                <a:latin typeface="Pretendard"/>
+                <a:ea typeface="Pretendard"/>
               </a:rPr>
               <a:t>모니터링 / 포렌식 2탭</a:t>
             </a:r>
@@ -24991,8 +24891,8 @@
                 <a:solidFill>
                   <a:srgbClr val="1F2A44"/>
                 </a:solidFill>
-                <a:latin typeface="맑은 고딕"/>
-                <a:ea typeface="맑은 고딕"/>
+                <a:latin typeface="Pretendard"/>
+                <a:ea typeface="Pretendard"/>
               </a:rPr>
               <a:t>collect 모드</a:t>
             </a:r>
@@ -25004,8 +24904,8 @@
                 <a:solidFill>
                   <a:srgbClr val="5B667A"/>
                 </a:solidFill>
-                <a:latin typeface="맑은 고딕"/>
-                <a:ea typeface="맑은 고딕"/>
+                <a:latin typeface="Pretendard"/>
+                <a:ea typeface="Pretendard"/>
               </a:rPr>
               <a:t>$MFT · 하이브 · evtx · Prefetch</a:t>
             </a:r>
@@ -25225,8 +25125,8 @@
                 <a:solidFill>
                   <a:srgbClr val="1F2A44"/>
                 </a:solidFill>
-                <a:latin typeface="맑은 고딕"/>
-                <a:ea typeface="맑은 고딕"/>
+                <a:latin typeface="Pretendard"/>
+                <a:ea typeface="Pretendard"/>
               </a:rPr>
               <a:t>Sysmon 14개 이벤트 기준 자체 채점 — 5 커버 · 3 부분 · 6 미커버</a:t>
             </a:r>
@@ -25238,8 +25138,8 @@
                 <a:solidFill>
                   <a:srgbClr val="5B667A"/>
                 </a:solidFill>
-                <a:latin typeface="맑은 고딕"/>
-                <a:ea typeface="맑은 고딕"/>
+                <a:latin typeface="Pretendard"/>
+                <a:ea typeface="Pretendard"/>
               </a:rPr>
               <a:t>남은 사각의 핵심: ID 7 모듈 로드 · ID 8 인젝션 · ID 10 lsass 접근</a:t>
             </a:r>
